--- a/courseware/202612_ADS_W14_AI_Literacy_Exam_Recap.pptx
+++ b/courseware/202612_ADS_W14_AI_Literacy_Exam_Recap.pptx
@@ -33,6 +33,7 @@
     <p:sldId id="281" r:id="rId32"/>
     <p:sldId id="282" r:id="rId33"/>
     <p:sldId id="283" r:id="rId34"/>
+    <p:sldId id="284" r:id="rId35"/>
   </p:sldIdLst>
   <p:sldSz cx="12191695" cy="6858000" type="screen4x3"/>
   <p:notesSz cx="6858000" cy="9144000"/>
@@ -7846,7 +7847,7 @@
                 <a:latin typeface="Segoe UI"/>
                 <a:ea typeface="微软雅黑"/>
               </a:rPr>
-              <a:t>T3 网格中的宝藏（25 分）· 带状态 BFS</a:t>
+              <a:t>T3 网格中的宝藏（25 分）· 带状态 BFS（1/2）：定位与初始化</a:t>
             </a:r>
           </a:p>
         </p:txBody>
@@ -7904,7 +7905,7 @@
         <p:spPr>
           <a:xfrm>
             <a:off x="566928" y="1298448"/>
-            <a:ext cx="11057839" cy="4864608"/>
+            <a:ext cx="11057839" cy="3094355"/>
           </a:xfrm>
           <a:prstGeom prst="rect">
             <a:avLst/>
@@ -7950,7 +7951,7 @@
         <p:spPr>
           <a:xfrm>
             <a:off x="822960" y="1399032"/>
-            <a:ext cx="10545775" cy="4663440"/>
+            <a:ext cx="10545775" cy="2893187"/>
           </a:xfrm>
           <a:prstGeom prst="rect">
             <a:avLst/>
@@ -7965,17 +7966,17 @@
           <a:p>
             <a:pPr algn="l">
               <a:lnSpc>
-                <a:spcPts val="1105"/>
-              </a:lnSpc>
-              <a:spcBef>
-                <a:spcPts val="0"/>
-              </a:spcBef>
-              <a:spcAft>
-                <a:spcPts val="0"/>
-              </a:spcAft>
-            </a:pPr>
-            <a:r>
-              <a:rPr sz="850" b="0" i="0">
+                <a:spcPts val="2015"/>
+              </a:lnSpc>
+              <a:spcBef>
+                <a:spcPts val="0"/>
+              </a:spcBef>
+              <a:spcAft>
+                <a:spcPts val="0"/>
+              </a:spcAft>
+            </a:pPr>
+            <a:r>
+              <a:rPr sz="1550" b="0" i="0">
                 <a:solidFill>
                   <a:srgbClr val="242A33"/>
                 </a:solidFill>
@@ -7988,17 +7989,17 @@
           <a:p>
             <a:pPr algn="l">
               <a:lnSpc>
-                <a:spcPts val="1105"/>
-              </a:lnSpc>
-              <a:spcBef>
-                <a:spcPts val="0"/>
-              </a:spcBef>
-              <a:spcAft>
-                <a:spcPts val="0"/>
-              </a:spcAft>
-            </a:pPr>
-            <a:r>
-              <a:rPr sz="850" b="0" i="0">
+                <a:spcPts val="2015"/>
+              </a:lnSpc>
+              <a:spcBef>
+                <a:spcPts val="0"/>
+              </a:spcBef>
+              <a:spcAft>
+                <a:spcPts val="0"/>
+              </a:spcAft>
+            </a:pPr>
+            <a:r>
+              <a:rPr sz="1550" b="0" i="0">
                 <a:solidFill>
                   <a:srgbClr val="242A33"/>
                 </a:solidFill>
@@ -8011,17 +8012,17 @@
           <a:p>
             <a:pPr algn="l">
               <a:lnSpc>
-                <a:spcPts val="1105"/>
-              </a:lnSpc>
-              <a:spcBef>
-                <a:spcPts val="0"/>
-              </a:spcBef>
-              <a:spcAft>
-                <a:spcPts val="0"/>
-              </a:spcAft>
-            </a:pPr>
-            <a:r>
-              <a:rPr sz="850" b="0" i="0">
+                <a:spcPts val="2015"/>
+              </a:lnSpc>
+              <a:spcBef>
+                <a:spcPts val="0"/>
+              </a:spcBef>
+              <a:spcAft>
+                <a:spcPts val="0"/>
+              </a:spcAft>
+            </a:pPr>
+            <a:r>
+              <a:rPr sz="1550" b="0" i="0">
                 <a:solidFill>
                   <a:srgbClr val="242A33"/>
                 </a:solidFill>
@@ -8034,17 +8035,17 @@
           <a:p>
             <a:pPr algn="l">
               <a:lnSpc>
-                <a:spcPts val="1105"/>
-              </a:lnSpc>
-              <a:spcBef>
-                <a:spcPts val="0"/>
-              </a:spcBef>
-              <a:spcAft>
-                <a:spcPts val="0"/>
-              </a:spcAft>
-            </a:pPr>
-            <a:r>
-              <a:rPr sz="850" b="0" i="0">
+                <a:spcPts val="2015"/>
+              </a:lnSpc>
+              <a:spcBef>
+                <a:spcPts val="0"/>
+              </a:spcBef>
+              <a:spcAft>
+                <a:spcPts val="0"/>
+              </a:spcAft>
+            </a:pPr>
+            <a:r>
+              <a:rPr sz="1550" b="0" i="0">
                 <a:solidFill>
                   <a:srgbClr val="242A33"/>
                 </a:solidFill>
@@ -8057,17 +8058,17 @@
           <a:p>
             <a:pPr algn="l">
               <a:lnSpc>
-                <a:spcPts val="1105"/>
-              </a:lnSpc>
-              <a:spcBef>
-                <a:spcPts val="0"/>
-              </a:spcBef>
-              <a:spcAft>
-                <a:spcPts val="0"/>
-              </a:spcAft>
-            </a:pPr>
-            <a:r>
-              <a:rPr sz="850" b="0" i="0">
+                <a:spcPts val="2015"/>
+              </a:lnSpc>
+              <a:spcBef>
+                <a:spcPts val="0"/>
+              </a:spcBef>
+              <a:spcAft>
+                <a:spcPts val="0"/>
+              </a:spcAft>
+            </a:pPr>
+            <a:r>
+              <a:rPr sz="1550" b="0" i="0">
                 <a:solidFill>
                   <a:srgbClr val="242A33"/>
                 </a:solidFill>
@@ -8080,17 +8081,17 @@
           <a:p>
             <a:pPr algn="l">
               <a:lnSpc>
-                <a:spcPts val="1105"/>
-              </a:lnSpc>
-              <a:spcBef>
-                <a:spcPts val="0"/>
-              </a:spcBef>
-              <a:spcAft>
-                <a:spcPts val="0"/>
-              </a:spcAft>
-            </a:pPr>
-            <a:r>
-              <a:rPr sz="850" b="0" i="0">
+                <a:spcPts val="2015"/>
+              </a:lnSpc>
+              <a:spcBef>
+                <a:spcPts val="0"/>
+              </a:spcBef>
+              <a:spcAft>
+                <a:spcPts val="0"/>
+              </a:spcAft>
+            </a:pPr>
+            <a:r>
+              <a:rPr sz="1550" b="0" i="0">
                 <a:solidFill>
                   <a:srgbClr val="242A33"/>
                 </a:solidFill>
@@ -8103,17 +8104,17 @@
           <a:p>
             <a:pPr algn="l">
               <a:lnSpc>
-                <a:spcPts val="1105"/>
-              </a:lnSpc>
-              <a:spcBef>
-                <a:spcPts val="0"/>
-              </a:spcBef>
-              <a:spcAft>
-                <a:spcPts val="0"/>
-              </a:spcAft>
-            </a:pPr>
-            <a:r>
-              <a:rPr sz="850" b="0" i="0">
+                <a:spcPts val="2015"/>
+              </a:lnSpc>
+              <a:spcBef>
+                <a:spcPts val="0"/>
+              </a:spcBef>
+              <a:spcAft>
+                <a:spcPts val="0"/>
+              </a:spcAft>
+            </a:pPr>
+            <a:r>
+              <a:rPr sz="1550" b="0" i="0">
                 <a:solidFill>
                   <a:srgbClr val="242A33"/>
                 </a:solidFill>
@@ -8126,17 +8127,17 @@
           <a:p>
             <a:pPr algn="l">
               <a:lnSpc>
-                <a:spcPts val="1105"/>
-              </a:lnSpc>
-              <a:spcBef>
-                <a:spcPts val="0"/>
-              </a:spcBef>
-              <a:spcAft>
-                <a:spcPts val="0"/>
-              </a:spcAft>
-            </a:pPr>
-            <a:r>
-              <a:rPr sz="850" b="0" i="0">
+                <a:spcPts val="2015"/>
+              </a:lnSpc>
+              <a:spcBef>
+                <a:spcPts val="0"/>
+              </a:spcBef>
+              <a:spcAft>
+                <a:spcPts val="0"/>
+              </a:spcAft>
+            </a:pPr>
+            <a:r>
+              <a:rPr sz="1550" b="0" i="0">
                 <a:solidFill>
                   <a:srgbClr val="242A33"/>
                 </a:solidFill>
@@ -8149,17 +8150,17 @@
           <a:p>
             <a:pPr algn="l">
               <a:lnSpc>
-                <a:spcPts val="1105"/>
-              </a:lnSpc>
-              <a:spcBef>
-                <a:spcPts val="0"/>
-              </a:spcBef>
-              <a:spcAft>
-                <a:spcPts val="0"/>
-              </a:spcAft>
-            </a:pPr>
-            <a:r>
-              <a:rPr sz="850" b="0" i="0">
+                <a:spcPts val="2015"/>
+              </a:lnSpc>
+              <a:spcBef>
+                <a:spcPts val="0"/>
+              </a:spcBef>
+              <a:spcAft>
+                <a:spcPts val="0"/>
+              </a:spcAft>
+            </a:pPr>
+            <a:r>
+              <a:rPr sz="1550" b="0" i="0">
                 <a:solidFill>
                   <a:srgbClr val="242A33"/>
                 </a:solidFill>
@@ -8172,17 +8173,17 @@
           <a:p>
             <a:pPr algn="l">
               <a:lnSpc>
-                <a:spcPts val="1105"/>
-              </a:lnSpc>
-              <a:spcBef>
-                <a:spcPts val="0"/>
-              </a:spcBef>
-              <a:spcAft>
-                <a:spcPts val="0"/>
-              </a:spcAft>
-            </a:pPr>
-            <a:r>
-              <a:rPr sz="850" b="0" i="0">
+                <a:spcPts val="2015"/>
+              </a:lnSpc>
+              <a:spcBef>
+                <a:spcPts val="0"/>
+              </a:spcBef>
+              <a:spcAft>
+                <a:spcPts val="0"/>
+              </a:spcAft>
+            </a:pPr>
+            <a:r>
+              <a:rPr sz="1550" b="0" i="0">
                 <a:solidFill>
                   <a:srgbClr val="242A33"/>
                 </a:solidFill>
@@ -8195,17 +8196,17 @@
           <a:p>
             <a:pPr algn="l">
               <a:lnSpc>
-                <a:spcPts val="1105"/>
-              </a:lnSpc>
-              <a:spcBef>
-                <a:spcPts val="0"/>
-              </a:spcBef>
-              <a:spcAft>
-                <a:spcPts val="0"/>
-              </a:spcAft>
-            </a:pPr>
-            <a:r>
-              <a:rPr sz="850" b="0" i="0">
+                <a:spcPts val="2015"/>
+              </a:lnSpc>
+              <a:spcBef>
+                <a:spcPts val="0"/>
+              </a:spcBef>
+              <a:spcAft>
+                <a:spcPts val="0"/>
+              </a:spcAft>
+            </a:pPr>
+            <a:r>
+              <a:rPr sz="1550" b="0" i="0">
                 <a:solidFill>
                   <a:srgbClr val="242A33"/>
                 </a:solidFill>
@@ -8215,517 +8216,54 @@
               <a:t>            elif grid[i][j] == 'T': tx, ty = i, j</a:t>
             </a:r>
           </a:p>
-          <a:p>
-            <a:pPr algn="l">
-              <a:lnSpc>
-                <a:spcPts val="1105"/>
-              </a:lnSpc>
-              <a:spcBef>
-                <a:spcPts val="0"/>
-              </a:spcBef>
-              <a:spcAft>
-                <a:spcPts val="0"/>
-              </a:spcAft>
-            </a:pPr>
-            <a:r>
-              <a:rPr sz="850" b="0" i="0">
-                <a:solidFill>
-                  <a:srgbClr val="242A33"/>
-                </a:solidFill>
-                <a:latin typeface="Consolas"/>
-                <a:ea typeface="Consolas"/>
-              </a:rPr>
-              <a:t>    DIRS = ((-1, 0), (1, 0), (0, -1), (0, 1))</a:t>
-            </a:r>
-          </a:p>
-          <a:p>
-            <a:pPr algn="l">
-              <a:lnSpc>
-                <a:spcPts val="1105"/>
-              </a:lnSpc>
-              <a:spcBef>
-                <a:spcPts val="0"/>
-              </a:spcBef>
-              <a:spcAft>
-                <a:spcPts val="0"/>
-              </a:spcAft>
-            </a:pPr>
-            <a:r>
-              <a:rPr sz="850" b="0" i="0">
-                <a:solidFill>
-                  <a:srgbClr val="242A33"/>
-                </a:solidFill>
-                <a:latin typeface="Consolas"/>
-                <a:ea typeface="Consolas"/>
-              </a:rPr>
-              <a:t>    dist = [[[-1] * m for _ in range(n)] for _ in range(2)]</a:t>
-            </a:r>
-          </a:p>
-          <a:p>
-            <a:pPr algn="l">
-              <a:lnSpc>
-                <a:spcPts val="1105"/>
-              </a:lnSpc>
-              <a:spcBef>
-                <a:spcPts val="0"/>
-              </a:spcBef>
-              <a:spcAft>
-                <a:spcPts val="0"/>
-              </a:spcAft>
-            </a:pPr>
-            <a:r>
-              <a:rPr sz="850" b="0" i="0">
-                <a:solidFill>
-                  <a:srgbClr val="242A33"/>
-                </a:solidFill>
-                <a:latin typeface="Consolas"/>
-                <a:ea typeface="Consolas"/>
-              </a:rPr>
-              <a:t>    start_key = 1 if grid[sx][sy] == 'K' else 0</a:t>
-            </a:r>
-          </a:p>
-          <a:p>
-            <a:pPr algn="l">
-              <a:lnSpc>
-                <a:spcPts val="1105"/>
-              </a:lnSpc>
-              <a:spcBef>
-                <a:spcPts val="0"/>
-              </a:spcBef>
-              <a:spcAft>
-                <a:spcPts val="0"/>
-              </a:spcAft>
-            </a:pPr>
-            <a:r>
-              <a:rPr sz="850" b="0" i="0">
-                <a:solidFill>
-                  <a:srgbClr val="242A33"/>
-                </a:solidFill>
-                <a:latin typeface="Consolas"/>
-                <a:ea typeface="Consolas"/>
-              </a:rPr>
-              <a:t>    dist[start_key][sx][sy] = 0</a:t>
-            </a:r>
-          </a:p>
-          <a:p>
-            <a:pPr algn="l">
-              <a:lnSpc>
-                <a:spcPts val="1105"/>
-              </a:lnSpc>
-              <a:spcBef>
-                <a:spcPts val="0"/>
-              </a:spcBef>
-              <a:spcAft>
-                <a:spcPts val="0"/>
-              </a:spcAft>
-            </a:pPr>
-            <a:r>
-              <a:rPr sz="850" b="0" i="0">
-                <a:solidFill>
-                  <a:srgbClr val="242A33"/>
-                </a:solidFill>
-                <a:latin typeface="Consolas"/>
-                <a:ea typeface="Consolas"/>
-              </a:rPr>
-              <a:t>    q = deque([(sx, sy, start_key)])</a:t>
-            </a:r>
-          </a:p>
-          <a:p>
-            <a:pPr algn="l">
-              <a:lnSpc>
-                <a:spcPts val="1105"/>
-              </a:lnSpc>
-              <a:spcBef>
-                <a:spcPts val="0"/>
-              </a:spcBef>
-              <a:spcAft>
-                <a:spcPts val="0"/>
-              </a:spcAft>
-            </a:pPr>
-            <a:r>
-              <a:rPr sz="850" b="0" i="0">
-                <a:solidFill>
-                  <a:srgbClr val="242A33"/>
-                </a:solidFill>
-                <a:latin typeface="Consolas"/>
-                <a:ea typeface="Consolas"/>
-              </a:rPr>
-              <a:t>    while q:</a:t>
-            </a:r>
-          </a:p>
-          <a:p>
-            <a:pPr algn="l">
-              <a:lnSpc>
-                <a:spcPts val="1105"/>
-              </a:lnSpc>
-              <a:spcBef>
-                <a:spcPts val="0"/>
-              </a:spcBef>
-              <a:spcAft>
-                <a:spcPts val="0"/>
-              </a:spcAft>
-            </a:pPr>
-            <a:r>
-              <a:rPr sz="850" b="0" i="0">
-                <a:solidFill>
-                  <a:srgbClr val="242A33"/>
-                </a:solidFill>
-                <a:latin typeface="Consolas"/>
-                <a:ea typeface="Consolas"/>
-              </a:rPr>
-              <a:t>        x, y, k = q.popleft()</a:t>
-            </a:r>
-          </a:p>
-          <a:p>
-            <a:pPr algn="l">
-              <a:lnSpc>
-                <a:spcPts val="1105"/>
-              </a:lnSpc>
-              <a:spcBef>
-                <a:spcPts val="0"/>
-              </a:spcBef>
-              <a:spcAft>
-                <a:spcPts val="0"/>
-              </a:spcAft>
-            </a:pPr>
-            <a:r>
-              <a:rPr sz="850" b="0" i="0">
-                <a:solidFill>
-                  <a:srgbClr val="242A33"/>
-                </a:solidFill>
-                <a:latin typeface="Consolas"/>
-                <a:ea typeface="Consolas"/>
-              </a:rPr>
-              <a:t>        if (x, y) == (tx, ty):</a:t>
-            </a:r>
-          </a:p>
-          <a:p>
-            <a:pPr algn="l">
-              <a:lnSpc>
-                <a:spcPts val="1105"/>
-              </a:lnSpc>
-              <a:spcBef>
-                <a:spcPts val="0"/>
-              </a:spcBef>
-              <a:spcAft>
-                <a:spcPts val="0"/>
-              </a:spcAft>
-            </a:pPr>
-            <a:r>
-              <a:rPr sz="850" b="0" i="0">
-                <a:solidFill>
-                  <a:srgbClr val="242A33"/>
-                </a:solidFill>
-                <a:latin typeface="Consolas"/>
-                <a:ea typeface="Consolas"/>
-              </a:rPr>
-              <a:t>            return dist[k][x][y]</a:t>
-            </a:r>
-          </a:p>
-          <a:p>
-            <a:pPr algn="l">
-              <a:lnSpc>
-                <a:spcPts val="1105"/>
-              </a:lnSpc>
-              <a:spcBef>
-                <a:spcPts val="0"/>
-              </a:spcBef>
-              <a:spcAft>
-                <a:spcPts val="0"/>
-              </a:spcAft>
-            </a:pPr>
-            <a:r>
-              <a:rPr sz="850" b="0" i="0">
-                <a:solidFill>
-                  <a:srgbClr val="242A33"/>
-                </a:solidFill>
-                <a:latin typeface="Consolas"/>
-                <a:ea typeface="Consolas"/>
-              </a:rPr>
-              <a:t>        for dx, dy in DIRS:</a:t>
-            </a:r>
-          </a:p>
-          <a:p>
-            <a:pPr algn="l">
-              <a:lnSpc>
-                <a:spcPts val="1105"/>
-              </a:lnSpc>
-              <a:spcBef>
-                <a:spcPts val="0"/>
-              </a:spcBef>
-              <a:spcAft>
-                <a:spcPts val="0"/>
-              </a:spcAft>
-            </a:pPr>
-            <a:r>
-              <a:rPr sz="850" b="0" i="0">
-                <a:solidFill>
-                  <a:srgbClr val="242A33"/>
-                </a:solidFill>
-                <a:latin typeface="Consolas"/>
-                <a:ea typeface="Consolas"/>
-              </a:rPr>
-              <a:t>            nx, ny = x + dx, y + dy</a:t>
-            </a:r>
-          </a:p>
-          <a:p>
-            <a:pPr algn="l">
-              <a:lnSpc>
-                <a:spcPts val="1105"/>
-              </a:lnSpc>
-              <a:spcBef>
-                <a:spcPts val="0"/>
-              </a:spcBef>
-              <a:spcAft>
-                <a:spcPts val="0"/>
-              </a:spcAft>
-            </a:pPr>
-            <a:r>
-              <a:rPr sz="850" b="0" i="0">
-                <a:solidFill>
-                  <a:srgbClr val="242A33"/>
-                </a:solidFill>
-                <a:latin typeface="Consolas"/>
-                <a:ea typeface="Consolas"/>
-              </a:rPr>
-              <a:t>            if not (0 &lt;= nx &lt; n and 0 &lt;= ny &lt; m):</a:t>
-            </a:r>
-          </a:p>
-          <a:p>
-            <a:pPr algn="l">
-              <a:lnSpc>
-                <a:spcPts val="1105"/>
-              </a:lnSpc>
-              <a:spcBef>
-                <a:spcPts val="0"/>
-              </a:spcBef>
-              <a:spcAft>
-                <a:spcPts val="0"/>
-              </a:spcAft>
-            </a:pPr>
-            <a:r>
-              <a:rPr sz="850" b="0" i="0">
-                <a:solidFill>
-                  <a:srgbClr val="242A33"/>
-                </a:solidFill>
-                <a:latin typeface="Consolas"/>
-                <a:ea typeface="Consolas"/>
-              </a:rPr>
-              <a:t>                continue</a:t>
-            </a:r>
-          </a:p>
-          <a:p>
-            <a:pPr algn="l">
-              <a:lnSpc>
-                <a:spcPts val="1105"/>
-              </a:lnSpc>
-              <a:spcBef>
-                <a:spcPts val="0"/>
-              </a:spcBef>
-              <a:spcAft>
-                <a:spcPts val="0"/>
-              </a:spcAft>
-            </a:pPr>
-            <a:r>
-              <a:rPr sz="850" b="0" i="0">
-                <a:solidFill>
-                  <a:srgbClr val="242A33"/>
-                </a:solidFill>
-                <a:latin typeface="Consolas"/>
-                <a:ea typeface="Consolas"/>
-              </a:rPr>
-              <a:t>            cell = grid[nx][ny]</a:t>
-            </a:r>
-          </a:p>
-          <a:p>
-            <a:pPr algn="l">
-              <a:lnSpc>
-                <a:spcPts val="1105"/>
-              </a:lnSpc>
-              <a:spcBef>
-                <a:spcPts val="0"/>
-              </a:spcBef>
-              <a:spcAft>
-                <a:spcPts val="0"/>
-              </a:spcAft>
-            </a:pPr>
-            <a:r>
-              <a:rPr sz="850" b="0" i="0">
-                <a:solidFill>
-                  <a:srgbClr val="242A33"/>
-                </a:solidFill>
-                <a:latin typeface="Consolas"/>
-                <a:ea typeface="Consolas"/>
-              </a:rPr>
-              <a:t>            if cell == '#' or (cell == 'D' and k == 0):</a:t>
-            </a:r>
-          </a:p>
-          <a:p>
-            <a:pPr algn="l">
-              <a:lnSpc>
-                <a:spcPts val="1105"/>
-              </a:lnSpc>
-              <a:spcBef>
-                <a:spcPts val="0"/>
-              </a:spcBef>
-              <a:spcAft>
-                <a:spcPts val="0"/>
-              </a:spcAft>
-            </a:pPr>
-            <a:r>
-              <a:rPr sz="850" b="0" i="0">
-                <a:solidFill>
-                  <a:srgbClr val="242A33"/>
-                </a:solidFill>
-                <a:latin typeface="Consolas"/>
-                <a:ea typeface="Consolas"/>
-              </a:rPr>
-              <a:t>                continue</a:t>
-            </a:r>
-          </a:p>
-          <a:p>
-            <a:pPr algn="l">
-              <a:lnSpc>
-                <a:spcPts val="1105"/>
-              </a:lnSpc>
-              <a:spcBef>
-                <a:spcPts val="0"/>
-              </a:spcBef>
-              <a:spcAft>
-                <a:spcPts val="0"/>
-              </a:spcAft>
-            </a:pPr>
-            <a:r>
-              <a:rPr sz="850" b="0" i="0">
-                <a:solidFill>
-                  <a:srgbClr val="242A33"/>
-                </a:solidFill>
-                <a:latin typeface="Consolas"/>
-                <a:ea typeface="Consolas"/>
-              </a:rPr>
-              <a:t>            nk = 1 if cell == 'K' else k       # 踩到钥匙就拿上</a:t>
-            </a:r>
-          </a:p>
-          <a:p>
-            <a:pPr algn="l">
-              <a:lnSpc>
-                <a:spcPts val="1105"/>
-              </a:lnSpc>
-              <a:spcBef>
-                <a:spcPts val="0"/>
-              </a:spcBef>
-              <a:spcAft>
-                <a:spcPts val="0"/>
-              </a:spcAft>
-            </a:pPr>
-            <a:r>
-              <a:rPr sz="850" b="0" i="0">
-                <a:solidFill>
-                  <a:srgbClr val="242A33"/>
-                </a:solidFill>
-                <a:latin typeface="Consolas"/>
-                <a:ea typeface="Consolas"/>
-              </a:rPr>
-              <a:t>            if dist[nk][nx][ny] &gt;= 0:</a:t>
-            </a:r>
-          </a:p>
-          <a:p>
-            <a:pPr algn="l">
-              <a:lnSpc>
-                <a:spcPts val="1105"/>
-              </a:lnSpc>
-              <a:spcBef>
-                <a:spcPts val="0"/>
-              </a:spcBef>
-              <a:spcAft>
-                <a:spcPts val="0"/>
-              </a:spcAft>
-            </a:pPr>
-            <a:r>
-              <a:rPr sz="850" b="0" i="0">
-                <a:solidFill>
-                  <a:srgbClr val="242A33"/>
-                </a:solidFill>
-                <a:latin typeface="Consolas"/>
-                <a:ea typeface="Consolas"/>
-              </a:rPr>
-              <a:t>                continue</a:t>
-            </a:r>
-          </a:p>
-          <a:p>
-            <a:pPr algn="l">
-              <a:lnSpc>
-                <a:spcPts val="1105"/>
-              </a:lnSpc>
-              <a:spcBef>
-                <a:spcPts val="0"/>
-              </a:spcBef>
-              <a:spcAft>
-                <a:spcPts val="0"/>
-              </a:spcAft>
-            </a:pPr>
-            <a:r>
-              <a:rPr sz="850" b="0" i="0">
-                <a:solidFill>
-                  <a:srgbClr val="242A33"/>
-                </a:solidFill>
-                <a:latin typeface="Consolas"/>
-                <a:ea typeface="Consolas"/>
-              </a:rPr>
-              <a:t>            dist[nk][nx][ny] = dist[k][x][y] + 1</a:t>
-            </a:r>
-          </a:p>
-          <a:p>
-            <a:pPr algn="l">
-              <a:lnSpc>
-                <a:spcPts val="1105"/>
-              </a:lnSpc>
-              <a:spcBef>
-                <a:spcPts val="0"/>
-              </a:spcBef>
-              <a:spcAft>
-                <a:spcPts val="0"/>
-              </a:spcAft>
-            </a:pPr>
-            <a:r>
-              <a:rPr sz="850" b="0" i="0">
-                <a:solidFill>
-                  <a:srgbClr val="242A33"/>
-                </a:solidFill>
-                <a:latin typeface="Consolas"/>
-                <a:ea typeface="Consolas"/>
-              </a:rPr>
-              <a:t>            q.append((nx, ny, nk))</a:t>
-            </a:r>
-          </a:p>
-          <a:p>
-            <a:pPr algn="l">
-              <a:lnSpc>
-                <a:spcPts val="1105"/>
-              </a:lnSpc>
-              <a:spcBef>
-                <a:spcPts val="0"/>
-              </a:spcBef>
-              <a:spcAft>
-                <a:spcPts val="0"/>
-              </a:spcAft>
-            </a:pPr>
-            <a:r>
-              <a:rPr sz="850" b="0" i="0">
-                <a:solidFill>
-                  <a:srgbClr val="242A33"/>
-                </a:solidFill>
-                <a:latin typeface="Consolas"/>
-                <a:ea typeface="Consolas"/>
-              </a:rPr>
-              <a:t>    return -1</a:t>
-            </a:r>
-          </a:p>
         </p:txBody>
       </p:sp>
       <p:sp>
         <p:nvSpPr>
           <p:cNvPr id="6" name="TextBox 5"/>
+          <p:cNvSpPr txBox="1"/>
+          <p:nvPr/>
+        </p:nvSpPr>
+        <p:spPr>
+          <a:xfrm>
+            <a:off x="566928" y="4511675"/>
+            <a:ext cx="11057839" cy="329184"/>
+          </a:xfrm>
+          <a:prstGeom prst="rect">
+            <a:avLst/>
+          </a:prstGeom>
+          <a:noFill/>
+        </p:spPr>
+        <p:txBody>
+          <a:bodyPr wrap="square" lIns="0" rIns="0" tIns="0" bIns="0">
+            <a:noAutofit/>
+          </a:bodyPr>
+          <a:lstStyle/>
+          <a:p>
+            <a:pPr algn="l">
+              <a:spcBef>
+                <a:spcPts val="0"/>
+              </a:spcBef>
+              <a:spcAft>
+                <a:spcPts val="0"/>
+              </a:spcAft>
+            </a:pPr>
+            <a:r>
+              <a:rPr sz="1300" b="0" i="0">
+                <a:solidFill>
+                  <a:srgbClr val="6B7582"/>
+                </a:solidFill>
+                <a:latin typeface="Segoe UI"/>
+                <a:ea typeface="微软雅黑"/>
+              </a:rPr>
+              <a:t>状态是 (x, y, 是否已拿到钥匙) —— 两层网格</a:t>
+            </a:r>
+          </a:p>
+        </p:txBody>
+      </p:sp>
+      <p:sp>
+        <p:nvSpPr>
+          <p:cNvPr id="7" name="TextBox 6"/>
           <p:cNvSpPr txBox="1"/>
           <p:nvPr/>
         </p:nvSpPr>
@@ -8768,7 +8306,7 @@
       </p:sp>
       <p:sp>
         <p:nvSpPr>
-          <p:cNvPr id="7" name="TextBox 6"/>
+          <p:cNvPr id="8" name="TextBox 7"/>
           <p:cNvSpPr txBox="1"/>
           <p:nvPr/>
         </p:nvSpPr>
@@ -8987,6 +8525,815 @@
 </file>
 
 <file path=ppt/slides/slide20.xml><?xml version="1.0" encoding="utf-8"?>
+<p:sld xmlns:a="http://schemas.openxmlformats.org/drawingml/2006/main" xmlns:p="http://schemas.openxmlformats.org/presentationml/2006/main" xmlns:r="http://schemas.openxmlformats.org/officeDocument/2006/relationships">
+  <p:cSld>
+    <p:spTree>
+      <p:nvGrpSpPr>
+        <p:cNvPr id="1" name=""/>
+        <p:cNvGrpSpPr/>
+        <p:nvPr/>
+      </p:nvGrpSpPr>
+      <p:grpSpPr/>
+      <p:sp>
+        <p:nvSpPr>
+          <p:cNvPr id="2" name="TextBox 1"/>
+          <p:cNvSpPr txBox="1"/>
+          <p:nvPr/>
+        </p:nvSpPr>
+        <p:spPr>
+          <a:xfrm>
+            <a:off x="566928" y="420624"/>
+            <a:ext cx="11057839" cy="548640"/>
+          </a:xfrm>
+          <a:prstGeom prst="rect">
+            <a:avLst/>
+          </a:prstGeom>
+          <a:noFill/>
+        </p:spPr>
+        <p:txBody>
+          <a:bodyPr wrap="square" lIns="0" rIns="0" tIns="0" bIns="0">
+            <a:noAutofit/>
+          </a:bodyPr>
+          <a:lstStyle/>
+          <a:p>
+            <a:pPr algn="l">
+              <a:spcBef>
+                <a:spcPts val="0"/>
+              </a:spcBef>
+              <a:spcAft>
+                <a:spcPts val="0"/>
+              </a:spcAft>
+            </a:pPr>
+            <a:r>
+              <a:rPr sz="2600" b="1" i="0">
+                <a:solidFill>
+                  <a:srgbClr val="12395B"/>
+                </a:solidFill>
+                <a:latin typeface="Segoe UI"/>
+                <a:ea typeface="微软雅黑"/>
+              </a:rPr>
+              <a:t>T3 网格中的宝藏（2/2）：主循环</a:t>
+            </a:r>
+          </a:p>
+        </p:txBody>
+      </p:sp>
+      <p:sp>
+        <p:nvSpPr>
+          <p:cNvPr id="3" name="Rectangle 2"/>
+          <p:cNvSpPr/>
+          <p:nvPr/>
+        </p:nvSpPr>
+        <p:spPr>
+          <a:xfrm>
+            <a:off x="566928" y="1060704"/>
+            <a:ext cx="960120" cy="40640"/>
+          </a:xfrm>
+          <a:prstGeom prst="rect">
+            <a:avLst/>
+          </a:prstGeom>
+          <a:solidFill>
+            <a:srgbClr val="E07B39"/>
+          </a:solidFill>
+          <a:ln>
+            <a:noFill/>
+          </a:ln>
+          <a:effectLst/>
+        </p:spPr>
+        <p:style>
+          <a:lnRef idx="1">
+            <a:schemeClr val="accent1"/>
+          </a:lnRef>
+          <a:fillRef idx="3">
+            <a:schemeClr val="accent1"/>
+          </a:fillRef>
+          <a:effectRef idx="2">
+            <a:schemeClr val="accent1"/>
+          </a:effectRef>
+          <a:fontRef idx="minor">
+            <a:schemeClr val="lt1"/>
+          </a:fontRef>
+        </p:style>
+        <p:txBody>
+          <a:bodyPr rtlCol="0" anchor="ctr"/>
+          <a:lstStyle/>
+          <a:p>
+            <a:pPr algn="ctr"/>
+          </a:p>
+        </p:txBody>
+      </p:sp>
+      <p:sp>
+        <p:nvSpPr>
+          <p:cNvPr id="4" name="Rectangle 3"/>
+          <p:cNvSpPr/>
+          <p:nvPr/>
+        </p:nvSpPr>
+        <p:spPr>
+          <a:xfrm>
+            <a:off x="566928" y="1298448"/>
+            <a:ext cx="11057839" cy="4443984"/>
+          </a:xfrm>
+          <a:prstGeom prst="rect">
+            <a:avLst/>
+          </a:prstGeom>
+          <a:solidFill>
+            <a:srgbClr val="F6F7F9"/>
+          </a:solidFill>
+          <a:ln w="9525">
+            <a:solidFill>
+              <a:srgbClr val="D6DCE4"/>
+            </a:solidFill>
+          </a:ln>
+          <a:effectLst/>
+        </p:spPr>
+        <p:style>
+          <a:lnRef idx="1">
+            <a:schemeClr val="accent1"/>
+          </a:lnRef>
+          <a:fillRef idx="3">
+            <a:schemeClr val="accent1"/>
+          </a:fillRef>
+          <a:effectRef idx="2">
+            <a:schemeClr val="accent1"/>
+          </a:effectRef>
+          <a:fontRef idx="minor">
+            <a:schemeClr val="lt1"/>
+          </a:fontRef>
+        </p:style>
+        <p:txBody>
+          <a:bodyPr rtlCol="0" anchor="ctr"/>
+          <a:lstStyle/>
+          <a:p>
+            <a:pPr algn="ctr"/>
+          </a:p>
+        </p:txBody>
+      </p:sp>
+      <p:sp>
+        <p:nvSpPr>
+          <p:cNvPr id="5" name="TextBox 4"/>
+          <p:cNvSpPr txBox="1"/>
+          <p:nvPr/>
+        </p:nvSpPr>
+        <p:spPr>
+          <a:xfrm>
+            <a:off x="822960" y="1399032"/>
+            <a:ext cx="10545775" cy="4242816"/>
+          </a:xfrm>
+          <a:prstGeom prst="rect">
+            <a:avLst/>
+          </a:prstGeom>
+          <a:noFill/>
+        </p:spPr>
+        <p:txBody>
+          <a:bodyPr wrap="square" lIns="0" rIns="0" tIns="0" bIns="0">
+            <a:noAutofit/>
+          </a:bodyPr>
+          <a:lstStyle/>
+          <a:p>
+            <a:pPr algn="l">
+              <a:lnSpc>
+                <a:spcPts val="1490"/>
+              </a:lnSpc>
+              <a:spcBef>
+                <a:spcPts val="0"/>
+              </a:spcBef>
+              <a:spcAft>
+                <a:spcPts val="0"/>
+              </a:spcAft>
+            </a:pPr>
+            <a:r>
+              <a:rPr sz="1146" b="0" i="0">
+                <a:solidFill>
+                  <a:srgbClr val="242A33"/>
+                </a:solidFill>
+                <a:latin typeface="Consolas"/>
+                <a:ea typeface="Consolas"/>
+              </a:rPr>
+              <a:t>    DIRS = ((-1, 0), (1, 0), (0, -1), (0, 1))</a:t>
+            </a:r>
+          </a:p>
+          <a:p>
+            <a:pPr algn="l">
+              <a:lnSpc>
+                <a:spcPts val="1490"/>
+              </a:lnSpc>
+              <a:spcBef>
+                <a:spcPts val="0"/>
+              </a:spcBef>
+              <a:spcAft>
+                <a:spcPts val="0"/>
+              </a:spcAft>
+            </a:pPr>
+            <a:r>
+              <a:rPr sz="1146" b="0" i="0">
+                <a:solidFill>
+                  <a:srgbClr val="242A33"/>
+                </a:solidFill>
+                <a:latin typeface="Consolas"/>
+                <a:ea typeface="Consolas"/>
+              </a:rPr>
+              <a:t>    dist = [[[-1] * m for _ in range(n)] for _ in range(2)]</a:t>
+            </a:r>
+          </a:p>
+          <a:p>
+            <a:pPr algn="l">
+              <a:lnSpc>
+                <a:spcPts val="1490"/>
+              </a:lnSpc>
+              <a:spcBef>
+                <a:spcPts val="0"/>
+              </a:spcBef>
+              <a:spcAft>
+                <a:spcPts val="0"/>
+              </a:spcAft>
+            </a:pPr>
+            <a:r>
+              <a:rPr sz="1146" b="0" i="0">
+                <a:solidFill>
+                  <a:srgbClr val="242A33"/>
+                </a:solidFill>
+                <a:latin typeface="Consolas"/>
+                <a:ea typeface="Consolas"/>
+              </a:rPr>
+              <a:t>    start_key = 1 if grid[sx][sy] == 'K' else 0</a:t>
+            </a:r>
+          </a:p>
+          <a:p>
+            <a:pPr algn="l">
+              <a:lnSpc>
+                <a:spcPts val="1490"/>
+              </a:lnSpc>
+              <a:spcBef>
+                <a:spcPts val="0"/>
+              </a:spcBef>
+              <a:spcAft>
+                <a:spcPts val="0"/>
+              </a:spcAft>
+            </a:pPr>
+            <a:r>
+              <a:rPr sz="1146" b="0" i="0">
+                <a:solidFill>
+                  <a:srgbClr val="242A33"/>
+                </a:solidFill>
+                <a:latin typeface="Consolas"/>
+                <a:ea typeface="Consolas"/>
+              </a:rPr>
+              <a:t>    dist[start_key][sx][sy] = 0</a:t>
+            </a:r>
+          </a:p>
+          <a:p>
+            <a:pPr algn="l">
+              <a:lnSpc>
+                <a:spcPts val="1490"/>
+              </a:lnSpc>
+              <a:spcBef>
+                <a:spcPts val="0"/>
+              </a:spcBef>
+              <a:spcAft>
+                <a:spcPts val="0"/>
+              </a:spcAft>
+            </a:pPr>
+            <a:r>
+              <a:rPr sz="1146" b="0" i="0">
+                <a:solidFill>
+                  <a:srgbClr val="242A33"/>
+                </a:solidFill>
+                <a:latin typeface="Consolas"/>
+                <a:ea typeface="Consolas"/>
+              </a:rPr>
+              <a:t>    q = deque([(sx, sy, start_key)])</a:t>
+            </a:r>
+          </a:p>
+          <a:p>
+            <a:pPr algn="l">
+              <a:lnSpc>
+                <a:spcPts val="1490"/>
+              </a:lnSpc>
+              <a:spcBef>
+                <a:spcPts val="0"/>
+              </a:spcBef>
+              <a:spcAft>
+                <a:spcPts val="0"/>
+              </a:spcAft>
+            </a:pPr>
+            <a:r>
+              <a:rPr sz="1146" b="0" i="0">
+                <a:solidFill>
+                  <a:srgbClr val="242A33"/>
+                </a:solidFill>
+                <a:latin typeface="Consolas"/>
+                <a:ea typeface="Consolas"/>
+              </a:rPr>
+              <a:t>    while q:</a:t>
+            </a:r>
+          </a:p>
+          <a:p>
+            <a:pPr algn="l">
+              <a:lnSpc>
+                <a:spcPts val="1490"/>
+              </a:lnSpc>
+              <a:spcBef>
+                <a:spcPts val="0"/>
+              </a:spcBef>
+              <a:spcAft>
+                <a:spcPts val="0"/>
+              </a:spcAft>
+            </a:pPr>
+            <a:r>
+              <a:rPr sz="1146" b="0" i="0">
+                <a:solidFill>
+                  <a:srgbClr val="242A33"/>
+                </a:solidFill>
+                <a:latin typeface="Consolas"/>
+                <a:ea typeface="Consolas"/>
+              </a:rPr>
+              <a:t>        x, y, k = q.popleft()</a:t>
+            </a:r>
+          </a:p>
+          <a:p>
+            <a:pPr algn="l">
+              <a:lnSpc>
+                <a:spcPts val="1490"/>
+              </a:lnSpc>
+              <a:spcBef>
+                <a:spcPts val="0"/>
+              </a:spcBef>
+              <a:spcAft>
+                <a:spcPts val="0"/>
+              </a:spcAft>
+            </a:pPr>
+            <a:r>
+              <a:rPr sz="1146" b="0" i="0">
+                <a:solidFill>
+                  <a:srgbClr val="242A33"/>
+                </a:solidFill>
+                <a:latin typeface="Consolas"/>
+                <a:ea typeface="Consolas"/>
+              </a:rPr>
+              <a:t>        if (x, y) == (tx, ty):</a:t>
+            </a:r>
+          </a:p>
+          <a:p>
+            <a:pPr algn="l">
+              <a:lnSpc>
+                <a:spcPts val="1490"/>
+              </a:lnSpc>
+              <a:spcBef>
+                <a:spcPts val="0"/>
+              </a:spcBef>
+              <a:spcAft>
+                <a:spcPts val="0"/>
+              </a:spcAft>
+            </a:pPr>
+            <a:r>
+              <a:rPr sz="1146" b="0" i="0">
+                <a:solidFill>
+                  <a:srgbClr val="242A33"/>
+                </a:solidFill>
+                <a:latin typeface="Consolas"/>
+                <a:ea typeface="Consolas"/>
+              </a:rPr>
+              <a:t>            return dist[k][x][y]</a:t>
+            </a:r>
+          </a:p>
+          <a:p>
+            <a:pPr algn="l">
+              <a:lnSpc>
+                <a:spcPts val="1490"/>
+              </a:lnSpc>
+              <a:spcBef>
+                <a:spcPts val="0"/>
+              </a:spcBef>
+              <a:spcAft>
+                <a:spcPts val="0"/>
+              </a:spcAft>
+            </a:pPr>
+            <a:r>
+              <a:rPr sz="1146" b="0" i="0">
+                <a:solidFill>
+                  <a:srgbClr val="242A33"/>
+                </a:solidFill>
+                <a:latin typeface="Consolas"/>
+                <a:ea typeface="Consolas"/>
+              </a:rPr>
+              <a:t>        for dx, dy in DIRS:</a:t>
+            </a:r>
+          </a:p>
+          <a:p>
+            <a:pPr algn="l">
+              <a:lnSpc>
+                <a:spcPts val="1490"/>
+              </a:lnSpc>
+              <a:spcBef>
+                <a:spcPts val="0"/>
+              </a:spcBef>
+              <a:spcAft>
+                <a:spcPts val="0"/>
+              </a:spcAft>
+            </a:pPr>
+            <a:r>
+              <a:rPr sz="1146" b="0" i="0">
+                <a:solidFill>
+                  <a:srgbClr val="242A33"/>
+                </a:solidFill>
+                <a:latin typeface="Consolas"/>
+                <a:ea typeface="Consolas"/>
+              </a:rPr>
+              <a:t>            nx, ny = x + dx, y + dy</a:t>
+            </a:r>
+          </a:p>
+          <a:p>
+            <a:pPr algn="l">
+              <a:lnSpc>
+                <a:spcPts val="1490"/>
+              </a:lnSpc>
+              <a:spcBef>
+                <a:spcPts val="0"/>
+              </a:spcBef>
+              <a:spcAft>
+                <a:spcPts val="0"/>
+              </a:spcAft>
+            </a:pPr>
+            <a:r>
+              <a:rPr sz="1146" b="0" i="0">
+                <a:solidFill>
+                  <a:srgbClr val="242A33"/>
+                </a:solidFill>
+                <a:latin typeface="Consolas"/>
+                <a:ea typeface="Consolas"/>
+              </a:rPr>
+              <a:t>            if not (0 &lt;= nx &lt; n and 0 &lt;= ny &lt; m):</a:t>
+            </a:r>
+          </a:p>
+          <a:p>
+            <a:pPr algn="l">
+              <a:lnSpc>
+                <a:spcPts val="1490"/>
+              </a:lnSpc>
+              <a:spcBef>
+                <a:spcPts val="0"/>
+              </a:spcBef>
+              <a:spcAft>
+                <a:spcPts val="0"/>
+              </a:spcAft>
+            </a:pPr>
+            <a:r>
+              <a:rPr sz="1146" b="0" i="0">
+                <a:solidFill>
+                  <a:srgbClr val="242A33"/>
+                </a:solidFill>
+                <a:latin typeface="Consolas"/>
+                <a:ea typeface="Consolas"/>
+              </a:rPr>
+              <a:t>                continue</a:t>
+            </a:r>
+          </a:p>
+          <a:p>
+            <a:pPr algn="l">
+              <a:lnSpc>
+                <a:spcPts val="1490"/>
+              </a:lnSpc>
+              <a:spcBef>
+                <a:spcPts val="0"/>
+              </a:spcBef>
+              <a:spcAft>
+                <a:spcPts val="0"/>
+              </a:spcAft>
+            </a:pPr>
+            <a:r>
+              <a:rPr sz="1146" b="0" i="0">
+                <a:solidFill>
+                  <a:srgbClr val="242A33"/>
+                </a:solidFill>
+                <a:latin typeface="Consolas"/>
+                <a:ea typeface="Consolas"/>
+              </a:rPr>
+              <a:t>            cell = grid[nx][ny]</a:t>
+            </a:r>
+          </a:p>
+          <a:p>
+            <a:pPr algn="l">
+              <a:lnSpc>
+                <a:spcPts val="1490"/>
+              </a:lnSpc>
+              <a:spcBef>
+                <a:spcPts val="0"/>
+              </a:spcBef>
+              <a:spcAft>
+                <a:spcPts val="0"/>
+              </a:spcAft>
+            </a:pPr>
+            <a:r>
+              <a:rPr sz="1146" b="0" i="0">
+                <a:solidFill>
+                  <a:srgbClr val="242A33"/>
+                </a:solidFill>
+                <a:latin typeface="Consolas"/>
+                <a:ea typeface="Consolas"/>
+              </a:rPr>
+              <a:t>            if cell == '#' or (cell == 'D' and k == 0):</a:t>
+            </a:r>
+          </a:p>
+          <a:p>
+            <a:pPr algn="l">
+              <a:lnSpc>
+                <a:spcPts val="1490"/>
+              </a:lnSpc>
+              <a:spcBef>
+                <a:spcPts val="0"/>
+              </a:spcBef>
+              <a:spcAft>
+                <a:spcPts val="0"/>
+              </a:spcAft>
+            </a:pPr>
+            <a:r>
+              <a:rPr sz="1146" b="0" i="0">
+                <a:solidFill>
+                  <a:srgbClr val="242A33"/>
+                </a:solidFill>
+                <a:latin typeface="Consolas"/>
+                <a:ea typeface="Consolas"/>
+              </a:rPr>
+              <a:t>                continue</a:t>
+            </a:r>
+          </a:p>
+          <a:p>
+            <a:pPr algn="l">
+              <a:lnSpc>
+                <a:spcPts val="1490"/>
+              </a:lnSpc>
+              <a:spcBef>
+                <a:spcPts val="0"/>
+              </a:spcBef>
+              <a:spcAft>
+                <a:spcPts val="0"/>
+              </a:spcAft>
+            </a:pPr>
+            <a:r>
+              <a:rPr sz="1146" b="0" i="0">
+                <a:solidFill>
+                  <a:srgbClr val="242A33"/>
+                </a:solidFill>
+                <a:latin typeface="Consolas"/>
+                <a:ea typeface="Consolas"/>
+              </a:rPr>
+              <a:t>            nk = 1 if cell == 'K' else k       # 踩到钥匙就拿上</a:t>
+            </a:r>
+          </a:p>
+          <a:p>
+            <a:pPr algn="l">
+              <a:lnSpc>
+                <a:spcPts val="1490"/>
+              </a:lnSpc>
+              <a:spcBef>
+                <a:spcPts val="0"/>
+              </a:spcBef>
+              <a:spcAft>
+                <a:spcPts val="0"/>
+              </a:spcAft>
+            </a:pPr>
+            <a:r>
+              <a:rPr sz="1146" b="0" i="0">
+                <a:solidFill>
+                  <a:srgbClr val="242A33"/>
+                </a:solidFill>
+                <a:latin typeface="Consolas"/>
+                <a:ea typeface="Consolas"/>
+              </a:rPr>
+              <a:t>            if dist[nk][nx][ny] &gt;= 0:</a:t>
+            </a:r>
+          </a:p>
+          <a:p>
+            <a:pPr algn="l">
+              <a:lnSpc>
+                <a:spcPts val="1490"/>
+              </a:lnSpc>
+              <a:spcBef>
+                <a:spcPts val="0"/>
+              </a:spcBef>
+              <a:spcAft>
+                <a:spcPts val="0"/>
+              </a:spcAft>
+            </a:pPr>
+            <a:r>
+              <a:rPr sz="1146" b="0" i="0">
+                <a:solidFill>
+                  <a:srgbClr val="242A33"/>
+                </a:solidFill>
+                <a:latin typeface="Consolas"/>
+                <a:ea typeface="Consolas"/>
+              </a:rPr>
+              <a:t>                continue</a:t>
+            </a:r>
+          </a:p>
+          <a:p>
+            <a:pPr algn="l">
+              <a:lnSpc>
+                <a:spcPts val="1490"/>
+              </a:lnSpc>
+              <a:spcBef>
+                <a:spcPts val="0"/>
+              </a:spcBef>
+              <a:spcAft>
+                <a:spcPts val="0"/>
+              </a:spcAft>
+            </a:pPr>
+            <a:r>
+              <a:rPr sz="1146" b="0" i="0">
+                <a:solidFill>
+                  <a:srgbClr val="242A33"/>
+                </a:solidFill>
+                <a:latin typeface="Consolas"/>
+                <a:ea typeface="Consolas"/>
+              </a:rPr>
+              <a:t>            dist[nk][nx][ny] = dist[k][x][y] + 1</a:t>
+            </a:r>
+          </a:p>
+          <a:p>
+            <a:pPr algn="l">
+              <a:lnSpc>
+                <a:spcPts val="1490"/>
+              </a:lnSpc>
+              <a:spcBef>
+                <a:spcPts val="0"/>
+              </a:spcBef>
+              <a:spcAft>
+                <a:spcPts val="0"/>
+              </a:spcAft>
+            </a:pPr>
+            <a:r>
+              <a:rPr sz="1146" b="0" i="0">
+                <a:solidFill>
+                  <a:srgbClr val="242A33"/>
+                </a:solidFill>
+                <a:latin typeface="Consolas"/>
+                <a:ea typeface="Consolas"/>
+              </a:rPr>
+              <a:t>            q.append((nx, ny, nk))</a:t>
+            </a:r>
+          </a:p>
+          <a:p>
+            <a:pPr algn="l">
+              <a:lnSpc>
+                <a:spcPts val="1490"/>
+              </a:lnSpc>
+              <a:spcBef>
+                <a:spcPts val="0"/>
+              </a:spcBef>
+              <a:spcAft>
+                <a:spcPts val="0"/>
+              </a:spcAft>
+            </a:pPr>
+            <a:r>
+              <a:rPr sz="1146" b="0" i="0">
+                <a:solidFill>
+                  <a:srgbClr val="242A33"/>
+                </a:solidFill>
+                <a:latin typeface="Consolas"/>
+                <a:ea typeface="Consolas"/>
+              </a:rPr>
+              <a:t>    return -1</a:t>
+            </a:r>
+          </a:p>
+        </p:txBody>
+      </p:sp>
+      <p:sp>
+        <p:nvSpPr>
+          <p:cNvPr id="6" name="TextBox 5"/>
+          <p:cNvSpPr txBox="1"/>
+          <p:nvPr/>
+        </p:nvSpPr>
+        <p:spPr>
+          <a:xfrm>
+            <a:off x="566928" y="5861304"/>
+            <a:ext cx="11057839" cy="329184"/>
+          </a:xfrm>
+          <a:prstGeom prst="rect">
+            <a:avLst/>
+          </a:prstGeom>
+          <a:noFill/>
+        </p:spPr>
+        <p:txBody>
+          <a:bodyPr wrap="square" lIns="0" rIns="0" tIns="0" bIns="0">
+            <a:noAutofit/>
+          </a:bodyPr>
+          <a:lstStyle/>
+          <a:p>
+            <a:pPr algn="l">
+              <a:spcBef>
+                <a:spcPts val="0"/>
+              </a:spcBef>
+              <a:spcAft>
+                <a:spcPts val="0"/>
+              </a:spcAft>
+            </a:pPr>
+            <a:r>
+              <a:rPr sz="1300" b="0" i="0">
+                <a:solidFill>
+                  <a:srgbClr val="6B7582"/>
+                </a:solidFill>
+                <a:latin typeface="Segoe UI"/>
+                <a:ea typeface="微软雅黑"/>
+              </a:rPr>
+              <a:t>踩到钥匙就拿上；两层各自记距离，互不覆盖</a:t>
+            </a:r>
+          </a:p>
+        </p:txBody>
+      </p:sp>
+      <p:sp>
+        <p:nvSpPr>
+          <p:cNvPr id="7" name="TextBox 6"/>
+          <p:cNvSpPr txBox="1"/>
+          <p:nvPr/>
+        </p:nvSpPr>
+        <p:spPr>
+          <a:xfrm>
+            <a:off x="566928" y="6327648"/>
+            <a:ext cx="8229600" cy="310896"/>
+          </a:xfrm>
+          <a:prstGeom prst="rect">
+            <a:avLst/>
+          </a:prstGeom>
+          <a:noFill/>
+        </p:spPr>
+        <p:txBody>
+          <a:bodyPr wrap="square" lIns="0" rIns="0" tIns="0" bIns="0">
+            <a:noAutofit/>
+          </a:bodyPr>
+          <a:lstStyle/>
+          <a:p>
+            <a:pPr algn="l">
+              <a:spcBef>
+                <a:spcPts val="0"/>
+              </a:spcBef>
+              <a:spcAft>
+                <a:spcPts val="0"/>
+              </a:spcAft>
+            </a:pPr>
+            <a:r>
+              <a:rPr sz="1000" b="0" i="0">
+                <a:solidFill>
+                  <a:srgbClr val="6B7582"/>
+                </a:solidFill>
+                <a:latin typeface="Segoe UI"/>
+                <a:ea typeface="微软雅黑"/>
+              </a:rPr>
+              <a:t>计算概论（B） · 第14周 · 闫宏飞 · 2026 Fall</a:t>
+            </a:r>
+          </a:p>
+        </p:txBody>
+      </p:sp>
+      <p:sp>
+        <p:nvSpPr>
+          <p:cNvPr id="8" name="TextBox 7"/>
+          <p:cNvSpPr txBox="1"/>
+          <p:nvPr/>
+        </p:nvSpPr>
+        <p:spPr>
+          <a:xfrm>
+            <a:off x="10710367" y="6327648"/>
+            <a:ext cx="914400" cy="310896"/>
+          </a:xfrm>
+          <a:prstGeom prst="rect">
+            <a:avLst/>
+          </a:prstGeom>
+          <a:noFill/>
+        </p:spPr>
+        <p:txBody>
+          <a:bodyPr wrap="square" lIns="0" rIns="0" tIns="0" bIns="0">
+            <a:noAutofit/>
+          </a:bodyPr>
+          <a:lstStyle/>
+          <a:p>
+            <a:pPr algn="r">
+              <a:spcBef>
+                <a:spcPts val="0"/>
+              </a:spcBef>
+              <a:spcAft>
+                <a:spcPts val="0"/>
+              </a:spcAft>
+            </a:pPr>
+            <a:r>
+              <a:rPr sz="1000" b="0" i="0">
+                <a:solidFill>
+                  <a:srgbClr val="6B7582"/>
+                </a:solidFill>
+                <a:latin typeface="Segoe UI"/>
+                <a:ea typeface="微软雅黑"/>
+              </a:rPr>
+              <a:t>20</a:t>
+            </a:r>
+          </a:p>
+        </p:txBody>
+      </p:sp>
+    </p:spTree>
+  </p:cSld>
+  <p:clrMapOvr>
+    <a:masterClrMapping/>
+  </p:clrMapOvr>
+</p:sld>
+</file>
+
+<file path=ppt/slides/slide21.xml><?xml version="1.0" encoding="utf-8"?>
 <p:sld xmlns:a="http://schemas.openxmlformats.org/drawingml/2006/main" xmlns:p="http://schemas.openxmlformats.org/presentationml/2006/main" xmlns:r="http://schemas.openxmlformats.org/officeDocument/2006/relationships">
   <p:cSld>
     <p:spTree>
@@ -9583,7 +9930,7 @@
                 <a:latin typeface="Segoe UI"/>
                 <a:ea typeface="微软雅黑"/>
               </a:rPr>
-              <a:t>20</a:t>
+              <a:t>21</a:t>
             </a:r>
           </a:p>
         </p:txBody>
@@ -9596,7 +9943,7 @@
 </p:sld>
 </file>
 
-<file path=ppt/slides/slide21.xml><?xml version="1.0" encoding="utf-8"?>
+<file path=ppt/slides/slide22.xml><?xml version="1.0" encoding="utf-8"?>
 <p:sld xmlns:a="http://schemas.openxmlformats.org/drawingml/2006/main" xmlns:p="http://schemas.openxmlformats.org/presentationml/2006/main" xmlns:r="http://schemas.openxmlformats.org/officeDocument/2006/relationships">
   <p:cSld>
     <p:spTree>
@@ -10441,7 +10788,7 @@
                 <a:latin typeface="Segoe UI"/>
                 <a:ea typeface="微软雅黑"/>
               </a:rPr>
-              <a:t>21</a:t>
+              <a:t>22</a:t>
             </a:r>
           </a:p>
         </p:txBody>
@@ -10454,7 +10801,7 @@
 </p:sld>
 </file>
 
-<file path=ppt/slides/slide22.xml><?xml version="1.0" encoding="utf-8"?>
+<file path=ppt/slides/slide23.xml><?xml version="1.0" encoding="utf-8"?>
 <p:sld xmlns:a="http://schemas.openxmlformats.org/drawingml/2006/main" xmlns:p="http://schemas.openxmlformats.org/presentationml/2006/main" xmlns:r="http://schemas.openxmlformats.org/officeDocument/2006/relationships">
   <p:cSld>
     <p:spTree>
@@ -11051,7 +11398,7 @@
                 <a:latin typeface="Segoe UI"/>
                 <a:ea typeface="微软雅黑"/>
               </a:rPr>
-              <a:t>22</a:t>
+              <a:t>23</a:t>
             </a:r>
           </a:p>
         </p:txBody>
@@ -11064,7 +11411,7 @@
 </p:sld>
 </file>
 
-<file path=ppt/slides/slide23.xml><?xml version="1.0" encoding="utf-8"?>
+<file path=ppt/slides/slide24.xml><?xml version="1.0" encoding="utf-8"?>
 <p:sld xmlns:a="http://schemas.openxmlformats.org/drawingml/2006/main" xmlns:p="http://schemas.openxmlformats.org/presentationml/2006/main" xmlns:r="http://schemas.openxmlformats.org/officeDocument/2006/relationships">
   <p:cSld>
     <p:spTree>
@@ -11233,7 +11580,7 @@
 </p:sld>
 </file>
 
-<file path=ppt/slides/slide24.xml><?xml version="1.0" encoding="utf-8"?>
+<file path=ppt/slides/slide25.xml><?xml version="1.0" encoding="utf-8"?>
 <p:sld xmlns:a="http://schemas.openxmlformats.org/drawingml/2006/main" xmlns:p="http://schemas.openxmlformats.org/presentationml/2006/main" xmlns:r="http://schemas.openxmlformats.org/officeDocument/2006/relationships">
   <p:cSld>
     <p:spTree>
@@ -12166,7 +12513,7 @@
                 <a:latin typeface="Segoe UI"/>
                 <a:ea typeface="微软雅黑"/>
               </a:rPr>
-              <a:t>24</a:t>
+              <a:t>25</a:t>
             </a:r>
           </a:p>
         </p:txBody>
@@ -12179,7 +12526,7 @@
 </p:sld>
 </file>
 
-<file path=ppt/slides/slide25.xml><?xml version="1.0" encoding="utf-8"?>
+<file path=ppt/slides/slide26.xml><?xml version="1.0" encoding="utf-8"?>
 <p:sld xmlns:a="http://schemas.openxmlformats.org/drawingml/2006/main" xmlns:p="http://schemas.openxmlformats.org/presentationml/2006/main" xmlns:r="http://schemas.openxmlformats.org/officeDocument/2006/relationships">
   <p:cSld>
     <p:spTree>
@@ -12721,7 +13068,7 @@
                 <a:latin typeface="Segoe UI"/>
                 <a:ea typeface="微软雅黑"/>
               </a:rPr>
-              <a:t>25</a:t>
+              <a:t>26</a:t>
             </a:r>
           </a:p>
         </p:txBody>
@@ -12734,7 +13081,7 @@
 </p:sld>
 </file>
 
-<file path=ppt/slides/slide26.xml><?xml version="1.0" encoding="utf-8"?>
+<file path=ppt/slides/slide27.xml><?xml version="1.0" encoding="utf-8"?>
 <p:sld xmlns:a="http://schemas.openxmlformats.org/drawingml/2006/main" xmlns:p="http://schemas.openxmlformats.org/presentationml/2006/main" xmlns:r="http://schemas.openxmlformats.org/officeDocument/2006/relationships">
   <p:cSld>
     <p:spTree>
@@ -13358,7 +13705,7 @@
                 <a:latin typeface="Segoe UI"/>
                 <a:ea typeface="微软雅黑"/>
               </a:rPr>
-              <a:t>26</a:t>
+              <a:t>27</a:t>
             </a:r>
           </a:p>
         </p:txBody>
@@ -13371,7 +13718,7 @@
 </p:sld>
 </file>
 
-<file path=ppt/slides/slide27.xml><?xml version="1.0" encoding="utf-8"?>
+<file path=ppt/slides/slide28.xml><?xml version="1.0" encoding="utf-8"?>
 <p:sld xmlns:a="http://schemas.openxmlformats.org/drawingml/2006/main" xmlns:p="http://schemas.openxmlformats.org/presentationml/2006/main" xmlns:r="http://schemas.openxmlformats.org/officeDocument/2006/relationships">
   <p:cSld>
     <p:spTree>
@@ -13810,7 +14157,7 @@
                 <a:latin typeface="Segoe UI"/>
                 <a:ea typeface="微软雅黑"/>
               </a:rPr>
-              <a:t>27</a:t>
+              <a:t>28</a:t>
             </a:r>
           </a:p>
         </p:txBody>
@@ -13823,7 +14170,7 @@
 </p:sld>
 </file>
 
-<file path=ppt/slides/slide28.xml><?xml version="1.0" encoding="utf-8"?>
+<file path=ppt/slides/slide29.xml><?xml version="1.0" encoding="utf-8"?>
 <p:sld xmlns:a="http://schemas.openxmlformats.org/drawingml/2006/main" xmlns:p="http://schemas.openxmlformats.org/presentationml/2006/main" xmlns:r="http://schemas.openxmlformats.org/officeDocument/2006/relationships">
   <p:cSld>
     <p:spTree>
@@ -14135,7 +14482,7 @@
                 <a:latin typeface="Segoe UI"/>
                 <a:ea typeface="微软雅黑"/>
               </a:rPr>
-              <a:t>28</a:t>
+              <a:t>29</a:t>
             </a:r>
           </a:p>
         </p:txBody>

--- a/courseware/202612_ADS_W14_AI_Literacy_Exam_Recap.pptx
+++ b/courseware/202612_ADS_W14_AI_Literacy_Exam_Recap.pptx
@@ -34,6 +34,10 @@
     <p:sldId id="282" r:id="rId33"/>
     <p:sldId id="283" r:id="rId34"/>
     <p:sldId id="284" r:id="rId35"/>
+    <p:sldId id="285" r:id="rId36"/>
+    <p:sldId id="286" r:id="rId37"/>
+    <p:sldId id="287" r:id="rId38"/>
+    <p:sldId id="288" r:id="rId39"/>
   </p:sldIdLst>
   <p:sldSz cx="12191695" cy="6858000" type="screen4x3"/>
   <p:notesSz cx="6858000" cy="9144000"/>
@@ -3262,7 +3266,7 @@
                 <a:latin typeface="Segoe UI"/>
                 <a:ea typeface="微软雅黑"/>
               </a:rPr>
-              <a:t>LLM 原理 · 幻觉与验证 · 提示词 · 月考四题讲评与错误归因 · 复习清单</a:t>
+              <a:t>LLM 原理 · 幻觉与验证 · 提示词 · 月考六题讲评与错误归因 · 复习清单</a:t>
             </a:r>
           </a:p>
         </p:txBody>
@@ -5039,19 +5043,6 @@
               </a:rPr>
               <a:t>同构演练</a:t>
             </a:r>
-          </a:p>
-          <a:p>
-            <a:pPr algn="l">
-              <a:lnSpc>
-                <a:spcPct val="132000"/>
-              </a:lnSpc>
-              <a:spcBef>
-                <a:spcPts val="0"/>
-              </a:spcBef>
-              <a:spcAft>
-                <a:spcPts val="1240"/>
-              </a:spcAft>
-            </a:pPr>
             <a:r>
               <a:rPr sz="2000" b="0" i="0">
                 <a:solidFill>
@@ -5060,7 +5051,7 @@
                 <a:latin typeface="Segoe UI"/>
                 <a:ea typeface="微软雅黑"/>
               </a:rPr>
-              <a:t>•  比讲解正确解法更重要的，是搞清楚</a:t>
+              <a:t>：</a:t>
             </a:r>
             <a:r>
               <a:rPr sz="2000" b="1" i="0">
@@ -5070,7 +5061,7 @@
                 <a:latin typeface="Segoe UI"/>
                 <a:ea typeface="微软雅黑"/>
               </a:rPr>
-              <a:t>大家为什么会错</a:t>
+              <a:t>6 题 / 112 分钟 / 100 分</a:t>
             </a:r>
           </a:p>
           <a:p>
@@ -5093,7 +5084,7 @@
                 <a:latin typeface="Segoe UI"/>
                 <a:ea typeface="微软雅黑"/>
               </a:rPr>
-              <a:t>•  </a:t>
+              <a:t>•  比讲解正确解法更重要的，是搞清楚</a:t>
             </a:r>
             <a:r>
               <a:rPr sz="2000" b="1" i="0">
@@ -5103,8 +5094,21 @@
                 <a:latin typeface="Segoe UI"/>
                 <a:ea typeface="微软雅黑"/>
               </a:rPr>
-              <a:t>分值</a:t>
-            </a:r>
+              <a:t>大家为什么会错</a:t>
+            </a:r>
+          </a:p>
+          <a:p>
+            <a:pPr algn="l">
+              <a:lnSpc>
+                <a:spcPct val="132000"/>
+              </a:lnSpc>
+              <a:spcBef>
+                <a:spcPts val="0"/>
+              </a:spcBef>
+              <a:spcAft>
+                <a:spcPts val="1240"/>
+              </a:spcAft>
+            </a:pPr>
             <a:r>
               <a:rPr sz="2000" b="0" i="0">
                 <a:solidFill>
@@ -5113,7 +5117,70 @@
                 <a:latin typeface="Segoe UI"/>
                 <a:ea typeface="微软雅黑"/>
               </a:rPr>
-              <a:t>：T1 20 + T2 25 + T3 25 + T4 30 = 100 分</a:t>
+              <a:t>•  </a:t>
+            </a:r>
+            <a:r>
+              <a:rPr sz="2000" b="1" i="0">
+                <a:solidFill>
+                  <a:srgbClr val="12395B"/>
+                </a:solidFill>
+                <a:latin typeface="Segoe UI"/>
+                <a:ea typeface="微软雅黑"/>
+              </a:rPr>
+              <a:t>分值</a:t>
+            </a:r>
+            <a:r>
+              <a:rPr sz="2000" b="0" i="0">
+                <a:solidFill>
+                  <a:srgbClr val="242A33"/>
+                </a:solidFill>
+                <a:latin typeface="Segoe UI"/>
+                <a:ea typeface="微软雅黑"/>
+              </a:rPr>
+              <a:t>：T1 15 + T2 15 + T3 15 + T4 15 + T5 20 + T6 20 = 100 分</a:t>
+            </a:r>
+          </a:p>
+          <a:p>
+            <a:pPr algn="l">
+              <a:lnSpc>
+                <a:spcPct val="132000"/>
+              </a:lnSpc>
+              <a:spcBef>
+                <a:spcPts val="0"/>
+              </a:spcBef>
+              <a:spcAft>
+                <a:spcPts val="1240"/>
+              </a:spcAft>
+            </a:pPr>
+            <a:r>
+              <a:rPr sz="2000" b="0" i="0">
+                <a:solidFill>
+                  <a:srgbClr val="242A33"/>
+                </a:solidFill>
+                <a:latin typeface="Segoe UI"/>
+                <a:ea typeface="微软雅黑"/>
+              </a:rPr>
+              <a:t>•  </a:t>
+            </a:r>
+            <a:r>
+              <a:rPr sz="2000" b="1" i="0">
+                <a:solidFill>
+                  <a:srgbClr val="12395B"/>
+                </a:solidFill>
+                <a:latin typeface="Segoe UI"/>
+                <a:ea typeface="微软雅黑"/>
+              </a:rPr>
+              <a:t>难度梯度</a:t>
+            </a:r>
+            <a:r>
+              <a:rPr sz="2000" b="0" i="0">
+                <a:solidFill>
+                  <a:srgbClr val="242A33"/>
+                </a:solidFill>
+                <a:latin typeface="Segoe UI"/>
+                <a:ea typeface="微软雅黑"/>
+              </a:rPr>
+              <a:t>：★★ → ★★★ → ★★★ → ★★★★ → ★★★★ → ★★★★★</a:t>
             </a:r>
           </a:p>
         </p:txBody>
@@ -5260,7 +5327,7 @@
                 <a:latin typeface="Segoe UI"/>
                 <a:ea typeface="微软雅黑"/>
               </a:rPr>
-              <a:t>T1 课程互选统计（20 分）· 字典 + 排序</a:t>
+              <a:t>T1 课程互选统计（15 分）· 字典 + 排序</a:t>
             </a:r>
           </a:p>
         </p:txBody>
@@ -6520,7 +6587,7 @@
                 <a:latin typeface="Segoe UI"/>
                 <a:ea typeface="微软雅黑"/>
               </a:rPr>
-              <a:t>T2 最优装载顺序（25 分）· 交换论证</a:t>
+              <a:t>T2 最优装载顺序（15 分）· 交换论证</a:t>
             </a:r>
           </a:p>
         </p:txBody>
@@ -7847,7 +7914,7 @@
                 <a:latin typeface="Segoe UI"/>
                 <a:ea typeface="微软雅黑"/>
               </a:rPr>
-              <a:t>T3 网格中的宝藏（25 分）· 带状态 BFS（1/2）：定位与初始化</a:t>
+              <a:t>T3 网格中的宝藏（15 分）· 带状态 BFS（1/2）：定位与初始化</a:t>
             </a:r>
           </a:p>
         </p:txBody>
@@ -9991,7 +10058,7 @@
                 <a:latin typeface="Segoe UI"/>
                 <a:ea typeface="微软雅黑"/>
               </a:rPr>
-              <a:t>T4 分组考试（30 分）· 区间划分 DP</a:t>
+              <a:t>T4 分组考试（15 分）· 区间划分 DP</a:t>
             </a:r>
           </a:p>
         </p:txBody>
@@ -11423,6 +11490,3098 @@
       <p:grpSpPr/>
       <p:sp>
         <p:nvSpPr>
+          <p:cNvPr id="2" name="TextBox 1"/>
+          <p:cNvSpPr txBox="1"/>
+          <p:nvPr/>
+        </p:nvSpPr>
+        <p:spPr>
+          <a:xfrm>
+            <a:off x="566928" y="420624"/>
+            <a:ext cx="11057839" cy="548640"/>
+          </a:xfrm>
+          <a:prstGeom prst="rect">
+            <a:avLst/>
+          </a:prstGeom>
+          <a:noFill/>
+        </p:spPr>
+        <p:txBody>
+          <a:bodyPr wrap="square" lIns="0" rIns="0" tIns="0" bIns="0">
+            <a:noAutofit/>
+          </a:bodyPr>
+          <a:lstStyle/>
+          <a:p>
+            <a:pPr algn="l">
+              <a:spcBef>
+                <a:spcPts val="0"/>
+              </a:spcBef>
+              <a:spcAft>
+                <a:spcPts val="0"/>
+              </a:spcAft>
+            </a:pPr>
+            <a:r>
+              <a:rPr sz="2600" b="1" i="0">
+                <a:solidFill>
+                  <a:srgbClr val="12395B"/>
+                </a:solidFill>
+                <a:latin typeface="Segoe UI"/>
+                <a:ea typeface="微软雅黑"/>
+              </a:rPr>
+              <a:t>T5 书架分层（20 分）· 二分答案 + 贪心校验</a:t>
+            </a:r>
+          </a:p>
+        </p:txBody>
+      </p:sp>
+      <p:sp>
+        <p:nvSpPr>
+          <p:cNvPr id="3" name="Rectangle 2"/>
+          <p:cNvSpPr/>
+          <p:nvPr/>
+        </p:nvSpPr>
+        <p:spPr>
+          <a:xfrm>
+            <a:off x="566928" y="1060704"/>
+            <a:ext cx="960120" cy="40640"/>
+          </a:xfrm>
+          <a:prstGeom prst="rect">
+            <a:avLst/>
+          </a:prstGeom>
+          <a:solidFill>
+            <a:srgbClr val="E07B39"/>
+          </a:solidFill>
+          <a:ln>
+            <a:noFill/>
+          </a:ln>
+          <a:effectLst/>
+        </p:spPr>
+        <p:style>
+          <a:lnRef idx="1">
+            <a:schemeClr val="accent1"/>
+          </a:lnRef>
+          <a:fillRef idx="3">
+            <a:schemeClr val="accent1"/>
+          </a:fillRef>
+          <a:effectRef idx="2">
+            <a:schemeClr val="accent1"/>
+          </a:effectRef>
+          <a:fontRef idx="minor">
+            <a:schemeClr val="lt1"/>
+          </a:fontRef>
+        </p:style>
+        <p:txBody>
+          <a:bodyPr rtlCol="0" anchor="ctr"/>
+          <a:lstStyle/>
+          <a:p>
+            <a:pPr algn="ctr"/>
+          </a:p>
+        </p:txBody>
+      </p:sp>
+      <p:sp>
+        <p:nvSpPr>
+          <p:cNvPr id="4" name="Rectangle 3"/>
+          <p:cNvSpPr/>
+          <p:nvPr/>
+        </p:nvSpPr>
+        <p:spPr>
+          <a:xfrm>
+            <a:off x="566928" y="1298448"/>
+            <a:ext cx="11057839" cy="4443983"/>
+          </a:xfrm>
+          <a:prstGeom prst="rect">
+            <a:avLst/>
+          </a:prstGeom>
+          <a:solidFill>
+            <a:srgbClr val="F6F7F9"/>
+          </a:solidFill>
+          <a:ln w="9525">
+            <a:solidFill>
+              <a:srgbClr val="D6DCE4"/>
+            </a:solidFill>
+          </a:ln>
+          <a:effectLst/>
+        </p:spPr>
+        <p:style>
+          <a:lnRef idx="1">
+            <a:schemeClr val="accent1"/>
+          </a:lnRef>
+          <a:fillRef idx="3">
+            <a:schemeClr val="accent1"/>
+          </a:fillRef>
+          <a:effectRef idx="2">
+            <a:schemeClr val="accent1"/>
+          </a:effectRef>
+          <a:fontRef idx="minor">
+            <a:schemeClr val="lt1"/>
+          </a:fontRef>
+        </p:style>
+        <p:txBody>
+          <a:bodyPr rtlCol="0" anchor="ctr"/>
+          <a:lstStyle/>
+          <a:p>
+            <a:pPr algn="ctr"/>
+          </a:p>
+        </p:txBody>
+      </p:sp>
+      <p:sp>
+        <p:nvSpPr>
+          <p:cNvPr id="5" name="TextBox 4"/>
+          <p:cNvSpPr txBox="1"/>
+          <p:nvPr/>
+        </p:nvSpPr>
+        <p:spPr>
+          <a:xfrm>
+            <a:off x="822960" y="1399032"/>
+            <a:ext cx="10545775" cy="4242815"/>
+          </a:xfrm>
+          <a:prstGeom prst="rect">
+            <a:avLst/>
+          </a:prstGeom>
+          <a:noFill/>
+        </p:spPr>
+        <p:txBody>
+          <a:bodyPr wrap="square" lIns="0" rIns="0" tIns="0" bIns="0">
+            <a:noAutofit/>
+          </a:bodyPr>
+          <a:lstStyle/>
+          <a:p>
+            <a:pPr algn="l">
+              <a:lnSpc>
+                <a:spcPts val="1425"/>
+              </a:lnSpc>
+              <a:spcBef>
+                <a:spcPts val="0"/>
+              </a:spcBef>
+              <a:spcAft>
+                <a:spcPts val="0"/>
+              </a:spcAft>
+            </a:pPr>
+            <a:r>
+              <a:rPr sz="1096" b="0" i="0">
+                <a:solidFill>
+                  <a:srgbClr val="242A33"/>
+                </a:solidFill>
+                <a:latin typeface="Consolas"/>
+                <a:ea typeface="Consolas"/>
+              </a:rPr>
+              <a:t>def min_capacity(a, k):</a:t>
+            </a:r>
+          </a:p>
+          <a:p>
+            <a:pPr algn="l">
+              <a:lnSpc>
+                <a:spcPts val="1425"/>
+              </a:lnSpc>
+              <a:spcBef>
+                <a:spcPts val="0"/>
+              </a:spcBef>
+              <a:spcAft>
+                <a:spcPts val="0"/>
+              </a:spcAft>
+            </a:pPr>
+            <a:r>
+              <a:rPr sz="1096" b="0" i="0">
+                <a:solidFill>
+                  <a:srgbClr val="242A33"/>
+                </a:solidFill>
+                <a:latin typeface="Consolas"/>
+                <a:ea typeface="Consolas"/>
+              </a:rPr>
+              <a:t>    """承重上限越大，需要的层数越少 —— 单调，所以能二分答案。"""</a:t>
+            </a:r>
+          </a:p>
+          <a:p>
+            <a:pPr algn="l">
+              <a:lnSpc>
+                <a:spcPts val="1425"/>
+              </a:lnSpc>
+              <a:spcBef>
+                <a:spcPts val="0"/>
+              </a:spcBef>
+              <a:spcAft>
+                <a:spcPts val="0"/>
+              </a:spcAft>
+            </a:pPr>
+            <a:r>
+              <a:rPr sz="1096" b="0" i="0">
+                <a:solidFill>
+                  <a:srgbClr val="242A33"/>
+                </a:solidFill>
+                <a:latin typeface="Consolas"/>
+                <a:ea typeface="Consolas"/>
+              </a:rPr>
+              <a:t>    def shelves(cap):                    # 贪心：装不下就换下一层</a:t>
+            </a:r>
+          </a:p>
+          <a:p>
+            <a:pPr algn="l">
+              <a:lnSpc>
+                <a:spcPts val="1425"/>
+              </a:lnSpc>
+              <a:spcBef>
+                <a:spcPts val="0"/>
+              </a:spcBef>
+              <a:spcAft>
+                <a:spcPts val="0"/>
+              </a:spcAft>
+            </a:pPr>
+            <a:r>
+              <a:rPr sz="1096" b="0" i="0">
+                <a:solidFill>
+                  <a:srgbClr val="242A33"/>
+                </a:solidFill>
+                <a:latin typeface="Consolas"/>
+                <a:ea typeface="Consolas"/>
+              </a:rPr>
+              <a:t>        cnt, cur = 1, 0</a:t>
+            </a:r>
+          </a:p>
+          <a:p>
+            <a:pPr algn="l">
+              <a:lnSpc>
+                <a:spcPts val="1425"/>
+              </a:lnSpc>
+              <a:spcBef>
+                <a:spcPts val="0"/>
+              </a:spcBef>
+              <a:spcAft>
+                <a:spcPts val="0"/>
+              </a:spcAft>
+            </a:pPr>
+            <a:r>
+              <a:rPr sz="1096" b="0" i="0">
+                <a:solidFill>
+                  <a:srgbClr val="242A33"/>
+                </a:solidFill>
+                <a:latin typeface="Consolas"/>
+                <a:ea typeface="Consolas"/>
+              </a:rPr>
+              <a:t>        for x in a:</a:t>
+            </a:r>
+          </a:p>
+          <a:p>
+            <a:pPr algn="l">
+              <a:lnSpc>
+                <a:spcPts val="1425"/>
+              </a:lnSpc>
+              <a:spcBef>
+                <a:spcPts val="0"/>
+              </a:spcBef>
+              <a:spcAft>
+                <a:spcPts val="0"/>
+              </a:spcAft>
+            </a:pPr>
+            <a:r>
+              <a:rPr sz="1096" b="0" i="0">
+                <a:solidFill>
+                  <a:srgbClr val="242A33"/>
+                </a:solidFill>
+                <a:latin typeface="Consolas"/>
+                <a:ea typeface="Consolas"/>
+              </a:rPr>
+              <a:t>            if cur + x &gt; cap:</a:t>
+            </a:r>
+          </a:p>
+          <a:p>
+            <a:pPr algn="l">
+              <a:lnSpc>
+                <a:spcPts val="1425"/>
+              </a:lnSpc>
+              <a:spcBef>
+                <a:spcPts val="0"/>
+              </a:spcBef>
+              <a:spcAft>
+                <a:spcPts val="0"/>
+              </a:spcAft>
+            </a:pPr>
+            <a:r>
+              <a:rPr sz="1096" b="0" i="0">
+                <a:solidFill>
+                  <a:srgbClr val="242A33"/>
+                </a:solidFill>
+                <a:latin typeface="Consolas"/>
+                <a:ea typeface="Consolas"/>
+              </a:rPr>
+              <a:t>                cnt += 1</a:t>
+            </a:r>
+          </a:p>
+          <a:p>
+            <a:pPr algn="l">
+              <a:lnSpc>
+                <a:spcPts val="1425"/>
+              </a:lnSpc>
+              <a:spcBef>
+                <a:spcPts val="0"/>
+              </a:spcBef>
+              <a:spcAft>
+                <a:spcPts val="0"/>
+              </a:spcAft>
+            </a:pPr>
+            <a:r>
+              <a:rPr sz="1096" b="0" i="0">
+                <a:solidFill>
+                  <a:srgbClr val="242A33"/>
+                </a:solidFill>
+                <a:latin typeface="Consolas"/>
+                <a:ea typeface="Consolas"/>
+              </a:rPr>
+              <a:t>                cur = x</a:t>
+            </a:r>
+          </a:p>
+          <a:p>
+            <a:pPr algn="l">
+              <a:lnSpc>
+                <a:spcPts val="1425"/>
+              </a:lnSpc>
+              <a:spcBef>
+                <a:spcPts val="0"/>
+              </a:spcBef>
+              <a:spcAft>
+                <a:spcPts val="0"/>
+              </a:spcAft>
+            </a:pPr>
+            <a:r>
+              <a:rPr sz="1096" b="0" i="0">
+                <a:solidFill>
+                  <a:srgbClr val="242A33"/>
+                </a:solidFill>
+                <a:latin typeface="Consolas"/>
+                <a:ea typeface="Consolas"/>
+              </a:rPr>
+              <a:t>            else:</a:t>
+            </a:r>
+          </a:p>
+          <a:p>
+            <a:pPr algn="l">
+              <a:lnSpc>
+                <a:spcPts val="1425"/>
+              </a:lnSpc>
+              <a:spcBef>
+                <a:spcPts val="0"/>
+              </a:spcBef>
+              <a:spcAft>
+                <a:spcPts val="0"/>
+              </a:spcAft>
+            </a:pPr>
+            <a:r>
+              <a:rPr sz="1096" b="0" i="0">
+                <a:solidFill>
+                  <a:srgbClr val="242A33"/>
+                </a:solidFill>
+                <a:latin typeface="Consolas"/>
+                <a:ea typeface="Consolas"/>
+              </a:rPr>
+              <a:t>                cur += x</a:t>
+            </a:r>
+          </a:p>
+          <a:p>
+            <a:pPr algn="l">
+              <a:lnSpc>
+                <a:spcPts val="1425"/>
+              </a:lnSpc>
+              <a:spcBef>
+                <a:spcPts val="0"/>
+              </a:spcBef>
+              <a:spcAft>
+                <a:spcPts val="0"/>
+              </a:spcAft>
+            </a:pPr>
+            <a:r>
+              <a:rPr sz="1096" b="0" i="0">
+                <a:solidFill>
+                  <a:srgbClr val="242A33"/>
+                </a:solidFill>
+                <a:latin typeface="Consolas"/>
+                <a:ea typeface="Consolas"/>
+              </a:rPr>
+              <a:t>        return cnt</a:t>
+            </a:r>
+          </a:p>
+          <a:p>
+            <a:pPr algn="l">
+              <a:lnSpc>
+                <a:spcPts val="1425"/>
+              </a:lnSpc>
+              <a:spcBef>
+                <a:spcPts val="0"/>
+              </a:spcBef>
+              <a:spcAft>
+                <a:spcPts val="0"/>
+              </a:spcAft>
+            </a:pPr>
+            <a:r>
+              <a:rPr sz="1096" b="0" i="0">
+                <a:solidFill>
+                  <a:srgbClr val="242A33"/>
+                </a:solidFill>
+                <a:latin typeface="Consolas"/>
+                <a:ea typeface="Consolas"/>
+              </a:rPr>
+              <a:t> </a:t>
+            </a:r>
+          </a:p>
+          <a:p>
+            <a:pPr algn="l">
+              <a:lnSpc>
+                <a:spcPts val="1425"/>
+              </a:lnSpc>
+              <a:spcBef>
+                <a:spcPts val="0"/>
+              </a:spcBef>
+              <a:spcAft>
+                <a:spcPts val="0"/>
+              </a:spcAft>
+            </a:pPr>
+            <a:r>
+              <a:rPr sz="1096" b="0" i="0">
+                <a:solidFill>
+                  <a:srgbClr val="242A33"/>
+                </a:solidFill>
+                <a:latin typeface="Consolas"/>
+                <a:ea typeface="Consolas"/>
+              </a:rPr>
+              <a:t>    lo, hi = max(a), sum(a)              # 下界必须是 max(a)：单本书也要放得下</a:t>
+            </a:r>
+          </a:p>
+          <a:p>
+            <a:pPr algn="l">
+              <a:lnSpc>
+                <a:spcPts val="1425"/>
+              </a:lnSpc>
+              <a:spcBef>
+                <a:spcPts val="0"/>
+              </a:spcBef>
+              <a:spcAft>
+                <a:spcPts val="0"/>
+              </a:spcAft>
+            </a:pPr>
+            <a:r>
+              <a:rPr sz="1096" b="0" i="0">
+                <a:solidFill>
+                  <a:srgbClr val="242A33"/>
+                </a:solidFill>
+                <a:latin typeface="Consolas"/>
+                <a:ea typeface="Consolas"/>
+              </a:rPr>
+              <a:t>    while lo &lt; hi:</a:t>
+            </a:r>
+          </a:p>
+          <a:p>
+            <a:pPr algn="l">
+              <a:lnSpc>
+                <a:spcPts val="1425"/>
+              </a:lnSpc>
+              <a:spcBef>
+                <a:spcPts val="0"/>
+              </a:spcBef>
+              <a:spcAft>
+                <a:spcPts val="0"/>
+              </a:spcAft>
+            </a:pPr>
+            <a:r>
+              <a:rPr sz="1096" b="0" i="0">
+                <a:solidFill>
+                  <a:srgbClr val="242A33"/>
+                </a:solidFill>
+                <a:latin typeface="Consolas"/>
+                <a:ea typeface="Consolas"/>
+              </a:rPr>
+              <a:t>        mid = (lo + hi) // 2</a:t>
+            </a:r>
+          </a:p>
+          <a:p>
+            <a:pPr algn="l">
+              <a:lnSpc>
+                <a:spcPts val="1425"/>
+              </a:lnSpc>
+              <a:spcBef>
+                <a:spcPts val="0"/>
+              </a:spcBef>
+              <a:spcAft>
+                <a:spcPts val="0"/>
+              </a:spcAft>
+            </a:pPr>
+            <a:r>
+              <a:rPr sz="1096" b="0" i="0">
+                <a:solidFill>
+                  <a:srgbClr val="242A33"/>
+                </a:solidFill>
+                <a:latin typeface="Consolas"/>
+                <a:ea typeface="Consolas"/>
+              </a:rPr>
+              <a:t>        if shelves(mid) &lt;= k:            # 层数够少 -&gt; 承重还能再压</a:t>
+            </a:r>
+          </a:p>
+          <a:p>
+            <a:pPr algn="l">
+              <a:lnSpc>
+                <a:spcPts val="1425"/>
+              </a:lnSpc>
+              <a:spcBef>
+                <a:spcPts val="0"/>
+              </a:spcBef>
+              <a:spcAft>
+                <a:spcPts val="0"/>
+              </a:spcAft>
+            </a:pPr>
+            <a:r>
+              <a:rPr sz="1096" b="0" i="0">
+                <a:solidFill>
+                  <a:srgbClr val="242A33"/>
+                </a:solidFill>
+                <a:latin typeface="Consolas"/>
+                <a:ea typeface="Consolas"/>
+              </a:rPr>
+              <a:t>            hi = mid</a:t>
+            </a:r>
+          </a:p>
+          <a:p>
+            <a:pPr algn="l">
+              <a:lnSpc>
+                <a:spcPts val="1425"/>
+              </a:lnSpc>
+              <a:spcBef>
+                <a:spcPts val="0"/>
+              </a:spcBef>
+              <a:spcAft>
+                <a:spcPts val="0"/>
+              </a:spcAft>
+            </a:pPr>
+            <a:r>
+              <a:rPr sz="1096" b="0" i="0">
+                <a:solidFill>
+                  <a:srgbClr val="242A33"/>
+                </a:solidFill>
+                <a:latin typeface="Consolas"/>
+                <a:ea typeface="Consolas"/>
+              </a:rPr>
+              <a:t>        else:</a:t>
+            </a:r>
+          </a:p>
+          <a:p>
+            <a:pPr algn="l">
+              <a:lnSpc>
+                <a:spcPts val="1425"/>
+              </a:lnSpc>
+              <a:spcBef>
+                <a:spcPts val="0"/>
+              </a:spcBef>
+              <a:spcAft>
+                <a:spcPts val="0"/>
+              </a:spcAft>
+            </a:pPr>
+            <a:r>
+              <a:rPr sz="1096" b="0" i="0">
+                <a:solidFill>
+                  <a:srgbClr val="242A33"/>
+                </a:solidFill>
+                <a:latin typeface="Consolas"/>
+                <a:ea typeface="Consolas"/>
+              </a:rPr>
+              <a:t>            lo = mid + 1</a:t>
+            </a:r>
+          </a:p>
+          <a:p>
+            <a:pPr algn="l">
+              <a:lnSpc>
+                <a:spcPts val="1425"/>
+              </a:lnSpc>
+              <a:spcBef>
+                <a:spcPts val="0"/>
+              </a:spcBef>
+              <a:spcAft>
+                <a:spcPts val="0"/>
+              </a:spcAft>
+            </a:pPr>
+            <a:r>
+              <a:rPr sz="1096" b="0" i="0">
+                <a:solidFill>
+                  <a:srgbClr val="242A33"/>
+                </a:solidFill>
+                <a:latin typeface="Consolas"/>
+                <a:ea typeface="Consolas"/>
+              </a:rPr>
+              <a:t>    return lo</a:t>
+            </a:r>
+          </a:p>
+          <a:p>
+            <a:pPr algn="l">
+              <a:lnSpc>
+                <a:spcPts val="1425"/>
+              </a:lnSpc>
+              <a:spcBef>
+                <a:spcPts val="0"/>
+              </a:spcBef>
+              <a:spcAft>
+                <a:spcPts val="0"/>
+              </a:spcAft>
+            </a:pPr>
+            <a:r>
+              <a:rPr sz="1096" b="0" i="0">
+                <a:solidFill>
+                  <a:srgbClr val="242A33"/>
+                </a:solidFill>
+                <a:latin typeface="Consolas"/>
+                <a:ea typeface="Consolas"/>
+              </a:rPr>
+              <a:t> </a:t>
+            </a:r>
+          </a:p>
+          <a:p>
+            <a:pPr algn="l">
+              <a:lnSpc>
+                <a:spcPts val="1425"/>
+              </a:lnSpc>
+              <a:spcBef>
+                <a:spcPts val="0"/>
+              </a:spcBef>
+              <a:spcAft>
+                <a:spcPts val="0"/>
+              </a:spcAft>
+            </a:pPr>
+            <a:r>
+              <a:rPr sz="1096" b="0" i="0">
+                <a:solidFill>
+                  <a:srgbClr val="242A33"/>
+                </a:solidFill>
+                <a:latin typeface="Consolas"/>
+                <a:ea typeface="Consolas"/>
+              </a:rPr>
+              <a:t> </a:t>
+            </a:r>
+          </a:p>
+          <a:p>
+            <a:pPr algn="l">
+              <a:lnSpc>
+                <a:spcPts val="1425"/>
+              </a:lnSpc>
+              <a:spcBef>
+                <a:spcPts val="0"/>
+              </a:spcBef>
+              <a:spcAft>
+                <a:spcPts val="0"/>
+              </a:spcAft>
+            </a:pPr>
+            <a:r>
+              <a:rPr sz="1096" b="0" i="0">
+                <a:solidFill>
+                  <a:srgbClr val="242A33"/>
+                </a:solidFill>
+                <a:latin typeface="Consolas"/>
+                <a:ea typeface="Consolas"/>
+              </a:rPr>
+              <a:t>print(min_capacity([1, 2, 3, 4, 5], 3))      # 6</a:t>
+            </a:r>
+          </a:p>
+        </p:txBody>
+      </p:sp>
+      <p:sp>
+        <p:nvSpPr>
+          <p:cNvPr id="6" name="TextBox 5"/>
+          <p:cNvSpPr txBox="1"/>
+          <p:nvPr/>
+        </p:nvSpPr>
+        <p:spPr>
+          <a:xfrm>
+            <a:off x="566928" y="5861303"/>
+            <a:ext cx="11057839" cy="329184"/>
+          </a:xfrm>
+          <a:prstGeom prst="rect">
+            <a:avLst/>
+          </a:prstGeom>
+          <a:noFill/>
+        </p:spPr>
+        <p:txBody>
+          <a:bodyPr wrap="square" lIns="0" rIns="0" tIns="0" bIns="0">
+            <a:noAutofit/>
+          </a:bodyPr>
+          <a:lstStyle/>
+          <a:p>
+            <a:pPr algn="l">
+              <a:spcBef>
+                <a:spcPts val="0"/>
+              </a:spcBef>
+              <a:spcAft>
+                <a:spcPts val="0"/>
+              </a:spcAft>
+            </a:pPr>
+            <a:r>
+              <a:rPr sz="1300" b="0" i="0">
+                <a:solidFill>
+                  <a:srgbClr val="6B7582"/>
+                </a:solidFill>
+                <a:latin typeface="Segoe UI"/>
+                <a:ea typeface="微软雅黑"/>
+              </a:rPr>
+              <a:t>判据是 &lt;= k 不是 == k：层数不足时再切一刀，承重只会更小</a:t>
+            </a:r>
+          </a:p>
+        </p:txBody>
+      </p:sp>
+      <p:sp>
+        <p:nvSpPr>
+          <p:cNvPr id="7" name="TextBox 6"/>
+          <p:cNvSpPr txBox="1"/>
+          <p:nvPr/>
+        </p:nvSpPr>
+        <p:spPr>
+          <a:xfrm>
+            <a:off x="566928" y="6327648"/>
+            <a:ext cx="8229600" cy="310896"/>
+          </a:xfrm>
+          <a:prstGeom prst="rect">
+            <a:avLst/>
+          </a:prstGeom>
+          <a:noFill/>
+        </p:spPr>
+        <p:txBody>
+          <a:bodyPr wrap="square" lIns="0" rIns="0" tIns="0" bIns="0">
+            <a:noAutofit/>
+          </a:bodyPr>
+          <a:lstStyle/>
+          <a:p>
+            <a:pPr algn="l">
+              <a:spcBef>
+                <a:spcPts val="0"/>
+              </a:spcBef>
+              <a:spcAft>
+                <a:spcPts val="0"/>
+              </a:spcAft>
+            </a:pPr>
+            <a:r>
+              <a:rPr sz="1000" b="0" i="0">
+                <a:solidFill>
+                  <a:srgbClr val="6B7582"/>
+                </a:solidFill>
+                <a:latin typeface="Segoe UI"/>
+                <a:ea typeface="微软雅黑"/>
+              </a:rPr>
+              <a:t>计算概论（B） · 第14周 · 闫宏飞 · 2026 Fall</a:t>
+            </a:r>
+          </a:p>
+        </p:txBody>
+      </p:sp>
+      <p:sp>
+        <p:nvSpPr>
+          <p:cNvPr id="8" name="TextBox 7"/>
+          <p:cNvSpPr txBox="1"/>
+          <p:nvPr/>
+        </p:nvSpPr>
+        <p:spPr>
+          <a:xfrm>
+            <a:off x="10710367" y="6327648"/>
+            <a:ext cx="914400" cy="310896"/>
+          </a:xfrm>
+          <a:prstGeom prst="rect">
+            <a:avLst/>
+          </a:prstGeom>
+          <a:noFill/>
+        </p:spPr>
+        <p:txBody>
+          <a:bodyPr wrap="square" lIns="0" rIns="0" tIns="0" bIns="0">
+            <a:noAutofit/>
+          </a:bodyPr>
+          <a:lstStyle/>
+          <a:p>
+            <a:pPr algn="r">
+              <a:spcBef>
+                <a:spcPts val="0"/>
+              </a:spcBef>
+              <a:spcAft>
+                <a:spcPts val="0"/>
+              </a:spcAft>
+            </a:pPr>
+            <a:r>
+              <a:rPr sz="1000" b="0" i="0">
+                <a:solidFill>
+                  <a:srgbClr val="6B7582"/>
+                </a:solidFill>
+                <a:latin typeface="Segoe UI"/>
+                <a:ea typeface="微软雅黑"/>
+              </a:rPr>
+              <a:t>24</a:t>
+            </a:r>
+          </a:p>
+        </p:txBody>
+      </p:sp>
+    </p:spTree>
+  </p:cSld>
+  <p:clrMapOvr>
+    <a:masterClrMapping/>
+  </p:clrMapOvr>
+</p:sld>
+</file>
+
+<file path=ppt/slides/slide25.xml><?xml version="1.0" encoding="utf-8"?>
+<p:sld xmlns:a="http://schemas.openxmlformats.org/drawingml/2006/main" xmlns:p="http://schemas.openxmlformats.org/presentationml/2006/main" xmlns:r="http://schemas.openxmlformats.org/officeDocument/2006/relationships">
+  <p:cSld>
+    <p:spTree>
+      <p:nvGrpSpPr>
+        <p:cNvPr id="1" name=""/>
+        <p:cNvGrpSpPr/>
+        <p:nvPr/>
+      </p:nvGrpSpPr>
+      <p:grpSpPr/>
+      <p:sp>
+        <p:nvSpPr>
+          <p:cNvPr id="2" name="TextBox 1"/>
+          <p:cNvSpPr txBox="1"/>
+          <p:nvPr/>
+        </p:nvSpPr>
+        <p:spPr>
+          <a:xfrm>
+            <a:off x="566928" y="420624"/>
+            <a:ext cx="11057839" cy="548640"/>
+          </a:xfrm>
+          <a:prstGeom prst="rect">
+            <a:avLst/>
+          </a:prstGeom>
+          <a:noFill/>
+        </p:spPr>
+        <p:txBody>
+          <a:bodyPr wrap="square" lIns="0" rIns="0" tIns="0" bIns="0">
+            <a:noAutofit/>
+          </a:bodyPr>
+          <a:lstStyle/>
+          <a:p>
+            <a:pPr algn="l">
+              <a:spcBef>
+                <a:spcPts val="0"/>
+              </a:spcBef>
+              <a:spcAft>
+                <a:spcPts val="0"/>
+              </a:spcAft>
+            </a:pPr>
+            <a:r>
+              <a:rPr sz="2600" b="1" i="0">
+                <a:solidFill>
+                  <a:srgbClr val="12395B"/>
+                </a:solidFill>
+                <a:latin typeface="Segoe UI"/>
+                <a:ea typeface="微软雅黑"/>
+              </a:rPr>
+              <a:t>T5 错误归因</a:t>
+            </a:r>
+          </a:p>
+        </p:txBody>
+      </p:sp>
+      <p:sp>
+        <p:nvSpPr>
+          <p:cNvPr id="3" name="Rectangle 2"/>
+          <p:cNvSpPr/>
+          <p:nvPr/>
+        </p:nvSpPr>
+        <p:spPr>
+          <a:xfrm>
+            <a:off x="566928" y="1060704"/>
+            <a:ext cx="960120" cy="40640"/>
+          </a:xfrm>
+          <a:prstGeom prst="rect">
+            <a:avLst/>
+          </a:prstGeom>
+          <a:solidFill>
+            <a:srgbClr val="E07B39"/>
+          </a:solidFill>
+          <a:ln>
+            <a:noFill/>
+          </a:ln>
+          <a:effectLst/>
+        </p:spPr>
+        <p:style>
+          <a:lnRef idx="1">
+            <a:schemeClr val="accent1"/>
+          </a:lnRef>
+          <a:fillRef idx="3">
+            <a:schemeClr val="accent1"/>
+          </a:fillRef>
+          <a:effectRef idx="2">
+            <a:schemeClr val="accent1"/>
+          </a:effectRef>
+          <a:fontRef idx="minor">
+            <a:schemeClr val="lt1"/>
+          </a:fontRef>
+        </p:style>
+        <p:txBody>
+          <a:bodyPr rtlCol="0" anchor="ctr"/>
+          <a:lstStyle/>
+          <a:p>
+            <a:pPr algn="ctr"/>
+          </a:p>
+        </p:txBody>
+      </p:sp>
+      <p:graphicFrame>
+        <p:nvGraphicFramePr>
+          <p:cNvPr id="4" name="Table 3"/>
+          <p:cNvGraphicFramePr>
+            <a:graphicFrameLocks noGrp="1"/>
+          </p:cNvGraphicFramePr>
+          <p:nvPr/>
+        </p:nvGraphicFramePr>
+        <p:xfrm>
+          <a:off x="566928" y="1298448"/>
+          <a:ext cx="11057838" cy="2197100"/>
+        </p:xfrm>
+        <a:graphic>
+          <a:graphicData uri="http://schemas.openxmlformats.org/drawingml/2006/table">
+            <a:tbl>
+              <a:tblPr firstRow="1" bandRow="1">
+                <a:tableStyleId>{5C22544A-7EE6-4342-B048-85BDC9FD1C3A}</a:tableStyleId>
+              </a:tblPr>
+              <a:tblGrid>
+                <a:gridCol w="4445550"/>
+                <a:gridCol w="6612288"/>
+              </a:tblGrid>
+              <a:tr h="439420">
+                <a:tc>
+                  <a:txBody>
+                    <a:bodyPr wrap="square"/>
+                    <a:lstStyle/>
+                    <a:p>
+                      <a:pPr algn="l">
+                        <a:lnSpc>
+                          <a:spcPct val="122000"/>
+                        </a:lnSpc>
+                        <a:spcBef>
+                          <a:spcPts val="0"/>
+                        </a:spcBef>
+                        <a:spcAft>
+                          <a:spcPts val="0"/>
+                        </a:spcAft>
+                      </a:pPr>
+                      <a:r>
+                        <a:rPr sz="1700" b="1" i="0">
+                          <a:solidFill>
+                            <a:srgbClr val="FFFFFF"/>
+                          </a:solidFill>
+                          <a:latin typeface="Segoe UI"/>
+                          <a:ea typeface="微软雅黑"/>
+                        </a:rPr>
+                        <a:t>错法</a:t>
+                      </a:r>
+                    </a:p>
+                  </a:txBody>
+                  <a:tcPr marL="100584" marR="100584" marT="27432" marB="27432" anchor="ctr">
+                    <a:solidFill>
+                      <a:srgbClr val="12395B"/>
+                    </a:solidFill>
+                  </a:tcPr>
+                </a:tc>
+                <a:tc>
+                  <a:txBody>
+                    <a:bodyPr wrap="square"/>
+                    <a:lstStyle/>
+                    <a:p>
+                      <a:pPr algn="l">
+                        <a:lnSpc>
+                          <a:spcPct val="122000"/>
+                        </a:lnSpc>
+                        <a:spcBef>
+                          <a:spcPts val="0"/>
+                        </a:spcBef>
+                        <a:spcAft>
+                          <a:spcPts val="0"/>
+                        </a:spcAft>
+                      </a:pPr>
+                      <a:r>
+                        <a:rPr sz="1700" b="1" i="0">
+                          <a:solidFill>
+                            <a:srgbClr val="FFFFFF"/>
+                          </a:solidFill>
+                          <a:latin typeface="Segoe UI"/>
+                          <a:ea typeface="微软雅黑"/>
+                        </a:rPr>
+                        <a:t>后果</a:t>
+                      </a:r>
+                    </a:p>
+                  </a:txBody>
+                  <a:tcPr marL="100584" marR="100584" marT="27432" marB="27432" anchor="ctr">
+                    <a:solidFill>
+                      <a:srgbClr val="12395B"/>
+                    </a:solidFill>
+                  </a:tcPr>
+                </a:tc>
+              </a:tr>
+              <a:tr h="439420">
+                <a:tc>
+                  <a:txBody>
+                    <a:bodyPr wrap="square"/>
+                    <a:lstStyle/>
+                    <a:p>
+                      <a:pPr algn="l">
+                        <a:lnSpc>
+                          <a:spcPct val="122000"/>
+                        </a:lnSpc>
+                        <a:spcBef>
+                          <a:spcPts val="0"/>
+                        </a:spcBef>
+                        <a:spcAft>
+                          <a:spcPts val="0"/>
+                        </a:spcAft>
+                      </a:pPr>
+                      <a:r>
+                        <a:rPr sz="1700" b="0" i="0">
+                          <a:solidFill>
+                            <a:srgbClr val="242A33"/>
+                          </a:solidFill>
+                          <a:latin typeface="Segoe UI"/>
+                          <a:ea typeface="微软雅黑"/>
+                        </a:rPr>
+                        <a:t>二分下界写 0 或 1</a:t>
+                      </a:r>
+                    </a:p>
+                  </a:txBody>
+                  <a:tcPr marL="100584" marR="100584" marT="27432" marB="27432" anchor="ctr">
+                    <a:solidFill>
+                      <a:srgbClr val="FFFFFF"/>
+                    </a:solidFill>
+                  </a:tcPr>
+                </a:tc>
+                <a:tc>
+                  <a:txBody>
+                    <a:bodyPr wrap="square"/>
+                    <a:lstStyle/>
+                    <a:p>
+                      <a:pPr algn="l">
+                        <a:lnSpc>
+                          <a:spcPct val="122000"/>
+                        </a:lnSpc>
+                        <a:spcBef>
+                          <a:spcPts val="0"/>
+                        </a:spcBef>
+                        <a:spcAft>
+                          <a:spcPts val="0"/>
+                        </a:spcAft>
+                      </a:pPr>
+                      <a:r>
+                        <a:rPr sz="1700" b="0" i="0">
+                          <a:solidFill>
+                            <a:srgbClr val="242A33"/>
+                          </a:solidFill>
+                          <a:latin typeface="Segoe UI"/>
+                          <a:ea typeface="微软雅黑"/>
+                        </a:rPr>
+                        <a:t>cur + x &gt; cap 恒成立，永远不可行 -&gt; 答案错 / 死循环</a:t>
+                      </a:r>
+                    </a:p>
+                  </a:txBody>
+                  <a:tcPr marL="100584" marR="100584" marT="27432" marB="27432" anchor="ctr">
+                    <a:solidFill>
+                      <a:srgbClr val="FFFFFF"/>
+                    </a:solidFill>
+                  </a:tcPr>
+                </a:tc>
+              </a:tr>
+              <a:tr h="439420">
+                <a:tc>
+                  <a:txBody>
+                    <a:bodyPr wrap="square"/>
+                    <a:lstStyle/>
+                    <a:p>
+                      <a:pPr algn="l">
+                        <a:lnSpc>
+                          <a:spcPct val="122000"/>
+                        </a:lnSpc>
+                        <a:spcBef>
+                          <a:spcPts val="0"/>
+                        </a:spcBef>
+                        <a:spcAft>
+                          <a:spcPts val="0"/>
+                        </a:spcAft>
+                      </a:pPr>
+                      <a:r>
+                        <a:rPr sz="1700" b="0" i="0">
+                          <a:solidFill>
+                            <a:srgbClr val="242A33"/>
+                          </a:solidFill>
+                          <a:latin typeface="Segoe UI"/>
+                          <a:ea typeface="微软雅黑"/>
+                        </a:rPr>
+                        <a:t>mid 用 (lo+hi+1)//2 却配 hi = mid</a:t>
+                      </a:r>
+                    </a:p>
+                  </a:txBody>
+                  <a:tcPr marL="100584" marR="100584" marT="27432" marB="27432" anchor="ctr">
+                    <a:solidFill>
+                      <a:srgbClr val="F2F4F7"/>
+                    </a:solidFill>
+                  </a:tcPr>
+                </a:tc>
+                <a:tc>
+                  <a:txBody>
+                    <a:bodyPr wrap="square"/>
+                    <a:lstStyle/>
+                    <a:p>
+                      <a:pPr algn="l">
+                        <a:lnSpc>
+                          <a:spcPct val="122000"/>
+                        </a:lnSpc>
+                        <a:spcBef>
+                          <a:spcPts val="0"/>
+                        </a:spcBef>
+                        <a:spcAft>
+                          <a:spcPts val="0"/>
+                        </a:spcAft>
+                      </a:pPr>
+                      <a:r>
+                        <a:rPr sz="1700" b="0" i="0">
+                          <a:solidFill>
+                            <a:srgbClr val="242A33"/>
+                          </a:solidFill>
+                          <a:latin typeface="Segoe UI"/>
+                          <a:ea typeface="微软雅黑"/>
+                        </a:rPr>
+                        <a:t>取整方向与收缩方向不匹配 -&gt; 死循环 TLE</a:t>
+                      </a:r>
+                    </a:p>
+                  </a:txBody>
+                  <a:tcPr marL="100584" marR="100584" marT="27432" marB="27432" anchor="ctr">
+                    <a:solidFill>
+                      <a:srgbClr val="F2F4F7"/>
+                    </a:solidFill>
+                  </a:tcPr>
+                </a:tc>
+              </a:tr>
+              <a:tr h="439420">
+                <a:tc>
+                  <a:txBody>
+                    <a:bodyPr wrap="square"/>
+                    <a:lstStyle/>
+                    <a:p>
+                      <a:pPr algn="l">
+                        <a:lnSpc>
+                          <a:spcPct val="122000"/>
+                        </a:lnSpc>
+                        <a:spcBef>
+                          <a:spcPts val="0"/>
+                        </a:spcBef>
+                        <a:spcAft>
+                          <a:spcPts val="0"/>
+                        </a:spcAft>
+                      </a:pPr>
+                      <a:r>
+                        <a:rPr sz="1700" b="0" i="0">
+                          <a:solidFill>
+                            <a:srgbClr val="242A33"/>
+                          </a:solidFill>
+                          <a:latin typeface="Segoe UI"/>
+                          <a:ea typeface="微软雅黑"/>
+                        </a:rPr>
+                        <a:t>判据写成 shelves(mid) == k</a:t>
+                      </a:r>
+                    </a:p>
+                  </a:txBody>
+                  <a:tcPr marL="100584" marR="100584" marT="27432" marB="27432" anchor="ctr">
+                    <a:solidFill>
+                      <a:srgbClr val="FFFFFF"/>
+                    </a:solidFill>
+                  </a:tcPr>
+                </a:tc>
+                <a:tc>
+                  <a:txBody>
+                    <a:bodyPr wrap="square"/>
+                    <a:lstStyle/>
+                    <a:p>
+                      <a:pPr algn="l">
+                        <a:lnSpc>
+                          <a:spcPct val="122000"/>
+                        </a:lnSpc>
+                        <a:spcBef>
+                          <a:spcPts val="0"/>
+                        </a:spcBef>
+                        <a:spcAft>
+                          <a:spcPts val="0"/>
+                        </a:spcAft>
+                      </a:pPr>
+                      <a:r>
+                        <a:rPr sz="1700" b="0" i="0">
+                          <a:solidFill>
+                            <a:srgbClr val="242A33"/>
+                          </a:solidFill>
+                          <a:latin typeface="Segoe UI"/>
+                          <a:ea typeface="微软雅黑"/>
+                        </a:rPr>
+                        <a:t>恰好 k 层的最优解被误判不可行 -&gt; 偏大 WA</a:t>
+                      </a:r>
+                    </a:p>
+                  </a:txBody>
+                  <a:tcPr marL="100584" marR="100584" marT="27432" marB="27432" anchor="ctr">
+                    <a:solidFill>
+                      <a:srgbClr val="FFFFFF"/>
+                    </a:solidFill>
+                  </a:tcPr>
+                </a:tc>
+              </a:tr>
+              <a:tr h="439420">
+                <a:tc>
+                  <a:txBody>
+                    <a:bodyPr wrap="square"/>
+                    <a:lstStyle/>
+                    <a:p>
+                      <a:pPr algn="l">
+                        <a:lnSpc>
+                          <a:spcPct val="122000"/>
+                        </a:lnSpc>
+                        <a:spcBef>
+                          <a:spcPts val="0"/>
+                        </a:spcBef>
+                        <a:spcAft>
+                          <a:spcPts val="0"/>
+                        </a:spcAft>
+                      </a:pPr>
+                      <a:r>
+                        <a:rPr sz="1700" b="0" i="0">
+                          <a:solidFill>
+                            <a:srgbClr val="242A33"/>
+                          </a:solidFill>
+                          <a:latin typeface="Segoe UI"/>
+                          <a:ea typeface="微软雅黑"/>
+                        </a:rPr>
+                        <a:t>从 max(a) 起逐个试</a:t>
+                      </a:r>
+                    </a:p>
+                  </a:txBody>
+                  <a:tcPr marL="100584" marR="100584" marT="27432" marB="27432" anchor="ctr">
+                    <a:solidFill>
+                      <a:srgbClr val="F2F4F7"/>
+                    </a:solidFill>
+                  </a:tcPr>
+                </a:tc>
+                <a:tc>
+                  <a:txBody>
+                    <a:bodyPr wrap="square"/>
+                    <a:lstStyle/>
+                    <a:p>
+                      <a:pPr algn="l">
+                        <a:lnSpc>
+                          <a:spcPct val="122000"/>
+                        </a:lnSpc>
+                        <a:spcBef>
+                          <a:spcPts val="0"/>
+                        </a:spcBef>
+                        <a:spcAft>
+                          <a:spcPts val="0"/>
+                        </a:spcAft>
+                      </a:pPr>
+                      <a:r>
+                        <a:rPr sz="1700" b="0" i="0">
+                          <a:solidFill>
+                            <a:srgbClr val="242A33"/>
+                          </a:solidFill>
+                          <a:latin typeface="Segoe UI"/>
+                          <a:ea typeface="微软雅黑"/>
+                        </a:rPr>
+                        <a:t>O(Σa · n) -&gt; TLE</a:t>
+                      </a:r>
+                    </a:p>
+                  </a:txBody>
+                  <a:tcPr marL="100584" marR="100584" marT="27432" marB="27432" anchor="ctr">
+                    <a:solidFill>
+                      <a:srgbClr val="F2F4F7"/>
+                    </a:solidFill>
+                  </a:tcPr>
+                </a:tc>
+              </a:tr>
+            </a:tbl>
+          </a:graphicData>
+        </a:graphic>
+      </p:graphicFrame>
+      <p:sp>
+        <p:nvSpPr>
+          <p:cNvPr id="5" name="TextBox 4"/>
+          <p:cNvSpPr txBox="1"/>
+          <p:nvPr/>
+        </p:nvSpPr>
+        <p:spPr>
+          <a:xfrm>
+            <a:off x="566928" y="3641852"/>
+            <a:ext cx="11057839" cy="329184"/>
+          </a:xfrm>
+          <a:prstGeom prst="rect">
+            <a:avLst/>
+          </a:prstGeom>
+          <a:noFill/>
+        </p:spPr>
+        <p:txBody>
+          <a:bodyPr wrap="square" lIns="0" rIns="0" tIns="0" bIns="0">
+            <a:noAutofit/>
+          </a:bodyPr>
+          <a:lstStyle/>
+          <a:p>
+            <a:pPr algn="l">
+              <a:spcBef>
+                <a:spcPts val="0"/>
+              </a:spcBef>
+              <a:spcAft>
+                <a:spcPts val="0"/>
+              </a:spcAft>
+            </a:pPr>
+            <a:r>
+              <a:rPr sz="1300" b="0" i="0">
+                <a:solidFill>
+                  <a:srgbClr val="6B7582"/>
+                </a:solidFill>
+                <a:latin typeface="Segoe UI"/>
+                <a:ea typeface="微软雅黑"/>
+              </a:rPr>
+              <a:t>二分答案两个固定动作：先确认单调性，再把下界取成"平凡可行的最小值"</a:t>
+            </a:r>
+          </a:p>
+        </p:txBody>
+      </p:sp>
+      <p:sp>
+        <p:nvSpPr>
+          <p:cNvPr id="6" name="TextBox 5"/>
+          <p:cNvSpPr txBox="1"/>
+          <p:nvPr/>
+        </p:nvSpPr>
+        <p:spPr>
+          <a:xfrm>
+            <a:off x="566928" y="6327648"/>
+            <a:ext cx="8229600" cy="310896"/>
+          </a:xfrm>
+          <a:prstGeom prst="rect">
+            <a:avLst/>
+          </a:prstGeom>
+          <a:noFill/>
+        </p:spPr>
+        <p:txBody>
+          <a:bodyPr wrap="square" lIns="0" rIns="0" tIns="0" bIns="0">
+            <a:noAutofit/>
+          </a:bodyPr>
+          <a:lstStyle/>
+          <a:p>
+            <a:pPr algn="l">
+              <a:spcBef>
+                <a:spcPts val="0"/>
+              </a:spcBef>
+              <a:spcAft>
+                <a:spcPts val="0"/>
+              </a:spcAft>
+            </a:pPr>
+            <a:r>
+              <a:rPr sz="1000" b="0" i="0">
+                <a:solidFill>
+                  <a:srgbClr val="6B7582"/>
+                </a:solidFill>
+                <a:latin typeface="Segoe UI"/>
+                <a:ea typeface="微软雅黑"/>
+              </a:rPr>
+              <a:t>计算概论（B） · 第14周 · 闫宏飞 · 2026 Fall</a:t>
+            </a:r>
+          </a:p>
+        </p:txBody>
+      </p:sp>
+      <p:sp>
+        <p:nvSpPr>
+          <p:cNvPr id="7" name="TextBox 6"/>
+          <p:cNvSpPr txBox="1"/>
+          <p:nvPr/>
+        </p:nvSpPr>
+        <p:spPr>
+          <a:xfrm>
+            <a:off x="10710367" y="6327648"/>
+            <a:ext cx="914400" cy="310896"/>
+          </a:xfrm>
+          <a:prstGeom prst="rect">
+            <a:avLst/>
+          </a:prstGeom>
+          <a:noFill/>
+        </p:spPr>
+        <p:txBody>
+          <a:bodyPr wrap="square" lIns="0" rIns="0" tIns="0" bIns="0">
+            <a:noAutofit/>
+          </a:bodyPr>
+          <a:lstStyle/>
+          <a:p>
+            <a:pPr algn="r">
+              <a:spcBef>
+                <a:spcPts val="0"/>
+              </a:spcBef>
+              <a:spcAft>
+                <a:spcPts val="0"/>
+              </a:spcAft>
+            </a:pPr>
+            <a:r>
+              <a:rPr sz="1000" b="0" i="0">
+                <a:solidFill>
+                  <a:srgbClr val="6B7582"/>
+                </a:solidFill>
+                <a:latin typeface="Segoe UI"/>
+                <a:ea typeface="微软雅黑"/>
+              </a:rPr>
+              <a:t>25</a:t>
+            </a:r>
+          </a:p>
+        </p:txBody>
+      </p:sp>
+    </p:spTree>
+  </p:cSld>
+  <p:clrMapOvr>
+    <a:masterClrMapping/>
+  </p:clrMapOvr>
+</p:sld>
+</file>
+
+<file path=ppt/slides/slide26.xml><?xml version="1.0" encoding="utf-8"?>
+<p:sld xmlns:a="http://schemas.openxmlformats.org/drawingml/2006/main" xmlns:p="http://schemas.openxmlformats.org/presentationml/2006/main" xmlns:r="http://schemas.openxmlformats.org/officeDocument/2006/relationships">
+  <p:cSld>
+    <p:spTree>
+      <p:nvGrpSpPr>
+        <p:cNvPr id="1" name=""/>
+        <p:cNvGrpSpPr/>
+        <p:nvPr/>
+      </p:nvGrpSpPr>
+      <p:grpSpPr/>
+      <p:sp>
+        <p:nvSpPr>
+          <p:cNvPr id="2" name="TextBox 1"/>
+          <p:cNvSpPr txBox="1"/>
+          <p:nvPr/>
+        </p:nvSpPr>
+        <p:spPr>
+          <a:xfrm>
+            <a:off x="566928" y="420624"/>
+            <a:ext cx="11057839" cy="548640"/>
+          </a:xfrm>
+          <a:prstGeom prst="rect">
+            <a:avLst/>
+          </a:prstGeom>
+          <a:noFill/>
+        </p:spPr>
+        <p:txBody>
+          <a:bodyPr wrap="square" lIns="0" rIns="0" tIns="0" bIns="0">
+            <a:noAutofit/>
+          </a:bodyPr>
+          <a:lstStyle/>
+          <a:p>
+            <a:pPr algn="l">
+              <a:spcBef>
+                <a:spcPts val="0"/>
+              </a:spcBef>
+              <a:spcAft>
+                <a:spcPts val="0"/>
+              </a:spcAft>
+            </a:pPr>
+            <a:r>
+              <a:rPr sz="2600" b="1" i="0">
+                <a:solidFill>
+                  <a:srgbClr val="12395B"/>
+                </a:solidFill>
+                <a:latin typeface="Segoe UI"/>
+                <a:ea typeface="微软雅黑"/>
+              </a:rPr>
+              <a:t>T6 敌友阵营（20 分）· 扩展域并查集</a:t>
+            </a:r>
+          </a:p>
+        </p:txBody>
+      </p:sp>
+      <p:sp>
+        <p:nvSpPr>
+          <p:cNvPr id="3" name="Rectangle 2"/>
+          <p:cNvSpPr/>
+          <p:nvPr/>
+        </p:nvSpPr>
+        <p:spPr>
+          <a:xfrm>
+            <a:off x="566928" y="1060704"/>
+            <a:ext cx="960120" cy="40640"/>
+          </a:xfrm>
+          <a:prstGeom prst="rect">
+            <a:avLst/>
+          </a:prstGeom>
+          <a:solidFill>
+            <a:srgbClr val="E07B39"/>
+          </a:solidFill>
+          <a:ln>
+            <a:noFill/>
+          </a:ln>
+          <a:effectLst/>
+        </p:spPr>
+        <p:style>
+          <a:lnRef idx="1">
+            <a:schemeClr val="accent1"/>
+          </a:lnRef>
+          <a:fillRef idx="3">
+            <a:schemeClr val="accent1"/>
+          </a:fillRef>
+          <a:effectRef idx="2">
+            <a:schemeClr val="accent1"/>
+          </a:effectRef>
+          <a:fontRef idx="minor">
+            <a:schemeClr val="lt1"/>
+          </a:fontRef>
+        </p:style>
+        <p:txBody>
+          <a:bodyPr rtlCol="0" anchor="ctr"/>
+          <a:lstStyle/>
+          <a:p>
+            <a:pPr algn="ctr"/>
+          </a:p>
+        </p:txBody>
+      </p:sp>
+      <p:sp>
+        <p:nvSpPr>
+          <p:cNvPr id="4" name="Rectangle 3"/>
+          <p:cNvSpPr/>
+          <p:nvPr/>
+        </p:nvSpPr>
+        <p:spPr>
+          <a:xfrm>
+            <a:off x="566928" y="1298448"/>
+            <a:ext cx="11057839" cy="4443984"/>
+          </a:xfrm>
+          <a:prstGeom prst="rect">
+            <a:avLst/>
+          </a:prstGeom>
+          <a:solidFill>
+            <a:srgbClr val="F6F7F9"/>
+          </a:solidFill>
+          <a:ln w="9525">
+            <a:solidFill>
+              <a:srgbClr val="D6DCE4"/>
+            </a:solidFill>
+          </a:ln>
+          <a:effectLst/>
+        </p:spPr>
+        <p:style>
+          <a:lnRef idx="1">
+            <a:schemeClr val="accent1"/>
+          </a:lnRef>
+          <a:fillRef idx="3">
+            <a:schemeClr val="accent1"/>
+          </a:fillRef>
+          <a:effectRef idx="2">
+            <a:schemeClr val="accent1"/>
+          </a:effectRef>
+          <a:fontRef idx="minor">
+            <a:schemeClr val="lt1"/>
+          </a:fontRef>
+        </p:style>
+        <p:txBody>
+          <a:bodyPr rtlCol="0" anchor="ctr"/>
+          <a:lstStyle/>
+          <a:p>
+            <a:pPr algn="ctr"/>
+          </a:p>
+        </p:txBody>
+      </p:sp>
+      <p:sp>
+        <p:nvSpPr>
+          <p:cNvPr id="5" name="TextBox 4"/>
+          <p:cNvSpPr txBox="1"/>
+          <p:nvPr/>
+        </p:nvSpPr>
+        <p:spPr>
+          <a:xfrm>
+            <a:off x="822960" y="1399032"/>
+            <a:ext cx="10545775" cy="4242816"/>
+          </a:xfrm>
+          <a:prstGeom prst="rect">
+            <a:avLst/>
+          </a:prstGeom>
+          <a:noFill/>
+        </p:spPr>
+        <p:txBody>
+          <a:bodyPr wrap="square" lIns="0" rIns="0" tIns="0" bIns="0">
+            <a:noAutofit/>
+          </a:bodyPr>
+          <a:lstStyle/>
+          <a:p>
+            <a:pPr algn="l">
+              <a:lnSpc>
+                <a:spcPts val="1130"/>
+              </a:lnSpc>
+              <a:spcBef>
+                <a:spcPts val="0"/>
+              </a:spcBef>
+              <a:spcAft>
+                <a:spcPts val="0"/>
+              </a:spcAft>
+            </a:pPr>
+            <a:r>
+              <a:rPr sz="869" b="0" i="0">
+                <a:solidFill>
+                  <a:srgbClr val="242A33"/>
+                </a:solidFill>
+                <a:latin typeface="Consolas"/>
+                <a:ea typeface="Consolas"/>
+              </a:rPr>
+              <a:t>def camps(n, rels):</a:t>
+            </a:r>
+          </a:p>
+          <a:p>
+            <a:pPr algn="l">
+              <a:lnSpc>
+                <a:spcPts val="1130"/>
+              </a:lnSpc>
+              <a:spcBef>
+                <a:spcPts val="0"/>
+              </a:spcBef>
+              <a:spcAft>
+                <a:spcPts val="0"/>
+              </a:spcAft>
+            </a:pPr>
+            <a:r>
+              <a:rPr sz="869" b="0" i="0">
+                <a:solidFill>
+                  <a:srgbClr val="242A33"/>
+                </a:solidFill>
+                <a:latin typeface="Consolas"/>
+                <a:ea typeface="Consolas"/>
+              </a:rPr>
+              <a:t>    p = list(range(2 * n + 1))           # i 与 i+n 互为对立域</a:t>
+            </a:r>
+          </a:p>
+          <a:p>
+            <a:pPr algn="l">
+              <a:lnSpc>
+                <a:spcPts val="1130"/>
+              </a:lnSpc>
+              <a:spcBef>
+                <a:spcPts val="0"/>
+              </a:spcBef>
+              <a:spcAft>
+                <a:spcPts val="0"/>
+              </a:spcAft>
+            </a:pPr>
+            <a:r>
+              <a:rPr sz="869" b="0" i="0">
+                <a:solidFill>
+                  <a:srgbClr val="242A33"/>
+                </a:solidFill>
+                <a:latin typeface="Consolas"/>
+                <a:ea typeface="Consolas"/>
+              </a:rPr>
+              <a:t> </a:t>
+            </a:r>
+          </a:p>
+          <a:p>
+            <a:pPr algn="l">
+              <a:lnSpc>
+                <a:spcPts val="1130"/>
+              </a:lnSpc>
+              <a:spcBef>
+                <a:spcPts val="0"/>
+              </a:spcBef>
+              <a:spcAft>
+                <a:spcPts val="0"/>
+              </a:spcAft>
+            </a:pPr>
+            <a:r>
+              <a:rPr sz="869" b="0" i="0">
+                <a:solidFill>
+                  <a:srgbClr val="242A33"/>
+                </a:solidFill>
+                <a:latin typeface="Consolas"/>
+                <a:ea typeface="Consolas"/>
+              </a:rPr>
+              <a:t>    def find(x):</a:t>
+            </a:r>
+          </a:p>
+          <a:p>
+            <a:pPr algn="l">
+              <a:lnSpc>
+                <a:spcPts val="1130"/>
+              </a:lnSpc>
+              <a:spcBef>
+                <a:spcPts val="0"/>
+              </a:spcBef>
+              <a:spcAft>
+                <a:spcPts val="0"/>
+              </a:spcAft>
+            </a:pPr>
+            <a:r>
+              <a:rPr sz="869" b="0" i="0">
+                <a:solidFill>
+                  <a:srgbClr val="242A33"/>
+                </a:solidFill>
+                <a:latin typeface="Consolas"/>
+                <a:ea typeface="Consolas"/>
+              </a:rPr>
+              <a:t>        while p[x] != x:</a:t>
+            </a:r>
+          </a:p>
+          <a:p>
+            <a:pPr algn="l">
+              <a:lnSpc>
+                <a:spcPts val="1130"/>
+              </a:lnSpc>
+              <a:spcBef>
+                <a:spcPts val="0"/>
+              </a:spcBef>
+              <a:spcAft>
+                <a:spcPts val="0"/>
+              </a:spcAft>
+            </a:pPr>
+            <a:r>
+              <a:rPr sz="869" b="0" i="0">
+                <a:solidFill>
+                  <a:srgbClr val="242A33"/>
+                </a:solidFill>
+                <a:latin typeface="Consolas"/>
+                <a:ea typeface="Consolas"/>
+              </a:rPr>
+              <a:t>            p[x] = p[p[x]]               # 路径压缩：不写这行 10^5 条关系就 TLE</a:t>
+            </a:r>
+          </a:p>
+          <a:p>
+            <a:pPr algn="l">
+              <a:lnSpc>
+                <a:spcPts val="1130"/>
+              </a:lnSpc>
+              <a:spcBef>
+                <a:spcPts val="0"/>
+              </a:spcBef>
+              <a:spcAft>
+                <a:spcPts val="0"/>
+              </a:spcAft>
+            </a:pPr>
+            <a:r>
+              <a:rPr sz="869" b="0" i="0">
+                <a:solidFill>
+                  <a:srgbClr val="242A33"/>
+                </a:solidFill>
+                <a:latin typeface="Consolas"/>
+                <a:ea typeface="Consolas"/>
+              </a:rPr>
+              <a:t>            x = p[x]</a:t>
+            </a:r>
+          </a:p>
+          <a:p>
+            <a:pPr algn="l">
+              <a:lnSpc>
+                <a:spcPts val="1130"/>
+              </a:lnSpc>
+              <a:spcBef>
+                <a:spcPts val="0"/>
+              </a:spcBef>
+              <a:spcAft>
+                <a:spcPts val="0"/>
+              </a:spcAft>
+            </a:pPr>
+            <a:r>
+              <a:rPr sz="869" b="0" i="0">
+                <a:solidFill>
+                  <a:srgbClr val="242A33"/>
+                </a:solidFill>
+                <a:latin typeface="Consolas"/>
+                <a:ea typeface="Consolas"/>
+              </a:rPr>
+              <a:t>        return x</a:t>
+            </a:r>
+          </a:p>
+          <a:p>
+            <a:pPr algn="l">
+              <a:lnSpc>
+                <a:spcPts val="1130"/>
+              </a:lnSpc>
+              <a:spcBef>
+                <a:spcPts val="0"/>
+              </a:spcBef>
+              <a:spcAft>
+                <a:spcPts val="0"/>
+              </a:spcAft>
+            </a:pPr>
+            <a:r>
+              <a:rPr sz="869" b="0" i="0">
+                <a:solidFill>
+                  <a:srgbClr val="242A33"/>
+                </a:solidFill>
+                <a:latin typeface="Consolas"/>
+                <a:ea typeface="Consolas"/>
+              </a:rPr>
+              <a:t> </a:t>
+            </a:r>
+          </a:p>
+          <a:p>
+            <a:pPr algn="l">
+              <a:lnSpc>
+                <a:spcPts val="1130"/>
+              </a:lnSpc>
+              <a:spcBef>
+                <a:spcPts val="0"/>
+              </a:spcBef>
+              <a:spcAft>
+                <a:spcPts val="0"/>
+              </a:spcAft>
+            </a:pPr>
+            <a:r>
+              <a:rPr sz="869" b="0" i="0">
+                <a:solidFill>
+                  <a:srgbClr val="242A33"/>
+                </a:solidFill>
+                <a:latin typeface="Consolas"/>
+                <a:ea typeface="Consolas"/>
+              </a:rPr>
+              <a:t>    def union(x, y):</a:t>
+            </a:r>
+          </a:p>
+          <a:p>
+            <a:pPr algn="l">
+              <a:lnSpc>
+                <a:spcPts val="1130"/>
+              </a:lnSpc>
+              <a:spcBef>
+                <a:spcPts val="0"/>
+              </a:spcBef>
+              <a:spcAft>
+                <a:spcPts val="0"/>
+              </a:spcAft>
+            </a:pPr>
+            <a:r>
+              <a:rPr sz="869" b="0" i="0">
+                <a:solidFill>
+                  <a:srgbClr val="242A33"/>
+                </a:solidFill>
+                <a:latin typeface="Consolas"/>
+                <a:ea typeface="Consolas"/>
+              </a:rPr>
+              <a:t>        rx, ry = find(x), find(y)</a:t>
+            </a:r>
+          </a:p>
+          <a:p>
+            <a:pPr algn="l">
+              <a:lnSpc>
+                <a:spcPts val="1130"/>
+              </a:lnSpc>
+              <a:spcBef>
+                <a:spcPts val="0"/>
+              </a:spcBef>
+              <a:spcAft>
+                <a:spcPts val="0"/>
+              </a:spcAft>
+            </a:pPr>
+            <a:r>
+              <a:rPr sz="869" b="0" i="0">
+                <a:solidFill>
+                  <a:srgbClr val="242A33"/>
+                </a:solidFill>
+                <a:latin typeface="Consolas"/>
+                <a:ea typeface="Consolas"/>
+              </a:rPr>
+              <a:t>        if rx != ry:</a:t>
+            </a:r>
+          </a:p>
+          <a:p>
+            <a:pPr algn="l">
+              <a:lnSpc>
+                <a:spcPts val="1130"/>
+              </a:lnSpc>
+              <a:spcBef>
+                <a:spcPts val="0"/>
+              </a:spcBef>
+              <a:spcAft>
+                <a:spcPts val="0"/>
+              </a:spcAft>
+            </a:pPr>
+            <a:r>
+              <a:rPr sz="869" b="0" i="0">
+                <a:solidFill>
+                  <a:srgbClr val="242A33"/>
+                </a:solidFill>
+                <a:latin typeface="Consolas"/>
+                <a:ea typeface="Consolas"/>
+              </a:rPr>
+              <a:t>            p[rx] = ry</a:t>
+            </a:r>
+          </a:p>
+          <a:p>
+            <a:pPr algn="l">
+              <a:lnSpc>
+                <a:spcPts val="1130"/>
+              </a:lnSpc>
+              <a:spcBef>
+                <a:spcPts val="0"/>
+              </a:spcBef>
+              <a:spcAft>
+                <a:spcPts val="0"/>
+              </a:spcAft>
+            </a:pPr>
+            <a:r>
+              <a:rPr sz="869" b="0" i="0">
+                <a:solidFill>
+                  <a:srgbClr val="242A33"/>
+                </a:solidFill>
+                <a:latin typeface="Consolas"/>
+                <a:ea typeface="Consolas"/>
+              </a:rPr>
+              <a:t> </a:t>
+            </a:r>
+          </a:p>
+          <a:p>
+            <a:pPr algn="l">
+              <a:lnSpc>
+                <a:spcPts val="1130"/>
+              </a:lnSpc>
+              <a:spcBef>
+                <a:spcPts val="0"/>
+              </a:spcBef>
+              <a:spcAft>
+                <a:spcPts val="0"/>
+              </a:spcAft>
+            </a:pPr>
+            <a:r>
+              <a:rPr sz="869" b="0" i="0">
+                <a:solidFill>
+                  <a:srgbClr val="242A33"/>
+                </a:solidFill>
+                <a:latin typeface="Consolas"/>
+                <a:ea typeface="Consolas"/>
+              </a:rPr>
+              <a:t>    bad = 0</a:t>
+            </a:r>
+          </a:p>
+          <a:p>
+            <a:pPr algn="l">
+              <a:lnSpc>
+                <a:spcPts val="1130"/>
+              </a:lnSpc>
+              <a:spcBef>
+                <a:spcPts val="0"/>
+              </a:spcBef>
+              <a:spcAft>
+                <a:spcPts val="0"/>
+              </a:spcAft>
+            </a:pPr>
+            <a:r>
+              <a:rPr sz="869" b="0" i="0">
+                <a:solidFill>
+                  <a:srgbClr val="242A33"/>
+                </a:solidFill>
+                <a:latin typeface="Consolas"/>
+                <a:ea typeface="Consolas"/>
+              </a:rPr>
+              <a:t>    for i, (op, a, b) in enumerate(rels, 1):</a:t>
+            </a:r>
+          </a:p>
+          <a:p>
+            <a:pPr algn="l">
+              <a:lnSpc>
+                <a:spcPts val="1130"/>
+              </a:lnSpc>
+              <a:spcBef>
+                <a:spcPts val="0"/>
+              </a:spcBef>
+              <a:spcAft>
+                <a:spcPts val="0"/>
+              </a:spcAft>
+            </a:pPr>
+            <a:r>
+              <a:rPr sz="869" b="0" i="0">
+                <a:solidFill>
+                  <a:srgbClr val="242A33"/>
+                </a:solidFill>
+                <a:latin typeface="Consolas"/>
+                <a:ea typeface="Consolas"/>
+              </a:rPr>
+              <a:t>        # 说好是朋友却已推出是敌人，或反过来 —— 就是矛盾</a:t>
+            </a:r>
+          </a:p>
+          <a:p>
+            <a:pPr algn="l">
+              <a:lnSpc>
+                <a:spcPts val="1130"/>
+              </a:lnSpc>
+              <a:spcBef>
+                <a:spcPts val="0"/>
+              </a:spcBef>
+              <a:spcAft>
+                <a:spcPts val="0"/>
+              </a:spcAft>
+            </a:pPr>
+            <a:r>
+              <a:rPr sz="869" b="0" i="0">
+                <a:solidFill>
+                  <a:srgbClr val="242A33"/>
+                </a:solidFill>
+                <a:latin typeface="Consolas"/>
+                <a:ea typeface="Consolas"/>
+              </a:rPr>
+              <a:t>        clash = find(a) == (find(b + n) if op == 'F' else find(b))</a:t>
+            </a:r>
+          </a:p>
+          <a:p>
+            <a:pPr algn="l">
+              <a:lnSpc>
+                <a:spcPts val="1130"/>
+              </a:lnSpc>
+              <a:spcBef>
+                <a:spcPts val="0"/>
+              </a:spcBef>
+              <a:spcAft>
+                <a:spcPts val="0"/>
+              </a:spcAft>
+            </a:pPr>
+            <a:r>
+              <a:rPr sz="869" b="0" i="0">
+                <a:solidFill>
+                  <a:srgbClr val="242A33"/>
+                </a:solidFill>
+                <a:latin typeface="Consolas"/>
+                <a:ea typeface="Consolas"/>
+              </a:rPr>
+              <a:t>        if clash:</a:t>
+            </a:r>
+          </a:p>
+          <a:p>
+            <a:pPr algn="l">
+              <a:lnSpc>
+                <a:spcPts val="1130"/>
+              </a:lnSpc>
+              <a:spcBef>
+                <a:spcPts val="0"/>
+              </a:spcBef>
+              <a:spcAft>
+                <a:spcPts val="0"/>
+              </a:spcAft>
+            </a:pPr>
+            <a:r>
+              <a:rPr sz="869" b="0" i="0">
+                <a:solidFill>
+                  <a:srgbClr val="242A33"/>
+                </a:solidFill>
+                <a:latin typeface="Consolas"/>
+                <a:ea typeface="Consolas"/>
+              </a:rPr>
+              <a:t>            bad = bad or i</a:t>
+            </a:r>
+          </a:p>
+          <a:p>
+            <a:pPr algn="l">
+              <a:lnSpc>
+                <a:spcPts val="1130"/>
+              </a:lnSpc>
+              <a:spcBef>
+                <a:spcPts val="0"/>
+              </a:spcBef>
+              <a:spcAft>
+                <a:spcPts val="0"/>
+              </a:spcAft>
+            </a:pPr>
+            <a:r>
+              <a:rPr sz="869" b="0" i="0">
+                <a:solidFill>
+                  <a:srgbClr val="242A33"/>
+                </a:solidFill>
+                <a:latin typeface="Consolas"/>
+                <a:ea typeface="Consolas"/>
+              </a:rPr>
+              <a:t>            continue                     # 矛盾的关系不采纳</a:t>
+            </a:r>
+          </a:p>
+          <a:p>
+            <a:pPr algn="l">
+              <a:lnSpc>
+                <a:spcPts val="1130"/>
+              </a:lnSpc>
+              <a:spcBef>
+                <a:spcPts val="0"/>
+              </a:spcBef>
+              <a:spcAft>
+                <a:spcPts val="0"/>
+              </a:spcAft>
+            </a:pPr>
+            <a:r>
+              <a:rPr sz="869" b="0" i="0">
+                <a:solidFill>
+                  <a:srgbClr val="242A33"/>
+                </a:solidFill>
+                <a:latin typeface="Consolas"/>
+                <a:ea typeface="Consolas"/>
+              </a:rPr>
+              <a:t>        if op == 'F':</a:t>
+            </a:r>
+          </a:p>
+          <a:p>
+            <a:pPr algn="l">
+              <a:lnSpc>
+                <a:spcPts val="1130"/>
+              </a:lnSpc>
+              <a:spcBef>
+                <a:spcPts val="0"/>
+              </a:spcBef>
+              <a:spcAft>
+                <a:spcPts val="0"/>
+              </a:spcAft>
+            </a:pPr>
+            <a:r>
+              <a:rPr sz="869" b="0" i="0">
+                <a:solidFill>
+                  <a:srgbClr val="242A33"/>
+                </a:solidFill>
+                <a:latin typeface="Consolas"/>
+                <a:ea typeface="Consolas"/>
+              </a:rPr>
+              <a:t>            union(a, b); union(a + n, b + n)</a:t>
+            </a:r>
+          </a:p>
+          <a:p>
+            <a:pPr algn="l">
+              <a:lnSpc>
+                <a:spcPts val="1130"/>
+              </a:lnSpc>
+              <a:spcBef>
+                <a:spcPts val="0"/>
+              </a:spcBef>
+              <a:spcAft>
+                <a:spcPts val="0"/>
+              </a:spcAft>
+            </a:pPr>
+            <a:r>
+              <a:rPr sz="869" b="0" i="0">
+                <a:solidFill>
+                  <a:srgbClr val="242A33"/>
+                </a:solidFill>
+                <a:latin typeface="Consolas"/>
+                <a:ea typeface="Consolas"/>
+              </a:rPr>
+              <a:t>        else:</a:t>
+            </a:r>
+          </a:p>
+          <a:p>
+            <a:pPr algn="l">
+              <a:lnSpc>
+                <a:spcPts val="1130"/>
+              </a:lnSpc>
+              <a:spcBef>
+                <a:spcPts val="0"/>
+              </a:spcBef>
+              <a:spcAft>
+                <a:spcPts val="0"/>
+              </a:spcAft>
+            </a:pPr>
+            <a:r>
+              <a:rPr sz="869" b="0" i="0">
+                <a:solidFill>
+                  <a:srgbClr val="242A33"/>
+                </a:solidFill>
+                <a:latin typeface="Consolas"/>
+                <a:ea typeface="Consolas"/>
+              </a:rPr>
+              <a:t>            union(a, b + n); union(a + n, b)</a:t>
+            </a:r>
+          </a:p>
+          <a:p>
+            <a:pPr algn="l">
+              <a:lnSpc>
+                <a:spcPts val="1130"/>
+              </a:lnSpc>
+              <a:spcBef>
+                <a:spcPts val="0"/>
+              </a:spcBef>
+              <a:spcAft>
+                <a:spcPts val="0"/>
+              </a:spcAft>
+            </a:pPr>
+            <a:r>
+              <a:rPr sz="869" b="0" i="0">
+                <a:solidFill>
+                  <a:srgbClr val="242A33"/>
+                </a:solidFill>
+                <a:latin typeface="Consolas"/>
+                <a:ea typeface="Consolas"/>
+              </a:rPr>
+              <a:t>    return bad, len({find(i) for i in range(1, n + 1)})</a:t>
+            </a:r>
+          </a:p>
+          <a:p>
+            <a:pPr algn="l">
+              <a:lnSpc>
+                <a:spcPts val="1130"/>
+              </a:lnSpc>
+              <a:spcBef>
+                <a:spcPts val="0"/>
+              </a:spcBef>
+              <a:spcAft>
+                <a:spcPts val="0"/>
+              </a:spcAft>
+            </a:pPr>
+            <a:r>
+              <a:rPr sz="869" b="0" i="0">
+                <a:solidFill>
+                  <a:srgbClr val="242A33"/>
+                </a:solidFill>
+                <a:latin typeface="Consolas"/>
+                <a:ea typeface="Consolas"/>
+              </a:rPr>
+              <a:t> </a:t>
+            </a:r>
+          </a:p>
+          <a:p>
+            <a:pPr algn="l">
+              <a:lnSpc>
+                <a:spcPts val="1130"/>
+              </a:lnSpc>
+              <a:spcBef>
+                <a:spcPts val="0"/>
+              </a:spcBef>
+              <a:spcAft>
+                <a:spcPts val="0"/>
+              </a:spcAft>
+            </a:pPr>
+            <a:r>
+              <a:rPr sz="869" b="0" i="0">
+                <a:solidFill>
+                  <a:srgbClr val="242A33"/>
+                </a:solidFill>
+                <a:latin typeface="Consolas"/>
+                <a:ea typeface="Consolas"/>
+              </a:rPr>
+              <a:t> </a:t>
+            </a:r>
+          </a:p>
+          <a:p>
+            <a:pPr algn="l">
+              <a:lnSpc>
+                <a:spcPts val="1130"/>
+              </a:lnSpc>
+              <a:spcBef>
+                <a:spcPts val="0"/>
+              </a:spcBef>
+              <a:spcAft>
+                <a:spcPts val="0"/>
+              </a:spcAft>
+            </a:pPr>
+            <a:r>
+              <a:rPr sz="869" b="0" i="0">
+                <a:solidFill>
+                  <a:srgbClr val="242A33"/>
+                </a:solidFill>
+                <a:latin typeface="Consolas"/>
+                <a:ea typeface="Consolas"/>
+              </a:rPr>
+              <a:t>print(camps(5, [('F', 1, 2), ('E', 2, 3), ('E', 3, 4), ('F', 4, 5)]))   # (0, 2)</a:t>
+            </a:r>
+          </a:p>
+        </p:txBody>
+      </p:sp>
+      <p:sp>
+        <p:nvSpPr>
+          <p:cNvPr id="6" name="TextBox 5"/>
+          <p:cNvSpPr txBox="1"/>
+          <p:nvPr/>
+        </p:nvSpPr>
+        <p:spPr>
+          <a:xfrm>
+            <a:off x="566928" y="5861304"/>
+            <a:ext cx="11057839" cy="329184"/>
+          </a:xfrm>
+          <a:prstGeom prst="rect">
+            <a:avLst/>
+          </a:prstGeom>
+          <a:noFill/>
+        </p:spPr>
+        <p:txBody>
+          <a:bodyPr wrap="square" lIns="0" rIns="0" tIns="0" bIns="0">
+            <a:noAutofit/>
+          </a:bodyPr>
+          <a:lstStyle/>
+          <a:p>
+            <a:pPr algn="l">
+              <a:spcBef>
+                <a:spcPts val="0"/>
+              </a:spcBef>
+              <a:spcAft>
+                <a:spcPts val="0"/>
+              </a:spcAft>
+            </a:pPr>
+            <a:r>
+              <a:rPr sz="1300" b="0" i="0">
+                <a:solidFill>
+                  <a:srgbClr val="6B7582"/>
+                </a:solidFill>
+                <a:latin typeface="Segoe UI"/>
+                <a:ea typeface="微软雅黑"/>
+              </a:rPr>
+              <a:t>朋友同向合并，敌人交叉合并；数团体只数 1..n 这半边的根</a:t>
+            </a:r>
+          </a:p>
+        </p:txBody>
+      </p:sp>
+      <p:sp>
+        <p:nvSpPr>
+          <p:cNvPr id="7" name="TextBox 6"/>
+          <p:cNvSpPr txBox="1"/>
+          <p:nvPr/>
+        </p:nvSpPr>
+        <p:spPr>
+          <a:xfrm>
+            <a:off x="566928" y="6327648"/>
+            <a:ext cx="8229600" cy="310896"/>
+          </a:xfrm>
+          <a:prstGeom prst="rect">
+            <a:avLst/>
+          </a:prstGeom>
+          <a:noFill/>
+        </p:spPr>
+        <p:txBody>
+          <a:bodyPr wrap="square" lIns="0" rIns="0" tIns="0" bIns="0">
+            <a:noAutofit/>
+          </a:bodyPr>
+          <a:lstStyle/>
+          <a:p>
+            <a:pPr algn="l">
+              <a:spcBef>
+                <a:spcPts val="0"/>
+              </a:spcBef>
+              <a:spcAft>
+                <a:spcPts val="0"/>
+              </a:spcAft>
+            </a:pPr>
+            <a:r>
+              <a:rPr sz="1000" b="0" i="0">
+                <a:solidFill>
+                  <a:srgbClr val="6B7582"/>
+                </a:solidFill>
+                <a:latin typeface="Segoe UI"/>
+                <a:ea typeface="微软雅黑"/>
+              </a:rPr>
+              <a:t>计算概论（B） · 第14周 · 闫宏飞 · 2026 Fall</a:t>
+            </a:r>
+          </a:p>
+        </p:txBody>
+      </p:sp>
+      <p:sp>
+        <p:nvSpPr>
+          <p:cNvPr id="8" name="TextBox 7"/>
+          <p:cNvSpPr txBox="1"/>
+          <p:nvPr/>
+        </p:nvSpPr>
+        <p:spPr>
+          <a:xfrm>
+            <a:off x="10710367" y="6327648"/>
+            <a:ext cx="914400" cy="310896"/>
+          </a:xfrm>
+          <a:prstGeom prst="rect">
+            <a:avLst/>
+          </a:prstGeom>
+          <a:noFill/>
+        </p:spPr>
+        <p:txBody>
+          <a:bodyPr wrap="square" lIns="0" rIns="0" tIns="0" bIns="0">
+            <a:noAutofit/>
+          </a:bodyPr>
+          <a:lstStyle/>
+          <a:p>
+            <a:pPr algn="r">
+              <a:spcBef>
+                <a:spcPts val="0"/>
+              </a:spcBef>
+              <a:spcAft>
+                <a:spcPts val="0"/>
+              </a:spcAft>
+            </a:pPr>
+            <a:r>
+              <a:rPr sz="1000" b="0" i="0">
+                <a:solidFill>
+                  <a:srgbClr val="6B7582"/>
+                </a:solidFill>
+                <a:latin typeface="Segoe UI"/>
+                <a:ea typeface="微软雅黑"/>
+              </a:rPr>
+              <a:t>26</a:t>
+            </a:r>
+          </a:p>
+        </p:txBody>
+      </p:sp>
+    </p:spTree>
+  </p:cSld>
+  <p:clrMapOvr>
+    <a:masterClrMapping/>
+  </p:clrMapOvr>
+</p:sld>
+</file>
+
+<file path=ppt/slides/slide27.xml><?xml version="1.0" encoding="utf-8"?>
+<p:sld xmlns:a="http://schemas.openxmlformats.org/drawingml/2006/main" xmlns:p="http://schemas.openxmlformats.org/presentationml/2006/main" xmlns:r="http://schemas.openxmlformats.org/officeDocument/2006/relationships">
+  <p:cSld>
+    <p:spTree>
+      <p:nvGrpSpPr>
+        <p:cNvPr id="1" name=""/>
+        <p:cNvGrpSpPr/>
+        <p:nvPr/>
+      </p:nvGrpSpPr>
+      <p:grpSpPr/>
+      <p:sp>
+        <p:nvSpPr>
+          <p:cNvPr id="2" name="TextBox 1"/>
+          <p:cNvSpPr txBox="1"/>
+          <p:nvPr/>
+        </p:nvSpPr>
+        <p:spPr>
+          <a:xfrm>
+            <a:off x="566928" y="420624"/>
+            <a:ext cx="11057839" cy="548640"/>
+          </a:xfrm>
+          <a:prstGeom prst="rect">
+            <a:avLst/>
+          </a:prstGeom>
+          <a:noFill/>
+        </p:spPr>
+        <p:txBody>
+          <a:bodyPr wrap="square" lIns="0" rIns="0" tIns="0" bIns="0">
+            <a:noAutofit/>
+          </a:bodyPr>
+          <a:lstStyle/>
+          <a:p>
+            <a:pPr algn="l">
+              <a:spcBef>
+                <a:spcPts val="0"/>
+              </a:spcBef>
+              <a:spcAft>
+                <a:spcPts val="0"/>
+              </a:spcAft>
+            </a:pPr>
+            <a:r>
+              <a:rPr sz="2600" b="1" i="0">
+                <a:solidFill>
+                  <a:srgbClr val="12395B"/>
+                </a:solidFill>
+                <a:latin typeface="Segoe UI"/>
+                <a:ea typeface="微软雅黑"/>
+              </a:rPr>
+              <a:t>T6 错误归因</a:t>
+            </a:r>
+          </a:p>
+        </p:txBody>
+      </p:sp>
+      <p:sp>
+        <p:nvSpPr>
+          <p:cNvPr id="3" name="Rectangle 2"/>
+          <p:cNvSpPr/>
+          <p:nvPr/>
+        </p:nvSpPr>
+        <p:spPr>
+          <a:xfrm>
+            <a:off x="566928" y="1060704"/>
+            <a:ext cx="960120" cy="40640"/>
+          </a:xfrm>
+          <a:prstGeom prst="rect">
+            <a:avLst/>
+          </a:prstGeom>
+          <a:solidFill>
+            <a:srgbClr val="E07B39"/>
+          </a:solidFill>
+          <a:ln>
+            <a:noFill/>
+          </a:ln>
+          <a:effectLst/>
+        </p:spPr>
+        <p:style>
+          <a:lnRef idx="1">
+            <a:schemeClr val="accent1"/>
+          </a:lnRef>
+          <a:fillRef idx="3">
+            <a:schemeClr val="accent1"/>
+          </a:fillRef>
+          <a:effectRef idx="2">
+            <a:schemeClr val="accent1"/>
+          </a:effectRef>
+          <a:fontRef idx="minor">
+            <a:schemeClr val="lt1"/>
+          </a:fontRef>
+        </p:style>
+        <p:txBody>
+          <a:bodyPr rtlCol="0" anchor="ctr"/>
+          <a:lstStyle/>
+          <a:p>
+            <a:pPr algn="ctr"/>
+          </a:p>
+        </p:txBody>
+      </p:sp>
+      <p:graphicFrame>
+        <p:nvGraphicFramePr>
+          <p:cNvPr id="4" name="Table 3"/>
+          <p:cNvGraphicFramePr>
+            <a:graphicFrameLocks noGrp="1"/>
+          </p:cNvGraphicFramePr>
+          <p:nvPr/>
+        </p:nvGraphicFramePr>
+        <p:xfrm>
+          <a:off x="566928" y="1298448"/>
+          <a:ext cx="11057838" cy="2636520"/>
+        </p:xfrm>
+        <a:graphic>
+          <a:graphicData uri="http://schemas.openxmlformats.org/drawingml/2006/table">
+            <a:tbl>
+              <a:tblPr firstRow="1" bandRow="1">
+                <a:tableStyleId>{5C22544A-7EE6-4342-B048-85BDC9FD1C3A}</a:tableStyleId>
+              </a:tblPr>
+              <a:tblGrid>
+                <a:gridCol w="4310402"/>
+                <a:gridCol w="6747436"/>
+              </a:tblGrid>
+              <a:tr h="439420">
+                <a:tc>
+                  <a:txBody>
+                    <a:bodyPr wrap="square"/>
+                    <a:lstStyle/>
+                    <a:p>
+                      <a:pPr algn="l">
+                        <a:lnSpc>
+                          <a:spcPct val="122000"/>
+                        </a:lnSpc>
+                        <a:spcBef>
+                          <a:spcPts val="0"/>
+                        </a:spcBef>
+                        <a:spcAft>
+                          <a:spcPts val="0"/>
+                        </a:spcAft>
+                      </a:pPr>
+                      <a:r>
+                        <a:rPr sz="1700" b="1" i="0">
+                          <a:solidFill>
+                            <a:srgbClr val="FFFFFF"/>
+                          </a:solidFill>
+                          <a:latin typeface="Segoe UI"/>
+                          <a:ea typeface="微软雅黑"/>
+                        </a:rPr>
+                        <a:t>错法</a:t>
+                      </a:r>
+                    </a:p>
+                  </a:txBody>
+                  <a:tcPr marL="100584" marR="100584" marT="27432" marB="27432" anchor="ctr">
+                    <a:solidFill>
+                      <a:srgbClr val="12395B"/>
+                    </a:solidFill>
+                  </a:tcPr>
+                </a:tc>
+                <a:tc>
+                  <a:txBody>
+                    <a:bodyPr wrap="square"/>
+                    <a:lstStyle/>
+                    <a:p>
+                      <a:pPr algn="l">
+                        <a:lnSpc>
+                          <a:spcPct val="122000"/>
+                        </a:lnSpc>
+                        <a:spcBef>
+                          <a:spcPts val="0"/>
+                        </a:spcBef>
+                        <a:spcAft>
+                          <a:spcPts val="0"/>
+                        </a:spcAft>
+                      </a:pPr>
+                      <a:r>
+                        <a:rPr sz="1700" b="1" i="0">
+                          <a:solidFill>
+                            <a:srgbClr val="FFFFFF"/>
+                          </a:solidFill>
+                          <a:latin typeface="Segoe UI"/>
+                          <a:ea typeface="微软雅黑"/>
+                        </a:rPr>
+                        <a:t>后果</a:t>
+                      </a:r>
+                    </a:p>
+                  </a:txBody>
+                  <a:tcPr marL="100584" marR="100584" marT="27432" marB="27432" anchor="ctr">
+                    <a:solidFill>
+                      <a:srgbClr val="12395B"/>
+                    </a:solidFill>
+                  </a:tcPr>
+                </a:tc>
+              </a:tr>
+              <a:tr h="439420">
+                <a:tc>
+                  <a:txBody>
+                    <a:bodyPr wrap="square"/>
+                    <a:lstStyle/>
+                    <a:p>
+                      <a:pPr algn="l">
+                        <a:lnSpc>
+                          <a:spcPct val="122000"/>
+                        </a:lnSpc>
+                        <a:spcBef>
+                          <a:spcPts val="0"/>
+                        </a:spcBef>
+                        <a:spcAft>
+                          <a:spcPts val="0"/>
+                        </a:spcAft>
+                      </a:pPr>
+                      <a:r>
+                        <a:rPr sz="1700" b="0" i="0">
+                          <a:solidFill>
+                            <a:srgbClr val="242A33"/>
+                          </a:solidFill>
+                          <a:latin typeface="Segoe UI"/>
+                          <a:ea typeface="微软雅黑"/>
+                        </a:rPr>
+                        <a:t>find 里不写路径压缩</a:t>
+                      </a:r>
+                    </a:p>
+                  </a:txBody>
+                  <a:tcPr marL="100584" marR="100584" marT="27432" marB="27432" anchor="ctr">
+                    <a:solidFill>
+                      <a:srgbClr val="FFFFFF"/>
+                    </a:solidFill>
+                  </a:tcPr>
+                </a:tc>
+                <a:tc>
+                  <a:txBody>
+                    <a:bodyPr wrap="square"/>
+                    <a:lstStyle/>
+                    <a:p>
+                      <a:pPr algn="l">
+                        <a:lnSpc>
+                          <a:spcPct val="122000"/>
+                        </a:lnSpc>
+                        <a:spcBef>
+                          <a:spcPts val="0"/>
+                        </a:spcBef>
+                        <a:spcAft>
+                          <a:spcPts val="0"/>
+                        </a:spcAft>
+                      </a:pPr>
+                      <a:r>
+                        <a:rPr sz="1700" b="0" i="0">
+                          <a:solidFill>
+                            <a:srgbClr val="242A33"/>
+                          </a:solidFill>
+                          <a:latin typeface="Segoe UI"/>
+                          <a:ea typeface="微软雅黑"/>
+                        </a:rPr>
+                        <a:t>链式数据退化成 O(n)，10^5 条关系 -&gt; TLE</a:t>
+                      </a:r>
+                    </a:p>
+                  </a:txBody>
+                  <a:tcPr marL="100584" marR="100584" marT="27432" marB="27432" anchor="ctr">
+                    <a:solidFill>
+                      <a:srgbClr val="FFFFFF"/>
+                    </a:solidFill>
+                  </a:tcPr>
+                </a:tc>
+              </a:tr>
+              <a:tr h="439420">
+                <a:tc>
+                  <a:txBody>
+                    <a:bodyPr wrap="square"/>
+                    <a:lstStyle/>
+                    <a:p>
+                      <a:pPr algn="l">
+                        <a:lnSpc>
+                          <a:spcPct val="122000"/>
+                        </a:lnSpc>
+                        <a:spcBef>
+                          <a:spcPts val="0"/>
+                        </a:spcBef>
+                        <a:spcAft>
+                          <a:spcPts val="0"/>
+                        </a:spcAft>
+                      </a:pPr>
+                      <a:r>
+                        <a:rPr sz="1700" b="0" i="0">
+                          <a:solidFill>
+                            <a:srgbClr val="242A33"/>
+                          </a:solidFill>
+                          <a:latin typeface="Segoe UI"/>
+                          <a:ea typeface="微软雅黑"/>
+                        </a:rPr>
+                        <a:t>只开 n 个点，另用"敌人表"</a:t>
+                      </a:r>
+                    </a:p>
+                  </a:txBody>
+                  <a:tcPr marL="100584" marR="100584" marT="27432" marB="27432" anchor="ctr">
+                    <a:solidFill>
+                      <a:srgbClr val="F2F4F7"/>
+                    </a:solidFill>
+                  </a:tcPr>
+                </a:tc>
+                <a:tc>
+                  <a:txBody>
+                    <a:bodyPr wrap="square"/>
+                    <a:lstStyle/>
+                    <a:p>
+                      <a:pPr algn="l">
+                        <a:lnSpc>
+                          <a:spcPct val="122000"/>
+                        </a:lnSpc>
+                        <a:spcBef>
+                          <a:spcPts val="0"/>
+                        </a:spcBef>
+                        <a:spcAft>
+                          <a:spcPts val="0"/>
+                        </a:spcAft>
+                      </a:pPr>
+                      <a:r>
+                        <a:rPr sz="1700" b="0" i="0">
+                          <a:solidFill>
+                            <a:srgbClr val="242A33"/>
+                          </a:solidFill>
+                          <a:latin typeface="Segoe UI"/>
+                          <a:ea typeface="微软雅黑"/>
+                        </a:rPr>
+                        <a:t>推不出"敌人的敌人是朋友" -&gt; WA</a:t>
+                      </a:r>
+                    </a:p>
+                  </a:txBody>
+                  <a:tcPr marL="100584" marR="100584" marT="27432" marB="27432" anchor="ctr">
+                    <a:solidFill>
+                      <a:srgbClr val="F2F4F7"/>
+                    </a:solidFill>
+                  </a:tcPr>
+                </a:tc>
+              </a:tr>
+              <a:tr h="439420">
+                <a:tc>
+                  <a:txBody>
+                    <a:bodyPr wrap="square"/>
+                    <a:lstStyle/>
+                    <a:p>
+                      <a:pPr algn="l">
+                        <a:lnSpc>
+                          <a:spcPct val="122000"/>
+                        </a:lnSpc>
+                        <a:spcBef>
+                          <a:spcPts val="0"/>
+                        </a:spcBef>
+                        <a:spcAft>
+                          <a:spcPts val="0"/>
+                        </a:spcAft>
+                      </a:pPr>
+                      <a:r>
+                        <a:rPr sz="1700" b="0" i="0">
+                          <a:solidFill>
+                            <a:srgbClr val="242A33"/>
+                          </a:solidFill>
+                          <a:latin typeface="Segoe UI"/>
+                          <a:ea typeface="微软雅黑"/>
+                        </a:rPr>
+                        <a:t>E a b 漏写 union(a+n, b)</a:t>
+                      </a:r>
+                    </a:p>
+                  </a:txBody>
+                  <a:tcPr marL="100584" marR="100584" marT="27432" marB="27432" anchor="ctr">
+                    <a:solidFill>
+                      <a:srgbClr val="FFFFFF"/>
+                    </a:solidFill>
+                  </a:tcPr>
+                </a:tc>
+                <a:tc>
+                  <a:txBody>
+                    <a:bodyPr wrap="square"/>
+                    <a:lstStyle/>
+                    <a:p>
+                      <a:pPr algn="l">
+                        <a:lnSpc>
+                          <a:spcPct val="122000"/>
+                        </a:lnSpc>
+                        <a:spcBef>
+                          <a:spcPts val="0"/>
+                        </a:spcBef>
+                        <a:spcAft>
+                          <a:spcPts val="0"/>
+                        </a:spcAft>
+                      </a:pPr>
+                      <a:r>
+                        <a:rPr sz="1700" b="0" i="0">
+                          <a:solidFill>
+                            <a:srgbClr val="242A33"/>
+                          </a:solidFill>
+                          <a:latin typeface="Segoe UI"/>
+                          <a:ea typeface="微软雅黑"/>
+                        </a:rPr>
+                        <a:t>对称性丢失，部分矛盾查不出 -&gt; WA</a:t>
+                      </a:r>
+                    </a:p>
+                  </a:txBody>
+                  <a:tcPr marL="100584" marR="100584" marT="27432" marB="27432" anchor="ctr">
+                    <a:solidFill>
+                      <a:srgbClr val="FFFFFF"/>
+                    </a:solidFill>
+                  </a:tcPr>
+                </a:tc>
+              </a:tr>
+              <a:tr h="439420">
+                <a:tc>
+                  <a:txBody>
+                    <a:bodyPr wrap="square"/>
+                    <a:lstStyle/>
+                    <a:p>
+                      <a:pPr algn="l">
+                        <a:lnSpc>
+                          <a:spcPct val="122000"/>
+                        </a:lnSpc>
+                        <a:spcBef>
+                          <a:spcPts val="0"/>
+                        </a:spcBef>
+                        <a:spcAft>
+                          <a:spcPts val="0"/>
+                        </a:spcAft>
+                      </a:pPr>
+                      <a:r>
+                        <a:rPr sz="1700" b="0" i="0">
+                          <a:solidFill>
+                            <a:srgbClr val="242A33"/>
+                          </a:solidFill>
+                          <a:latin typeface="Segoe UI"/>
+                          <a:ea typeface="微软雅黑"/>
+                        </a:rPr>
+                        <a:t>判出矛盾后照样合并</a:t>
+                      </a:r>
+                    </a:p>
+                  </a:txBody>
+                  <a:tcPr marL="100584" marR="100584" marT="27432" marB="27432" anchor="ctr">
+                    <a:solidFill>
+                      <a:srgbClr val="F2F4F7"/>
+                    </a:solidFill>
+                  </a:tcPr>
+                </a:tc>
+                <a:tc>
+                  <a:txBody>
+                    <a:bodyPr wrap="square"/>
+                    <a:lstStyle/>
+                    <a:p>
+                      <a:pPr algn="l">
+                        <a:lnSpc>
+                          <a:spcPct val="122000"/>
+                        </a:lnSpc>
+                        <a:spcBef>
+                          <a:spcPts val="0"/>
+                        </a:spcBef>
+                        <a:spcAft>
+                          <a:spcPts val="0"/>
+                        </a:spcAft>
+                      </a:pPr>
+                      <a:r>
+                        <a:rPr sz="1700" b="0" i="0">
+                          <a:solidFill>
+                            <a:srgbClr val="242A33"/>
+                          </a:solidFill>
+                          <a:latin typeface="Segoe UI"/>
+                          <a:ea typeface="微软雅黑"/>
+                        </a:rPr>
+                        <a:t>错误信息污染后续判断 -&gt; 团体数 WA</a:t>
+                      </a:r>
+                    </a:p>
+                  </a:txBody>
+                  <a:tcPr marL="100584" marR="100584" marT="27432" marB="27432" anchor="ctr">
+                    <a:solidFill>
+                      <a:srgbClr val="F2F4F7"/>
+                    </a:solidFill>
+                  </a:tcPr>
+                </a:tc>
+              </a:tr>
+              <a:tr h="439420">
+                <a:tc>
+                  <a:txBody>
+                    <a:bodyPr wrap="square"/>
+                    <a:lstStyle/>
+                    <a:p>
+                      <a:pPr algn="l">
+                        <a:lnSpc>
+                          <a:spcPct val="122000"/>
+                        </a:lnSpc>
+                        <a:spcBef>
+                          <a:spcPts val="0"/>
+                        </a:spcBef>
+                        <a:spcAft>
+                          <a:spcPts val="0"/>
+                        </a:spcAft>
+                      </a:pPr>
+                      <a:r>
+                        <a:rPr sz="1700" b="0" i="0">
+                          <a:solidFill>
+                            <a:srgbClr val="242A33"/>
+                          </a:solidFill>
+                          <a:latin typeface="Segoe UI"/>
+                          <a:ea typeface="微软雅黑"/>
+                        </a:rPr>
+                        <a:t>数团体时把 1..2n 全数一遍</a:t>
+                      </a:r>
+                    </a:p>
+                  </a:txBody>
+                  <a:tcPr marL="100584" marR="100584" marT="27432" marB="27432" anchor="ctr">
+                    <a:solidFill>
+                      <a:srgbClr val="FFFFFF"/>
+                    </a:solidFill>
+                  </a:tcPr>
+                </a:tc>
+                <a:tc>
+                  <a:txBody>
+                    <a:bodyPr wrap="square"/>
+                    <a:lstStyle/>
+                    <a:p>
+                      <a:pPr algn="l">
+                        <a:lnSpc>
+                          <a:spcPct val="122000"/>
+                        </a:lnSpc>
+                        <a:spcBef>
+                          <a:spcPts val="0"/>
+                        </a:spcBef>
+                        <a:spcAft>
+                          <a:spcPts val="0"/>
+                        </a:spcAft>
+                      </a:pPr>
+                      <a:r>
+                        <a:rPr sz="1700" b="0" i="0">
+                          <a:solidFill>
+                            <a:srgbClr val="242A33"/>
+                          </a:solidFill>
+                          <a:latin typeface="Segoe UI"/>
+                          <a:ea typeface="微软雅黑"/>
+                        </a:rPr>
+                        <a:t>对立域被当成真人 -&gt; 个数翻倍 WA</a:t>
+                      </a:r>
+                    </a:p>
+                  </a:txBody>
+                  <a:tcPr marL="100584" marR="100584" marT="27432" marB="27432" anchor="ctr">
+                    <a:solidFill>
+                      <a:srgbClr val="FFFFFF"/>
+                    </a:solidFill>
+                  </a:tcPr>
+                </a:tc>
+              </a:tr>
+            </a:tbl>
+          </a:graphicData>
+        </a:graphic>
+      </p:graphicFrame>
+      <p:sp>
+        <p:nvSpPr>
+          <p:cNvPr id="5" name="TextBox 4"/>
+          <p:cNvSpPr txBox="1"/>
+          <p:nvPr/>
+        </p:nvSpPr>
+        <p:spPr>
+          <a:xfrm>
+            <a:off x="566928" y="4081272"/>
+            <a:ext cx="11057839" cy="329184"/>
+          </a:xfrm>
+          <a:prstGeom prst="rect">
+            <a:avLst/>
+          </a:prstGeom>
+          <a:noFill/>
+        </p:spPr>
+        <p:txBody>
+          <a:bodyPr wrap="square" lIns="0" rIns="0" tIns="0" bIns="0">
+            <a:noAutofit/>
+          </a:bodyPr>
+          <a:lstStyle/>
+          <a:p>
+            <a:pPr algn="l">
+              <a:spcBef>
+                <a:spcPts val="0"/>
+              </a:spcBef>
+              <a:spcAft>
+                <a:spcPts val="0"/>
+              </a:spcAft>
+            </a:pPr>
+            <a:r>
+              <a:rPr sz="1300" b="0" i="0">
+                <a:solidFill>
+                  <a:srgbClr val="6B7582"/>
+                </a:solidFill>
+                <a:latin typeface="Segoe UI"/>
+                <a:ea typeface="微软雅黑"/>
+              </a:rPr>
+              <a:t>关系里出现"否定"且否定之间还能推理，就开对立域 —— 与 T3"状态加一维"同一类判断</a:t>
+            </a:r>
+          </a:p>
+        </p:txBody>
+      </p:sp>
+      <p:sp>
+        <p:nvSpPr>
+          <p:cNvPr id="6" name="TextBox 5"/>
+          <p:cNvSpPr txBox="1"/>
+          <p:nvPr/>
+        </p:nvSpPr>
+        <p:spPr>
+          <a:xfrm>
+            <a:off x="566928" y="6327648"/>
+            <a:ext cx="8229600" cy="310896"/>
+          </a:xfrm>
+          <a:prstGeom prst="rect">
+            <a:avLst/>
+          </a:prstGeom>
+          <a:noFill/>
+        </p:spPr>
+        <p:txBody>
+          <a:bodyPr wrap="square" lIns="0" rIns="0" tIns="0" bIns="0">
+            <a:noAutofit/>
+          </a:bodyPr>
+          <a:lstStyle/>
+          <a:p>
+            <a:pPr algn="l">
+              <a:spcBef>
+                <a:spcPts val="0"/>
+              </a:spcBef>
+              <a:spcAft>
+                <a:spcPts val="0"/>
+              </a:spcAft>
+            </a:pPr>
+            <a:r>
+              <a:rPr sz="1000" b="0" i="0">
+                <a:solidFill>
+                  <a:srgbClr val="6B7582"/>
+                </a:solidFill>
+                <a:latin typeface="Segoe UI"/>
+                <a:ea typeface="微软雅黑"/>
+              </a:rPr>
+              <a:t>计算概论（B） · 第14周 · 闫宏飞 · 2026 Fall</a:t>
+            </a:r>
+          </a:p>
+        </p:txBody>
+      </p:sp>
+      <p:sp>
+        <p:nvSpPr>
+          <p:cNvPr id="7" name="TextBox 6"/>
+          <p:cNvSpPr txBox="1"/>
+          <p:nvPr/>
+        </p:nvSpPr>
+        <p:spPr>
+          <a:xfrm>
+            <a:off x="10710367" y="6327648"/>
+            <a:ext cx="914400" cy="310896"/>
+          </a:xfrm>
+          <a:prstGeom prst="rect">
+            <a:avLst/>
+          </a:prstGeom>
+          <a:noFill/>
+        </p:spPr>
+        <p:txBody>
+          <a:bodyPr wrap="square" lIns="0" rIns="0" tIns="0" bIns="0">
+            <a:noAutofit/>
+          </a:bodyPr>
+          <a:lstStyle/>
+          <a:p>
+            <a:pPr algn="r">
+              <a:spcBef>
+                <a:spcPts val="0"/>
+              </a:spcBef>
+              <a:spcAft>
+                <a:spcPts val="0"/>
+              </a:spcAft>
+            </a:pPr>
+            <a:r>
+              <a:rPr sz="1000" b="0" i="0">
+                <a:solidFill>
+                  <a:srgbClr val="6B7582"/>
+                </a:solidFill>
+                <a:latin typeface="Segoe UI"/>
+                <a:ea typeface="微软雅黑"/>
+              </a:rPr>
+              <a:t>27</a:t>
+            </a:r>
+          </a:p>
+        </p:txBody>
+      </p:sp>
+    </p:spTree>
+  </p:cSld>
+  <p:clrMapOvr>
+    <a:masterClrMapping/>
+  </p:clrMapOvr>
+</p:sld>
+</file>
+
+<file path=ppt/slides/slide28.xml><?xml version="1.0" encoding="utf-8"?>
+<p:sld xmlns:a="http://schemas.openxmlformats.org/drawingml/2006/main" xmlns:p="http://schemas.openxmlformats.org/presentationml/2006/main" xmlns:r="http://schemas.openxmlformats.org/officeDocument/2006/relationships">
+  <p:cSld>
+    <p:spTree>
+      <p:nvGrpSpPr>
+        <p:cNvPr id="1" name=""/>
+        <p:cNvGrpSpPr/>
+        <p:nvPr/>
+      </p:nvGrpSpPr>
+      <p:grpSpPr/>
+      <p:sp>
+        <p:nvSpPr>
           <p:cNvPr id="2" name="Rectangle 1"/>
           <p:cNvSpPr/>
           <p:nvPr/>
@@ -11580,7 +14739,7 @@
 </p:sld>
 </file>
 
-<file path=ppt/slides/slide25.xml><?xml version="1.0" encoding="utf-8"?>
+<file path=ppt/slides/slide29.xml><?xml version="1.0" encoding="utf-8"?>
 <p:sld xmlns:a="http://schemas.openxmlformats.org/drawingml/2006/main" xmlns:p="http://schemas.openxmlformats.org/presentationml/2006/main" xmlns:r="http://schemas.openxmlformats.org/officeDocument/2006/relationships">
   <p:cSld>
     <p:spTree>
@@ -12513,7 +15672,7 @@
                 <a:latin typeface="Segoe UI"/>
                 <a:ea typeface="微软雅黑"/>
               </a:rPr>
-              <a:t>25</a:t>
+              <a:t>29</a:t>
             </a:r>
           </a:p>
         </p:txBody>
@@ -12526,7 +15685,7 @@
 </p:sld>
 </file>
 
-<file path=ppt/slides/slide26.xml><?xml version="1.0" encoding="utf-8"?>
+<file path=ppt/slides/slide3.xml><?xml version="1.0" encoding="utf-8"?>
 <p:sld xmlns:a="http://schemas.openxmlformats.org/drawingml/2006/main" xmlns:p="http://schemas.openxmlformats.org/presentationml/2006/main" xmlns:r="http://schemas.openxmlformats.org/officeDocument/2006/relationships">
   <p:cSld>
     <p:spTree>
@@ -12574,7 +15733,7 @@
                 <a:latin typeface="Segoe UI"/>
                 <a:ea typeface="微软雅黑"/>
               </a:rPr>
-              <a:t>高频陷阱清单</a:t>
+              <a:t>大语言模型在做什么</a:t>
             </a:r>
           </a:p>
         </p:txBody>
@@ -12631,8 +15790,8 @@
         </p:nvSpPr>
         <p:spPr>
           <a:xfrm>
-            <a:off x="566928" y="1298448"/>
-            <a:ext cx="11057839" cy="4864608"/>
+            <a:off x="566928" y="2117090"/>
+            <a:ext cx="11057839" cy="2806700"/>
           </a:xfrm>
           <a:prstGeom prst="rect">
             <a:avLst/>
@@ -12647,349 +15806,281 @@
           <a:p>
             <a:pPr algn="l">
               <a:lnSpc>
-                <a:spcPct val="132000"/>
-              </a:lnSpc>
-              <a:spcBef>
-                <a:spcPts val="0"/>
-              </a:spcBef>
-              <a:spcAft>
-                <a:spcPts val="1240"/>
-              </a:spcAft>
-            </a:pPr>
-            <a:r>
-              <a:rPr sz="2000" b="0" i="0">
-                <a:solidFill>
-                  <a:srgbClr val="242A33"/>
+                <a:spcPts val="2210"/>
+              </a:lnSpc>
+              <a:spcBef>
+                <a:spcPts val="0"/>
+              </a:spcBef>
+              <a:spcAft>
+                <a:spcPts val="0"/>
+              </a:spcAft>
+            </a:pPr>
+            <a:r>
+              <a:rPr sz="1700" b="0" i="0">
+                <a:solidFill>
+                  <a:srgbClr val="12395B"/>
+                </a:solidFill>
+                <a:latin typeface="Consolas"/>
+                <a:ea typeface="Consolas"/>
+              </a:rPr>
+              <a:t> </a:t>
+            </a:r>
+          </a:p>
+          <a:p>
+            <a:pPr algn="l">
+              <a:lnSpc>
+                <a:spcPts val="2210"/>
+              </a:lnSpc>
+              <a:spcBef>
+                <a:spcPts val="0"/>
+              </a:spcBef>
+              <a:spcAft>
+                <a:spcPts val="0"/>
+              </a:spcAft>
+            </a:pPr>
+            <a:r>
+              <a:rPr sz="1700" b="0" i="0">
+                <a:solidFill>
+                  <a:srgbClr val="12395B"/>
+                </a:solidFill>
+                <a:latin typeface="Consolas"/>
+                <a:ea typeface="Consolas"/>
+              </a:rPr>
+              <a:t>   输入: "计算概论这门课主要用"</a:t>
+            </a:r>
+          </a:p>
+          <a:p>
+            <a:pPr algn="l">
+              <a:lnSpc>
+                <a:spcPts val="2210"/>
+              </a:lnSpc>
+              <a:spcBef>
+                <a:spcPts val="0"/>
+              </a:spcBef>
+              <a:spcAft>
+                <a:spcPts val="0"/>
+              </a:spcAft>
+            </a:pPr>
+            <a:r>
+              <a:rPr sz="1700" b="0" i="0">
+                <a:solidFill>
+                  <a:srgbClr val="12395B"/>
+                </a:solidFill>
+                <a:latin typeface="Consolas"/>
+                <a:ea typeface="Consolas"/>
+              </a:rPr>
+              <a:t>                |</a:t>
+            </a:r>
+          </a:p>
+          <a:p>
+            <a:pPr algn="l">
+              <a:lnSpc>
+                <a:spcPts val="2210"/>
+              </a:lnSpc>
+              <a:spcBef>
+                <a:spcPts val="0"/>
+              </a:spcBef>
+              <a:spcAft>
+                <a:spcPts val="0"/>
+              </a:spcAft>
+            </a:pPr>
+            <a:r>
+              <a:rPr sz="1700" b="0" i="0">
+                <a:solidFill>
+                  <a:srgbClr val="12395B"/>
+                </a:solidFill>
+                <a:latin typeface="Consolas"/>
+                <a:ea typeface="Consolas"/>
+              </a:rPr>
+              <a:t>   模型给出下一个 token 的概率分布:</a:t>
+            </a:r>
+          </a:p>
+          <a:p>
+            <a:pPr algn="l">
+              <a:lnSpc>
+                <a:spcPts val="2210"/>
+              </a:lnSpc>
+              <a:spcBef>
+                <a:spcPts val="0"/>
+              </a:spcBef>
+              <a:spcAft>
+                <a:spcPts val="0"/>
+              </a:spcAft>
+            </a:pPr>
+            <a:r>
+              <a:rPr sz="1700" b="0" i="0">
+                <a:solidFill>
+                  <a:srgbClr val="12395B"/>
+                </a:solidFill>
+                <a:latin typeface="Consolas"/>
+                <a:ea typeface="Consolas"/>
+              </a:rPr>
+              <a:t>       "Python"  0.62</a:t>
+            </a:r>
+          </a:p>
+          <a:p>
+            <a:pPr algn="l">
+              <a:lnSpc>
+                <a:spcPts val="2210"/>
+              </a:lnSpc>
+              <a:spcBef>
+                <a:spcPts val="0"/>
+              </a:spcBef>
+              <a:spcAft>
+                <a:spcPts val="0"/>
+              </a:spcAft>
+            </a:pPr>
+            <a:r>
+              <a:rPr sz="1700" b="0" i="0">
+                <a:solidFill>
+                  <a:srgbClr val="12395B"/>
+                </a:solidFill>
+                <a:latin typeface="Consolas"/>
+                <a:ea typeface="Consolas"/>
+              </a:rPr>
+              <a:t>       "C++"     0.18</a:t>
+            </a:r>
+          </a:p>
+          <a:p>
+            <a:pPr algn="l">
+              <a:lnSpc>
+                <a:spcPts val="2210"/>
+              </a:lnSpc>
+              <a:spcBef>
+                <a:spcPts val="0"/>
+              </a:spcBef>
+              <a:spcAft>
+                <a:spcPts val="0"/>
+              </a:spcAft>
+            </a:pPr>
+            <a:r>
+              <a:rPr sz="1700" b="0" i="0">
+                <a:solidFill>
+                  <a:srgbClr val="12395B"/>
+                </a:solidFill>
+                <a:latin typeface="Consolas"/>
+                <a:ea typeface="Consolas"/>
+              </a:rPr>
+              <a:t>       "Java"    0.05</a:t>
+            </a:r>
+          </a:p>
+          <a:p>
+            <a:pPr algn="l">
+              <a:lnSpc>
+                <a:spcPts val="2210"/>
+              </a:lnSpc>
+              <a:spcBef>
+                <a:spcPts val="0"/>
+              </a:spcBef>
+              <a:spcAft>
+                <a:spcPts val="0"/>
+              </a:spcAft>
+            </a:pPr>
+            <a:r>
+              <a:rPr sz="1700" b="0" i="0">
+                <a:solidFill>
+                  <a:srgbClr val="12395B"/>
+                </a:solidFill>
+                <a:latin typeface="Consolas"/>
+                <a:ea typeface="Consolas"/>
+              </a:rPr>
+              <a:t>        ...</a:t>
+            </a:r>
+          </a:p>
+          <a:p>
+            <a:pPr algn="l">
+              <a:lnSpc>
+                <a:spcPts val="2210"/>
+              </a:lnSpc>
+              <a:spcBef>
+                <a:spcPts val="0"/>
+              </a:spcBef>
+              <a:spcAft>
+                <a:spcPts val="0"/>
+              </a:spcAft>
+            </a:pPr>
+            <a:r>
+              <a:rPr sz="1700" b="0" i="0">
+                <a:solidFill>
+                  <a:srgbClr val="12395B"/>
+                </a:solidFill>
+                <a:latin typeface="Consolas"/>
+                <a:ea typeface="Consolas"/>
+              </a:rPr>
+              <a:t>                |</a:t>
+            </a:r>
+          </a:p>
+          <a:p>
+            <a:pPr algn="l">
+              <a:lnSpc>
+                <a:spcPts val="2210"/>
+              </a:lnSpc>
+              <a:spcBef>
+                <a:spcPts val="0"/>
+              </a:spcBef>
+              <a:spcAft>
+                <a:spcPts val="0"/>
+              </a:spcAft>
+            </a:pPr>
+            <a:r>
+              <a:rPr sz="1700" b="0" i="0">
+                <a:solidFill>
+                  <a:srgbClr val="12395B"/>
+                </a:solidFill>
+                <a:latin typeface="Consolas"/>
+                <a:ea typeface="Consolas"/>
+              </a:rPr>
+              <a:t>   采样一个 -&gt; "Python" -&gt; 拼回输入 -&gt; 再预测下一个</a:t>
+            </a:r>
+          </a:p>
+        </p:txBody>
+      </p:sp>
+      <p:sp>
+        <p:nvSpPr>
+          <p:cNvPr id="5" name="TextBox 4"/>
+          <p:cNvSpPr txBox="1"/>
+          <p:nvPr/>
+        </p:nvSpPr>
+        <p:spPr>
+          <a:xfrm>
+            <a:off x="566928" y="5888736"/>
+            <a:ext cx="11057839" cy="329184"/>
+          </a:xfrm>
+          <a:prstGeom prst="rect">
+            <a:avLst/>
+          </a:prstGeom>
+          <a:noFill/>
+        </p:spPr>
+        <p:txBody>
+          <a:bodyPr wrap="square" lIns="0" rIns="0" tIns="0" bIns="0">
+            <a:noAutofit/>
+          </a:bodyPr>
+          <a:lstStyle/>
+          <a:p>
+            <a:pPr algn="l">
+              <a:spcBef>
+                <a:spcPts val="0"/>
+              </a:spcBef>
+              <a:spcAft>
+                <a:spcPts val="0"/>
+              </a:spcAft>
+            </a:pPr>
+            <a:r>
+              <a:rPr sz="1300" b="0" i="0">
+                <a:solidFill>
+                  <a:srgbClr val="6B7582"/>
                 </a:solidFill>
                 <a:latin typeface="Segoe UI"/>
                 <a:ea typeface="微软雅黑"/>
               </a:rPr>
-              <a:t>•  ☐ 忘 </a:t>
-            </a:r>
-            <a:r>
-              <a:rPr sz="1879" b="0" i="0">
-                <a:solidFill>
-                  <a:srgbClr val="242A33"/>
-                </a:solidFill>
-                <a:latin typeface="Consolas"/>
-                <a:ea typeface="Consolas"/>
-              </a:rPr>
-              <a:t>int()</a:t>
-            </a:r>
-            <a:r>
-              <a:rPr sz="2000" b="0" i="0">
-                <a:solidFill>
-                  <a:srgbClr val="242A33"/>
-                </a:solidFill>
-                <a:latin typeface="Segoe UI"/>
-                <a:ea typeface="微软雅黑"/>
-              </a:rPr>
-              <a:t> / 忘 </a:t>
-            </a:r>
-            <a:r>
-              <a:rPr sz="1879" b="0" i="0">
-                <a:solidFill>
-                  <a:srgbClr val="242A33"/>
-                </a:solidFill>
-                <a:latin typeface="Consolas"/>
-                <a:ea typeface="Consolas"/>
-              </a:rPr>
-              <a:t>strip()</a:t>
-            </a:r>
-            <a:r>
-              <a:rPr sz="2000" b="0" i="0">
-                <a:solidFill>
-                  <a:srgbClr val="242A33"/>
-                </a:solidFill>
-                <a:latin typeface="Segoe UI"/>
-                <a:ea typeface="微软雅黑"/>
-              </a:rPr>
-              <a:t> ｜ ☐ </a:t>
-            </a:r>
-            <a:r>
-              <a:rPr sz="1879" b="0" i="0">
-                <a:solidFill>
-                  <a:srgbClr val="242A33"/>
-                </a:solidFill>
-                <a:latin typeface="Consolas"/>
-                <a:ea typeface="Consolas"/>
-              </a:rPr>
-              <a:t>[[0]*n]*m</a:t>
-            </a:r>
-            <a:r>
-              <a:rPr sz="2000" b="0" i="0">
-                <a:solidFill>
-                  <a:srgbClr val="242A33"/>
-                </a:solidFill>
-                <a:latin typeface="Segoe UI"/>
-                <a:ea typeface="微软雅黑"/>
-              </a:rPr>
-              <a:t> 别名陷阱</a:t>
-            </a:r>
-          </a:p>
-          <a:p>
-            <a:pPr algn="l">
-              <a:lnSpc>
-                <a:spcPct val="132000"/>
-              </a:lnSpc>
-              <a:spcBef>
-                <a:spcPts val="0"/>
-              </a:spcBef>
-              <a:spcAft>
-                <a:spcPts val="1240"/>
-              </a:spcAft>
-            </a:pPr>
-            <a:r>
-              <a:rPr sz="2000" b="0" i="0">
-                <a:solidFill>
-                  <a:srgbClr val="242A33"/>
-                </a:solidFill>
-                <a:latin typeface="Segoe UI"/>
-                <a:ea typeface="微软雅黑"/>
-              </a:rPr>
-              <a:t>•  ☐ </a:t>
-            </a:r>
-            <a:r>
-              <a:rPr sz="1879" b="0" i="0">
-                <a:solidFill>
-                  <a:srgbClr val="242A33"/>
-                </a:solidFill>
-                <a:latin typeface="Consolas"/>
-                <a:ea typeface="Consolas"/>
-              </a:rPr>
-              <a:t>x in list</a:t>
-            </a:r>
-            <a:r>
-              <a:rPr sz="2000" b="0" i="0">
-                <a:solidFill>
-                  <a:srgbClr val="242A33"/>
-                </a:solidFill>
-                <a:latin typeface="Segoe UI"/>
-                <a:ea typeface="微软雅黑"/>
-              </a:rPr>
-              <a:t> 是 O(n)；</a:t>
-            </a:r>
-            <a:r>
-              <a:rPr sz="1879" b="0" i="0">
-                <a:solidFill>
-                  <a:srgbClr val="242A33"/>
-                </a:solidFill>
-                <a:latin typeface="Consolas"/>
-                <a:ea typeface="Consolas"/>
-              </a:rPr>
-              <a:t>list.pop(0)</a:t>
-            </a:r>
-            <a:r>
-              <a:rPr sz="2000" b="0" i="0">
-                <a:solidFill>
-                  <a:srgbClr val="242A33"/>
-                </a:solidFill>
-                <a:latin typeface="Segoe UI"/>
-                <a:ea typeface="微软雅黑"/>
-              </a:rPr>
-              <a:t> 是 O(n)</a:t>
-            </a:r>
-          </a:p>
-          <a:p>
-            <a:pPr algn="l">
-              <a:lnSpc>
-                <a:spcPct val="132000"/>
-              </a:lnSpc>
-              <a:spcBef>
-                <a:spcPts val="0"/>
-              </a:spcBef>
-              <a:spcAft>
-                <a:spcPts val="1240"/>
-              </a:spcAft>
-            </a:pPr>
-            <a:r>
-              <a:rPr sz="2000" b="0" i="0">
-                <a:solidFill>
-                  <a:srgbClr val="242A33"/>
-                </a:solidFill>
-                <a:latin typeface="Segoe UI"/>
-                <a:ea typeface="微软雅黑"/>
-              </a:rPr>
-              <a:t>•  ☐ 浮点用 </a:t>
-            </a:r>
-            <a:r>
-              <a:rPr sz="1879" b="0" i="0">
-                <a:solidFill>
-                  <a:srgbClr val="242A33"/>
-                </a:solidFill>
-                <a:latin typeface="Consolas"/>
-                <a:ea typeface="Consolas"/>
-              </a:rPr>
-              <a:t>==</a:t>
-            </a:r>
-            <a:r>
-              <a:rPr sz="2000" b="0" i="0">
-                <a:solidFill>
-                  <a:srgbClr val="242A33"/>
-                </a:solidFill>
-                <a:latin typeface="Segoe UI"/>
-                <a:ea typeface="微软雅黑"/>
-              </a:rPr>
-              <a:t> 比较；</a:t>
-            </a:r>
-            <a:r>
-              <a:rPr sz="1879" b="0" i="0">
-                <a:solidFill>
-                  <a:srgbClr val="242A33"/>
-                </a:solidFill>
-                <a:latin typeface="Consolas"/>
-                <a:ea typeface="Consolas"/>
-              </a:rPr>
-              <a:t>int(x**0.5)</a:t>
-            </a:r>
-            <a:r>
-              <a:rPr sz="2000" b="0" i="0">
-                <a:solidFill>
-                  <a:srgbClr val="242A33"/>
-                </a:solidFill>
-                <a:latin typeface="Segoe UI"/>
-                <a:ea typeface="微软雅黑"/>
-              </a:rPr>
-              <a:t> 差 1</a:t>
-            </a:r>
-          </a:p>
-          <a:p>
-            <a:pPr algn="l">
-              <a:lnSpc>
-                <a:spcPct val="132000"/>
-              </a:lnSpc>
-              <a:spcBef>
-                <a:spcPts val="0"/>
-              </a:spcBef>
-              <a:spcAft>
-                <a:spcPts val="1240"/>
-              </a:spcAft>
-            </a:pPr>
-            <a:r>
-              <a:rPr sz="2000" b="0" i="0">
-                <a:solidFill>
-                  <a:srgbClr val="242A33"/>
-                </a:solidFill>
-                <a:latin typeface="Segoe UI"/>
-                <a:ea typeface="微软雅黑"/>
-              </a:rPr>
-              <a:t>•  ☐ 回溯忘 </a:t>
-            </a:r>
-            <a:r>
-              <a:rPr sz="1879" b="0" i="0">
-                <a:solidFill>
-                  <a:srgbClr val="242A33"/>
-                </a:solidFill>
-                <a:latin typeface="Consolas"/>
-                <a:ea typeface="Consolas"/>
-              </a:rPr>
-              <a:t>path[:]</a:t>
-            </a:r>
-            <a:r>
-              <a:rPr sz="2000" b="0" i="0">
-                <a:solidFill>
-                  <a:srgbClr val="242A33"/>
-                </a:solidFill>
-                <a:latin typeface="Segoe UI"/>
-                <a:ea typeface="微软雅黑"/>
-              </a:rPr>
-              <a:t> 拷贝 / 忘还原状态 ｜ ☐ 0-1 背包写成正序</a:t>
-            </a:r>
-          </a:p>
-          <a:p>
-            <a:pPr algn="l">
-              <a:lnSpc>
-                <a:spcPct val="132000"/>
-              </a:lnSpc>
-              <a:spcBef>
-                <a:spcPts val="0"/>
-              </a:spcBef>
-              <a:spcAft>
-                <a:spcPts val="1240"/>
-              </a:spcAft>
-            </a:pPr>
-            <a:r>
-              <a:rPr sz="2000" b="0" i="0">
-                <a:solidFill>
-                  <a:srgbClr val="242A33"/>
-                </a:solidFill>
-                <a:latin typeface="Segoe UI"/>
-                <a:ea typeface="微软雅黑"/>
-              </a:rPr>
-              <a:t>•  ☐ "恰好装满"没用 </a:t>
-            </a:r>
-            <a:r>
-              <a:rPr sz="1879" b="0" i="0">
-                <a:solidFill>
-                  <a:srgbClr val="242A33"/>
-                </a:solidFill>
-                <a:latin typeface="Consolas"/>
-                <a:ea typeface="Consolas"/>
-              </a:rPr>
-              <a:t>±inf</a:t>
-            </a:r>
-            <a:r>
-              <a:rPr sz="2000" b="0" i="0">
-                <a:solidFill>
-                  <a:srgbClr val="242A33"/>
-                </a:solidFill>
-                <a:latin typeface="Segoe UI"/>
-                <a:ea typeface="微软雅黑"/>
-              </a:rPr>
-              <a:t> 初始化 ｜ ☐ BFS 出队时才标记 visited</a:t>
-            </a:r>
-          </a:p>
-          <a:p>
-            <a:pPr algn="l">
-              <a:lnSpc>
-                <a:spcPct val="132000"/>
-              </a:lnSpc>
-              <a:spcBef>
-                <a:spcPts val="0"/>
-              </a:spcBef>
-              <a:spcAft>
-                <a:spcPts val="1240"/>
-              </a:spcAft>
-            </a:pPr>
-            <a:r>
-              <a:rPr sz="2000" b="0" i="0">
-                <a:solidFill>
-                  <a:srgbClr val="242A33"/>
-                </a:solidFill>
-                <a:latin typeface="Segoe UI"/>
-                <a:ea typeface="微软雅黑"/>
-              </a:rPr>
-              <a:t>•  ☐ 带状态的搜索少加了一维 ｜ ☐ 二分答案的取整方向写反</a:t>
-            </a:r>
-          </a:p>
-          <a:p>
-            <a:pPr algn="l">
-              <a:lnSpc>
-                <a:spcPct val="132000"/>
-              </a:lnSpc>
-              <a:spcBef>
-                <a:spcPts val="0"/>
-              </a:spcBef>
-              <a:spcAft>
-                <a:spcPts val="1240"/>
-              </a:spcAft>
-            </a:pPr>
-            <a:r>
-              <a:rPr sz="2000" b="0" i="0">
-                <a:solidFill>
-                  <a:srgbClr val="242A33"/>
-                </a:solidFill>
-                <a:latin typeface="Segoe UI"/>
-                <a:ea typeface="微软雅黑"/>
-              </a:rPr>
-              <a:t>•  ☐ 多关键字排序只写了一个 key ｜ ☐ 输出格式：多余空格 / 换行 / 精度</a:t>
-            </a:r>
-          </a:p>
-        </p:txBody>
-      </p:sp>
-      <p:sp>
-        <p:nvSpPr>
-          <p:cNvPr id="5" name="TextBox 4"/>
+              <a:t>没有"理解"，只有"在海量文本上学到的统计规律"</a:t>
+            </a:r>
+          </a:p>
+        </p:txBody>
+      </p:sp>
+      <p:sp>
+        <p:nvSpPr>
+          <p:cNvPr id="6" name="TextBox 5"/>
           <p:cNvSpPr txBox="1"/>
           <p:nvPr/>
         </p:nvSpPr>
@@ -13032,7 +16123,7 @@
       </p:sp>
       <p:sp>
         <p:nvSpPr>
-          <p:cNvPr id="6" name="TextBox 5"/>
+          <p:cNvPr id="7" name="TextBox 6"/>
           <p:cNvSpPr txBox="1"/>
           <p:nvPr/>
         </p:nvSpPr>
@@ -13068,7 +16159,7 @@
                 <a:latin typeface="Segoe UI"/>
                 <a:ea typeface="微软雅黑"/>
               </a:rPr>
-              <a:t>26</a:t>
+              <a:t>3</a:t>
             </a:r>
           </a:p>
         </p:txBody>
@@ -13081,7 +16172,562 @@
 </p:sld>
 </file>
 
-<file path=ppt/slides/slide27.xml><?xml version="1.0" encoding="utf-8"?>
+<file path=ppt/slides/slide30.xml><?xml version="1.0" encoding="utf-8"?>
+<p:sld xmlns:a="http://schemas.openxmlformats.org/drawingml/2006/main" xmlns:p="http://schemas.openxmlformats.org/presentationml/2006/main" xmlns:r="http://schemas.openxmlformats.org/officeDocument/2006/relationships">
+  <p:cSld>
+    <p:spTree>
+      <p:nvGrpSpPr>
+        <p:cNvPr id="1" name=""/>
+        <p:cNvGrpSpPr/>
+        <p:nvPr/>
+      </p:nvGrpSpPr>
+      <p:grpSpPr/>
+      <p:sp>
+        <p:nvSpPr>
+          <p:cNvPr id="2" name="TextBox 1"/>
+          <p:cNvSpPr txBox="1"/>
+          <p:nvPr/>
+        </p:nvSpPr>
+        <p:spPr>
+          <a:xfrm>
+            <a:off x="566928" y="420624"/>
+            <a:ext cx="11057839" cy="548640"/>
+          </a:xfrm>
+          <a:prstGeom prst="rect">
+            <a:avLst/>
+          </a:prstGeom>
+          <a:noFill/>
+        </p:spPr>
+        <p:txBody>
+          <a:bodyPr wrap="square" lIns="0" rIns="0" tIns="0" bIns="0">
+            <a:noAutofit/>
+          </a:bodyPr>
+          <a:lstStyle/>
+          <a:p>
+            <a:pPr algn="l">
+              <a:spcBef>
+                <a:spcPts val="0"/>
+              </a:spcBef>
+              <a:spcAft>
+                <a:spcPts val="0"/>
+              </a:spcAft>
+            </a:pPr>
+            <a:r>
+              <a:rPr sz="2600" b="1" i="0">
+                <a:solidFill>
+                  <a:srgbClr val="12395B"/>
+                </a:solidFill>
+                <a:latin typeface="Segoe UI"/>
+                <a:ea typeface="微软雅黑"/>
+              </a:rPr>
+              <a:t>高频陷阱清单</a:t>
+            </a:r>
+          </a:p>
+        </p:txBody>
+      </p:sp>
+      <p:sp>
+        <p:nvSpPr>
+          <p:cNvPr id="3" name="Rectangle 2"/>
+          <p:cNvSpPr/>
+          <p:nvPr/>
+        </p:nvSpPr>
+        <p:spPr>
+          <a:xfrm>
+            <a:off x="566928" y="1060704"/>
+            <a:ext cx="960120" cy="40640"/>
+          </a:xfrm>
+          <a:prstGeom prst="rect">
+            <a:avLst/>
+          </a:prstGeom>
+          <a:solidFill>
+            <a:srgbClr val="E07B39"/>
+          </a:solidFill>
+          <a:ln>
+            <a:noFill/>
+          </a:ln>
+          <a:effectLst/>
+        </p:spPr>
+        <p:style>
+          <a:lnRef idx="1">
+            <a:schemeClr val="accent1"/>
+          </a:lnRef>
+          <a:fillRef idx="3">
+            <a:schemeClr val="accent1"/>
+          </a:fillRef>
+          <a:effectRef idx="2">
+            <a:schemeClr val="accent1"/>
+          </a:effectRef>
+          <a:fontRef idx="minor">
+            <a:schemeClr val="lt1"/>
+          </a:fontRef>
+        </p:style>
+        <p:txBody>
+          <a:bodyPr rtlCol="0" anchor="ctr"/>
+          <a:lstStyle/>
+          <a:p>
+            <a:pPr algn="ctr"/>
+          </a:p>
+        </p:txBody>
+      </p:sp>
+      <p:sp>
+        <p:nvSpPr>
+          <p:cNvPr id="4" name="TextBox 3"/>
+          <p:cNvSpPr txBox="1"/>
+          <p:nvPr/>
+        </p:nvSpPr>
+        <p:spPr>
+          <a:xfrm>
+            <a:off x="566928" y="1298448"/>
+            <a:ext cx="11057839" cy="4864608"/>
+          </a:xfrm>
+          <a:prstGeom prst="rect">
+            <a:avLst/>
+          </a:prstGeom>
+          <a:noFill/>
+        </p:spPr>
+        <p:txBody>
+          <a:bodyPr wrap="square" lIns="0" rIns="0" tIns="0" bIns="0">
+            <a:noAutofit/>
+          </a:bodyPr>
+          <a:lstStyle/>
+          <a:p>
+            <a:pPr algn="l">
+              <a:lnSpc>
+                <a:spcPct val="132000"/>
+              </a:lnSpc>
+              <a:spcBef>
+                <a:spcPts val="0"/>
+              </a:spcBef>
+              <a:spcAft>
+                <a:spcPts val="1240"/>
+              </a:spcAft>
+            </a:pPr>
+            <a:r>
+              <a:rPr sz="2000" b="0" i="0">
+                <a:solidFill>
+                  <a:srgbClr val="242A33"/>
+                </a:solidFill>
+                <a:latin typeface="Segoe UI"/>
+                <a:ea typeface="微软雅黑"/>
+              </a:rPr>
+              <a:t>•  ☐ 忘 </a:t>
+            </a:r>
+            <a:r>
+              <a:rPr sz="1879" b="0" i="0">
+                <a:solidFill>
+                  <a:srgbClr val="242A33"/>
+                </a:solidFill>
+                <a:latin typeface="Consolas"/>
+                <a:ea typeface="Consolas"/>
+              </a:rPr>
+              <a:t>int()</a:t>
+            </a:r>
+            <a:r>
+              <a:rPr sz="2000" b="0" i="0">
+                <a:solidFill>
+                  <a:srgbClr val="242A33"/>
+                </a:solidFill>
+                <a:latin typeface="Segoe UI"/>
+                <a:ea typeface="微软雅黑"/>
+              </a:rPr>
+              <a:t> / 忘 </a:t>
+            </a:r>
+            <a:r>
+              <a:rPr sz="1879" b="0" i="0">
+                <a:solidFill>
+                  <a:srgbClr val="242A33"/>
+                </a:solidFill>
+                <a:latin typeface="Consolas"/>
+                <a:ea typeface="Consolas"/>
+              </a:rPr>
+              <a:t>strip()</a:t>
+            </a:r>
+            <a:r>
+              <a:rPr sz="2000" b="0" i="0">
+                <a:solidFill>
+                  <a:srgbClr val="242A33"/>
+                </a:solidFill>
+                <a:latin typeface="Segoe UI"/>
+                <a:ea typeface="微软雅黑"/>
+              </a:rPr>
+              <a:t> ｜ ☐ </a:t>
+            </a:r>
+            <a:r>
+              <a:rPr sz="1879" b="0" i="0">
+                <a:solidFill>
+                  <a:srgbClr val="242A33"/>
+                </a:solidFill>
+                <a:latin typeface="Consolas"/>
+                <a:ea typeface="Consolas"/>
+              </a:rPr>
+              <a:t>[[0]*n]*m</a:t>
+            </a:r>
+            <a:r>
+              <a:rPr sz="2000" b="0" i="0">
+                <a:solidFill>
+                  <a:srgbClr val="242A33"/>
+                </a:solidFill>
+                <a:latin typeface="Segoe UI"/>
+                <a:ea typeface="微软雅黑"/>
+              </a:rPr>
+              <a:t> 别名陷阱</a:t>
+            </a:r>
+          </a:p>
+          <a:p>
+            <a:pPr algn="l">
+              <a:lnSpc>
+                <a:spcPct val="132000"/>
+              </a:lnSpc>
+              <a:spcBef>
+                <a:spcPts val="0"/>
+              </a:spcBef>
+              <a:spcAft>
+                <a:spcPts val="1240"/>
+              </a:spcAft>
+            </a:pPr>
+            <a:r>
+              <a:rPr sz="2000" b="0" i="0">
+                <a:solidFill>
+                  <a:srgbClr val="242A33"/>
+                </a:solidFill>
+                <a:latin typeface="Segoe UI"/>
+                <a:ea typeface="微软雅黑"/>
+              </a:rPr>
+              <a:t>•  ☐ </a:t>
+            </a:r>
+            <a:r>
+              <a:rPr sz="1879" b="0" i="0">
+                <a:solidFill>
+                  <a:srgbClr val="242A33"/>
+                </a:solidFill>
+                <a:latin typeface="Consolas"/>
+                <a:ea typeface="Consolas"/>
+              </a:rPr>
+              <a:t>x in list</a:t>
+            </a:r>
+            <a:r>
+              <a:rPr sz="2000" b="0" i="0">
+                <a:solidFill>
+                  <a:srgbClr val="242A33"/>
+                </a:solidFill>
+                <a:latin typeface="Segoe UI"/>
+                <a:ea typeface="微软雅黑"/>
+              </a:rPr>
+              <a:t> 是 O(n)；</a:t>
+            </a:r>
+            <a:r>
+              <a:rPr sz="1879" b="0" i="0">
+                <a:solidFill>
+                  <a:srgbClr val="242A33"/>
+                </a:solidFill>
+                <a:latin typeface="Consolas"/>
+                <a:ea typeface="Consolas"/>
+              </a:rPr>
+              <a:t>list.pop(0)</a:t>
+            </a:r>
+            <a:r>
+              <a:rPr sz="2000" b="0" i="0">
+                <a:solidFill>
+                  <a:srgbClr val="242A33"/>
+                </a:solidFill>
+                <a:latin typeface="Segoe UI"/>
+                <a:ea typeface="微软雅黑"/>
+              </a:rPr>
+              <a:t> 是 O(n)</a:t>
+            </a:r>
+          </a:p>
+          <a:p>
+            <a:pPr algn="l">
+              <a:lnSpc>
+                <a:spcPct val="132000"/>
+              </a:lnSpc>
+              <a:spcBef>
+                <a:spcPts val="0"/>
+              </a:spcBef>
+              <a:spcAft>
+                <a:spcPts val="1240"/>
+              </a:spcAft>
+            </a:pPr>
+            <a:r>
+              <a:rPr sz="2000" b="0" i="0">
+                <a:solidFill>
+                  <a:srgbClr val="242A33"/>
+                </a:solidFill>
+                <a:latin typeface="Segoe UI"/>
+                <a:ea typeface="微软雅黑"/>
+              </a:rPr>
+              <a:t>•  ☐ 浮点用 </a:t>
+            </a:r>
+            <a:r>
+              <a:rPr sz="1879" b="0" i="0">
+                <a:solidFill>
+                  <a:srgbClr val="242A33"/>
+                </a:solidFill>
+                <a:latin typeface="Consolas"/>
+                <a:ea typeface="Consolas"/>
+              </a:rPr>
+              <a:t>==</a:t>
+            </a:r>
+            <a:r>
+              <a:rPr sz="2000" b="0" i="0">
+                <a:solidFill>
+                  <a:srgbClr val="242A33"/>
+                </a:solidFill>
+                <a:latin typeface="Segoe UI"/>
+                <a:ea typeface="微软雅黑"/>
+              </a:rPr>
+              <a:t> 比较；</a:t>
+            </a:r>
+            <a:r>
+              <a:rPr sz="1879" b="0" i="0">
+                <a:solidFill>
+                  <a:srgbClr val="242A33"/>
+                </a:solidFill>
+                <a:latin typeface="Consolas"/>
+                <a:ea typeface="Consolas"/>
+              </a:rPr>
+              <a:t>int(x**0.5)</a:t>
+            </a:r>
+            <a:r>
+              <a:rPr sz="2000" b="0" i="0">
+                <a:solidFill>
+                  <a:srgbClr val="242A33"/>
+                </a:solidFill>
+                <a:latin typeface="Segoe UI"/>
+                <a:ea typeface="微软雅黑"/>
+              </a:rPr>
+              <a:t> 差 1</a:t>
+            </a:r>
+          </a:p>
+          <a:p>
+            <a:pPr algn="l">
+              <a:lnSpc>
+                <a:spcPct val="132000"/>
+              </a:lnSpc>
+              <a:spcBef>
+                <a:spcPts val="0"/>
+              </a:spcBef>
+              <a:spcAft>
+                <a:spcPts val="1240"/>
+              </a:spcAft>
+            </a:pPr>
+            <a:r>
+              <a:rPr sz="2000" b="0" i="0">
+                <a:solidFill>
+                  <a:srgbClr val="242A33"/>
+                </a:solidFill>
+                <a:latin typeface="Segoe UI"/>
+                <a:ea typeface="微软雅黑"/>
+              </a:rPr>
+              <a:t>•  ☐ 回溯忘 </a:t>
+            </a:r>
+            <a:r>
+              <a:rPr sz="1879" b="0" i="0">
+                <a:solidFill>
+                  <a:srgbClr val="242A33"/>
+                </a:solidFill>
+                <a:latin typeface="Consolas"/>
+                <a:ea typeface="Consolas"/>
+              </a:rPr>
+              <a:t>path[:]</a:t>
+            </a:r>
+            <a:r>
+              <a:rPr sz="2000" b="0" i="0">
+                <a:solidFill>
+                  <a:srgbClr val="242A33"/>
+                </a:solidFill>
+                <a:latin typeface="Segoe UI"/>
+                <a:ea typeface="微软雅黑"/>
+              </a:rPr>
+              <a:t> 拷贝 / 忘还原状态 ｜ ☐ 0-1 背包写成正序</a:t>
+            </a:r>
+          </a:p>
+          <a:p>
+            <a:pPr algn="l">
+              <a:lnSpc>
+                <a:spcPct val="132000"/>
+              </a:lnSpc>
+              <a:spcBef>
+                <a:spcPts val="0"/>
+              </a:spcBef>
+              <a:spcAft>
+                <a:spcPts val="1240"/>
+              </a:spcAft>
+            </a:pPr>
+            <a:r>
+              <a:rPr sz="2000" b="0" i="0">
+                <a:solidFill>
+                  <a:srgbClr val="242A33"/>
+                </a:solidFill>
+                <a:latin typeface="Segoe UI"/>
+                <a:ea typeface="微软雅黑"/>
+              </a:rPr>
+              <a:t>•  ☐ "恰好装满"没用 </a:t>
+            </a:r>
+            <a:r>
+              <a:rPr sz="1879" b="0" i="0">
+                <a:solidFill>
+                  <a:srgbClr val="242A33"/>
+                </a:solidFill>
+                <a:latin typeface="Consolas"/>
+                <a:ea typeface="Consolas"/>
+              </a:rPr>
+              <a:t>±inf</a:t>
+            </a:r>
+            <a:r>
+              <a:rPr sz="2000" b="0" i="0">
+                <a:solidFill>
+                  <a:srgbClr val="242A33"/>
+                </a:solidFill>
+                <a:latin typeface="Segoe UI"/>
+                <a:ea typeface="微软雅黑"/>
+              </a:rPr>
+              <a:t> 初始化 ｜ ☐ BFS 出队时才标记 visited</a:t>
+            </a:r>
+          </a:p>
+          <a:p>
+            <a:pPr algn="l">
+              <a:lnSpc>
+                <a:spcPct val="132000"/>
+              </a:lnSpc>
+              <a:spcBef>
+                <a:spcPts val="0"/>
+              </a:spcBef>
+              <a:spcAft>
+                <a:spcPts val="1240"/>
+              </a:spcAft>
+            </a:pPr>
+            <a:r>
+              <a:rPr sz="2000" b="0" i="0">
+                <a:solidFill>
+                  <a:srgbClr val="242A33"/>
+                </a:solidFill>
+                <a:latin typeface="Segoe UI"/>
+                <a:ea typeface="微软雅黑"/>
+              </a:rPr>
+              <a:t>•  ☐ 带状态的搜索少加了一维 ｜ ☐ 二分答案的取整方向写反</a:t>
+            </a:r>
+          </a:p>
+          <a:p>
+            <a:pPr algn="l">
+              <a:lnSpc>
+                <a:spcPct val="132000"/>
+              </a:lnSpc>
+              <a:spcBef>
+                <a:spcPts val="0"/>
+              </a:spcBef>
+              <a:spcAft>
+                <a:spcPts val="1240"/>
+              </a:spcAft>
+            </a:pPr>
+            <a:r>
+              <a:rPr sz="2000" b="0" i="0">
+                <a:solidFill>
+                  <a:srgbClr val="242A33"/>
+                </a:solidFill>
+                <a:latin typeface="Segoe UI"/>
+                <a:ea typeface="微软雅黑"/>
+              </a:rPr>
+              <a:t>•  ☐ 多关键字排序只写了一个 key ｜ ☐ 输出格式：多余空格 / 换行 / 精度</a:t>
+            </a:r>
+          </a:p>
+        </p:txBody>
+      </p:sp>
+      <p:sp>
+        <p:nvSpPr>
+          <p:cNvPr id="5" name="TextBox 4"/>
+          <p:cNvSpPr txBox="1"/>
+          <p:nvPr/>
+        </p:nvSpPr>
+        <p:spPr>
+          <a:xfrm>
+            <a:off x="566928" y="6327648"/>
+            <a:ext cx="8229600" cy="310896"/>
+          </a:xfrm>
+          <a:prstGeom prst="rect">
+            <a:avLst/>
+          </a:prstGeom>
+          <a:noFill/>
+        </p:spPr>
+        <p:txBody>
+          <a:bodyPr wrap="square" lIns="0" rIns="0" tIns="0" bIns="0">
+            <a:noAutofit/>
+          </a:bodyPr>
+          <a:lstStyle/>
+          <a:p>
+            <a:pPr algn="l">
+              <a:spcBef>
+                <a:spcPts val="0"/>
+              </a:spcBef>
+              <a:spcAft>
+                <a:spcPts val="0"/>
+              </a:spcAft>
+            </a:pPr>
+            <a:r>
+              <a:rPr sz="1000" b="0" i="0">
+                <a:solidFill>
+                  <a:srgbClr val="6B7582"/>
+                </a:solidFill>
+                <a:latin typeface="Segoe UI"/>
+                <a:ea typeface="微软雅黑"/>
+              </a:rPr>
+              <a:t>计算概论（B） · 第14周 · 闫宏飞 · 2026 Fall</a:t>
+            </a:r>
+          </a:p>
+        </p:txBody>
+      </p:sp>
+      <p:sp>
+        <p:nvSpPr>
+          <p:cNvPr id="6" name="TextBox 5"/>
+          <p:cNvSpPr txBox="1"/>
+          <p:nvPr/>
+        </p:nvSpPr>
+        <p:spPr>
+          <a:xfrm>
+            <a:off x="10710367" y="6327648"/>
+            <a:ext cx="914400" cy="310896"/>
+          </a:xfrm>
+          <a:prstGeom prst="rect">
+            <a:avLst/>
+          </a:prstGeom>
+          <a:noFill/>
+        </p:spPr>
+        <p:txBody>
+          <a:bodyPr wrap="square" lIns="0" rIns="0" tIns="0" bIns="0">
+            <a:noAutofit/>
+          </a:bodyPr>
+          <a:lstStyle/>
+          <a:p>
+            <a:pPr algn="r">
+              <a:spcBef>
+                <a:spcPts val="0"/>
+              </a:spcBef>
+              <a:spcAft>
+                <a:spcPts val="0"/>
+              </a:spcAft>
+            </a:pPr>
+            <a:r>
+              <a:rPr sz="1000" b="0" i="0">
+                <a:solidFill>
+                  <a:srgbClr val="6B7582"/>
+                </a:solidFill>
+                <a:latin typeface="Segoe UI"/>
+                <a:ea typeface="微软雅黑"/>
+              </a:rPr>
+              <a:t>30</a:t>
+            </a:r>
+          </a:p>
+        </p:txBody>
+      </p:sp>
+    </p:spTree>
+  </p:cSld>
+  <p:clrMapOvr>
+    <a:masterClrMapping/>
+  </p:clrMapOvr>
+</p:sld>
+</file>
+
+<file path=ppt/slides/slide31.xml><?xml version="1.0" encoding="utf-8"?>
 <p:sld xmlns:a="http://schemas.openxmlformats.org/drawingml/2006/main" xmlns:p="http://schemas.openxmlformats.org/presentationml/2006/main" xmlns:r="http://schemas.openxmlformats.org/officeDocument/2006/relationships">
   <p:cSld>
     <p:spTree>
@@ -13539,7 +17185,7 @@
                           <a:latin typeface="Segoe UI"/>
                           <a:ea typeface="微软雅黑"/>
                         </a:rPr>
-                        <a:t>限时模拟一整套（2 小时 6 题），只看时间不看对错</a:t>
+                        <a:t>限时模拟一整套（112 分钟 6 题），只看时间不看对错</a:t>
                       </a:r>
                     </a:p>
                   </a:txBody>
@@ -13705,7 +17351,7 @@
                 <a:latin typeface="Segoe UI"/>
                 <a:ea typeface="微软雅黑"/>
               </a:rPr>
-              <a:t>27</a:t>
+              <a:t>31</a:t>
             </a:r>
           </a:p>
         </p:txBody>
@@ -13718,7 +17364,7 @@
 </p:sld>
 </file>
 
-<file path=ppt/slides/slide28.xml><?xml version="1.0" encoding="utf-8"?>
+<file path=ppt/slides/slide32.xml><?xml version="1.0" encoding="utf-8"?>
 <p:sld xmlns:a="http://schemas.openxmlformats.org/drawingml/2006/main" xmlns:p="http://schemas.openxmlformats.org/presentationml/2006/main" xmlns:r="http://schemas.openxmlformats.org/officeDocument/2006/relationships">
   <p:cSld>
     <p:spTree>
@@ -14008,7 +17654,7 @@
                 <a:latin typeface="Segoe UI"/>
                 <a:ea typeface="微软雅黑"/>
               </a:rPr>
-              <a:t>•  月考四题对应四个高频坑：</a:t>
+              <a:t>•  月考六题对应六个高频坑：</a:t>
             </a:r>
             <a:r>
               <a:rPr sz="2000" b="1" i="0">
@@ -14018,7 +17664,40 @@
                 <a:latin typeface="Segoe UI"/>
                 <a:ea typeface="微软雅黑"/>
               </a:rPr>
-              <a:t>并列不处理、排序键靠猜、状态少一维、"恰好"没用 inf</a:t>
+              <a:t>并列不处理、排序键靠猜、状态少一维</a:t>
+            </a:r>
+          </a:p>
+          <a:p>
+            <a:pPr algn="l">
+              <a:lnSpc>
+                <a:spcPct val="132000"/>
+              </a:lnSpc>
+              <a:spcBef>
+                <a:spcPts val="0"/>
+              </a:spcBef>
+              <a:spcAft>
+                <a:spcPts val="1240"/>
+              </a:spcAft>
+            </a:pPr>
+            <a:r>
+              <a:rPr sz="2000" b="0" i="0">
+                <a:solidFill>
+                  <a:srgbClr val="242A33"/>
+                </a:solidFill>
+                <a:latin typeface="Segoe UI"/>
+                <a:ea typeface="微软雅黑"/>
+              </a:rPr>
+              <a:t>•  　　　　　　　　　　　　</a:t>
+            </a:r>
+            <a:r>
+              <a:rPr sz="2000" b="1" i="0">
+                <a:solidFill>
+                  <a:srgbClr val="12395B"/>
+                </a:solidFill>
+                <a:latin typeface="Segoe UI"/>
+                <a:ea typeface="微软雅黑"/>
+              </a:rPr>
+              <a:t>"恰好"没用 inf、二分下界写错、并查集不写路径压缩</a:t>
             </a:r>
           </a:p>
           <a:p>
@@ -14157,7 +17836,7 @@
                 <a:latin typeface="Segoe UI"/>
                 <a:ea typeface="微软雅黑"/>
               </a:rPr>
-              <a:t>28</a:t>
+              <a:t>32</a:t>
             </a:r>
           </a:p>
         </p:txBody>
@@ -14170,7 +17849,7 @@
 </p:sld>
 </file>
 
-<file path=ppt/slides/slide29.xml><?xml version="1.0" encoding="utf-8"?>
+<file path=ppt/slides/slide33.xml><?xml version="1.0" encoding="utf-8"?>
 <p:sld xmlns:a="http://schemas.openxmlformats.org/drawingml/2006/main" xmlns:p="http://schemas.openxmlformats.org/presentationml/2006/main" xmlns:r="http://schemas.openxmlformats.org/officeDocument/2006/relationships">
   <p:cSld>
     <p:spTree>
@@ -14482,494 +18161,7 @@
                 <a:latin typeface="Segoe UI"/>
                 <a:ea typeface="微软雅黑"/>
               </a:rPr>
-              <a:t>29</a:t>
-            </a:r>
-          </a:p>
-        </p:txBody>
-      </p:sp>
-    </p:spTree>
-  </p:cSld>
-  <p:clrMapOvr>
-    <a:masterClrMapping/>
-  </p:clrMapOvr>
-</p:sld>
-</file>
-
-<file path=ppt/slides/slide3.xml><?xml version="1.0" encoding="utf-8"?>
-<p:sld xmlns:a="http://schemas.openxmlformats.org/drawingml/2006/main" xmlns:p="http://schemas.openxmlformats.org/presentationml/2006/main" xmlns:r="http://schemas.openxmlformats.org/officeDocument/2006/relationships">
-  <p:cSld>
-    <p:spTree>
-      <p:nvGrpSpPr>
-        <p:cNvPr id="1" name=""/>
-        <p:cNvGrpSpPr/>
-        <p:nvPr/>
-      </p:nvGrpSpPr>
-      <p:grpSpPr/>
-      <p:sp>
-        <p:nvSpPr>
-          <p:cNvPr id="2" name="TextBox 1"/>
-          <p:cNvSpPr txBox="1"/>
-          <p:nvPr/>
-        </p:nvSpPr>
-        <p:spPr>
-          <a:xfrm>
-            <a:off x="566928" y="420624"/>
-            <a:ext cx="11057839" cy="548640"/>
-          </a:xfrm>
-          <a:prstGeom prst="rect">
-            <a:avLst/>
-          </a:prstGeom>
-          <a:noFill/>
-        </p:spPr>
-        <p:txBody>
-          <a:bodyPr wrap="square" lIns="0" rIns="0" tIns="0" bIns="0">
-            <a:noAutofit/>
-          </a:bodyPr>
-          <a:lstStyle/>
-          <a:p>
-            <a:pPr algn="l">
-              <a:spcBef>
-                <a:spcPts val="0"/>
-              </a:spcBef>
-              <a:spcAft>
-                <a:spcPts val="0"/>
-              </a:spcAft>
-            </a:pPr>
-            <a:r>
-              <a:rPr sz="2600" b="1" i="0">
-                <a:solidFill>
-                  <a:srgbClr val="12395B"/>
-                </a:solidFill>
-                <a:latin typeface="Segoe UI"/>
-                <a:ea typeface="微软雅黑"/>
-              </a:rPr>
-              <a:t>大语言模型在做什么</a:t>
-            </a:r>
-          </a:p>
-        </p:txBody>
-      </p:sp>
-      <p:sp>
-        <p:nvSpPr>
-          <p:cNvPr id="3" name="Rectangle 2"/>
-          <p:cNvSpPr/>
-          <p:nvPr/>
-        </p:nvSpPr>
-        <p:spPr>
-          <a:xfrm>
-            <a:off x="566928" y="1060704"/>
-            <a:ext cx="960120" cy="40640"/>
-          </a:xfrm>
-          <a:prstGeom prst="rect">
-            <a:avLst/>
-          </a:prstGeom>
-          <a:solidFill>
-            <a:srgbClr val="E07B39"/>
-          </a:solidFill>
-          <a:ln>
-            <a:noFill/>
-          </a:ln>
-          <a:effectLst/>
-        </p:spPr>
-        <p:style>
-          <a:lnRef idx="1">
-            <a:schemeClr val="accent1"/>
-          </a:lnRef>
-          <a:fillRef idx="3">
-            <a:schemeClr val="accent1"/>
-          </a:fillRef>
-          <a:effectRef idx="2">
-            <a:schemeClr val="accent1"/>
-          </a:effectRef>
-          <a:fontRef idx="minor">
-            <a:schemeClr val="lt1"/>
-          </a:fontRef>
-        </p:style>
-        <p:txBody>
-          <a:bodyPr rtlCol="0" anchor="ctr"/>
-          <a:lstStyle/>
-          <a:p>
-            <a:pPr algn="ctr"/>
-          </a:p>
-        </p:txBody>
-      </p:sp>
-      <p:sp>
-        <p:nvSpPr>
-          <p:cNvPr id="4" name="TextBox 3"/>
-          <p:cNvSpPr txBox="1"/>
-          <p:nvPr/>
-        </p:nvSpPr>
-        <p:spPr>
-          <a:xfrm>
-            <a:off x="566928" y="2117090"/>
-            <a:ext cx="11057839" cy="2806700"/>
-          </a:xfrm>
-          <a:prstGeom prst="rect">
-            <a:avLst/>
-          </a:prstGeom>
-          <a:noFill/>
-        </p:spPr>
-        <p:txBody>
-          <a:bodyPr wrap="square" lIns="0" rIns="0" tIns="0" bIns="0">
-            <a:noAutofit/>
-          </a:bodyPr>
-          <a:lstStyle/>
-          <a:p>
-            <a:pPr algn="l">
-              <a:lnSpc>
-                <a:spcPts val="2210"/>
-              </a:lnSpc>
-              <a:spcBef>
-                <a:spcPts val="0"/>
-              </a:spcBef>
-              <a:spcAft>
-                <a:spcPts val="0"/>
-              </a:spcAft>
-            </a:pPr>
-            <a:r>
-              <a:rPr sz="1700" b="0" i="0">
-                <a:solidFill>
-                  <a:srgbClr val="12395B"/>
-                </a:solidFill>
-                <a:latin typeface="Consolas"/>
-                <a:ea typeface="Consolas"/>
-              </a:rPr>
-              <a:t> </a:t>
-            </a:r>
-          </a:p>
-          <a:p>
-            <a:pPr algn="l">
-              <a:lnSpc>
-                <a:spcPts val="2210"/>
-              </a:lnSpc>
-              <a:spcBef>
-                <a:spcPts val="0"/>
-              </a:spcBef>
-              <a:spcAft>
-                <a:spcPts val="0"/>
-              </a:spcAft>
-            </a:pPr>
-            <a:r>
-              <a:rPr sz="1700" b="0" i="0">
-                <a:solidFill>
-                  <a:srgbClr val="12395B"/>
-                </a:solidFill>
-                <a:latin typeface="Consolas"/>
-                <a:ea typeface="Consolas"/>
-              </a:rPr>
-              <a:t>   输入: "计算概论这门课主要用"</a:t>
-            </a:r>
-          </a:p>
-          <a:p>
-            <a:pPr algn="l">
-              <a:lnSpc>
-                <a:spcPts val="2210"/>
-              </a:lnSpc>
-              <a:spcBef>
-                <a:spcPts val="0"/>
-              </a:spcBef>
-              <a:spcAft>
-                <a:spcPts val="0"/>
-              </a:spcAft>
-            </a:pPr>
-            <a:r>
-              <a:rPr sz="1700" b="0" i="0">
-                <a:solidFill>
-                  <a:srgbClr val="12395B"/>
-                </a:solidFill>
-                <a:latin typeface="Consolas"/>
-                <a:ea typeface="Consolas"/>
-              </a:rPr>
-              <a:t>                |</a:t>
-            </a:r>
-          </a:p>
-          <a:p>
-            <a:pPr algn="l">
-              <a:lnSpc>
-                <a:spcPts val="2210"/>
-              </a:lnSpc>
-              <a:spcBef>
-                <a:spcPts val="0"/>
-              </a:spcBef>
-              <a:spcAft>
-                <a:spcPts val="0"/>
-              </a:spcAft>
-            </a:pPr>
-            <a:r>
-              <a:rPr sz="1700" b="0" i="0">
-                <a:solidFill>
-                  <a:srgbClr val="12395B"/>
-                </a:solidFill>
-                <a:latin typeface="Consolas"/>
-                <a:ea typeface="Consolas"/>
-              </a:rPr>
-              <a:t>   模型给出下一个 token 的概率分布:</a:t>
-            </a:r>
-          </a:p>
-          <a:p>
-            <a:pPr algn="l">
-              <a:lnSpc>
-                <a:spcPts val="2210"/>
-              </a:lnSpc>
-              <a:spcBef>
-                <a:spcPts val="0"/>
-              </a:spcBef>
-              <a:spcAft>
-                <a:spcPts val="0"/>
-              </a:spcAft>
-            </a:pPr>
-            <a:r>
-              <a:rPr sz="1700" b="0" i="0">
-                <a:solidFill>
-                  <a:srgbClr val="12395B"/>
-                </a:solidFill>
-                <a:latin typeface="Consolas"/>
-                <a:ea typeface="Consolas"/>
-              </a:rPr>
-              <a:t>       "Python"  0.62</a:t>
-            </a:r>
-          </a:p>
-          <a:p>
-            <a:pPr algn="l">
-              <a:lnSpc>
-                <a:spcPts val="2210"/>
-              </a:lnSpc>
-              <a:spcBef>
-                <a:spcPts val="0"/>
-              </a:spcBef>
-              <a:spcAft>
-                <a:spcPts val="0"/>
-              </a:spcAft>
-            </a:pPr>
-            <a:r>
-              <a:rPr sz="1700" b="0" i="0">
-                <a:solidFill>
-                  <a:srgbClr val="12395B"/>
-                </a:solidFill>
-                <a:latin typeface="Consolas"/>
-                <a:ea typeface="Consolas"/>
-              </a:rPr>
-              <a:t>       "C++"     0.18</a:t>
-            </a:r>
-          </a:p>
-          <a:p>
-            <a:pPr algn="l">
-              <a:lnSpc>
-                <a:spcPts val="2210"/>
-              </a:lnSpc>
-              <a:spcBef>
-                <a:spcPts val="0"/>
-              </a:spcBef>
-              <a:spcAft>
-                <a:spcPts val="0"/>
-              </a:spcAft>
-            </a:pPr>
-            <a:r>
-              <a:rPr sz="1700" b="0" i="0">
-                <a:solidFill>
-                  <a:srgbClr val="12395B"/>
-                </a:solidFill>
-                <a:latin typeface="Consolas"/>
-                <a:ea typeface="Consolas"/>
-              </a:rPr>
-              <a:t>       "Java"    0.05</a:t>
-            </a:r>
-          </a:p>
-          <a:p>
-            <a:pPr algn="l">
-              <a:lnSpc>
-                <a:spcPts val="2210"/>
-              </a:lnSpc>
-              <a:spcBef>
-                <a:spcPts val="0"/>
-              </a:spcBef>
-              <a:spcAft>
-                <a:spcPts val="0"/>
-              </a:spcAft>
-            </a:pPr>
-            <a:r>
-              <a:rPr sz="1700" b="0" i="0">
-                <a:solidFill>
-                  <a:srgbClr val="12395B"/>
-                </a:solidFill>
-                <a:latin typeface="Consolas"/>
-                <a:ea typeface="Consolas"/>
-              </a:rPr>
-              <a:t>        ...</a:t>
-            </a:r>
-          </a:p>
-          <a:p>
-            <a:pPr algn="l">
-              <a:lnSpc>
-                <a:spcPts val="2210"/>
-              </a:lnSpc>
-              <a:spcBef>
-                <a:spcPts val="0"/>
-              </a:spcBef>
-              <a:spcAft>
-                <a:spcPts val="0"/>
-              </a:spcAft>
-            </a:pPr>
-            <a:r>
-              <a:rPr sz="1700" b="0" i="0">
-                <a:solidFill>
-                  <a:srgbClr val="12395B"/>
-                </a:solidFill>
-                <a:latin typeface="Consolas"/>
-                <a:ea typeface="Consolas"/>
-              </a:rPr>
-              <a:t>                |</a:t>
-            </a:r>
-          </a:p>
-          <a:p>
-            <a:pPr algn="l">
-              <a:lnSpc>
-                <a:spcPts val="2210"/>
-              </a:lnSpc>
-              <a:spcBef>
-                <a:spcPts val="0"/>
-              </a:spcBef>
-              <a:spcAft>
-                <a:spcPts val="0"/>
-              </a:spcAft>
-            </a:pPr>
-            <a:r>
-              <a:rPr sz="1700" b="0" i="0">
-                <a:solidFill>
-                  <a:srgbClr val="12395B"/>
-                </a:solidFill>
-                <a:latin typeface="Consolas"/>
-                <a:ea typeface="Consolas"/>
-              </a:rPr>
-              <a:t>   采样一个 -&gt; "Python" -&gt; 拼回输入 -&gt; 再预测下一个</a:t>
-            </a:r>
-          </a:p>
-        </p:txBody>
-      </p:sp>
-      <p:sp>
-        <p:nvSpPr>
-          <p:cNvPr id="5" name="TextBox 4"/>
-          <p:cNvSpPr txBox="1"/>
-          <p:nvPr/>
-        </p:nvSpPr>
-        <p:spPr>
-          <a:xfrm>
-            <a:off x="566928" y="5888736"/>
-            <a:ext cx="11057839" cy="329184"/>
-          </a:xfrm>
-          <a:prstGeom prst="rect">
-            <a:avLst/>
-          </a:prstGeom>
-          <a:noFill/>
-        </p:spPr>
-        <p:txBody>
-          <a:bodyPr wrap="square" lIns="0" rIns="0" tIns="0" bIns="0">
-            <a:noAutofit/>
-          </a:bodyPr>
-          <a:lstStyle/>
-          <a:p>
-            <a:pPr algn="l">
-              <a:spcBef>
-                <a:spcPts val="0"/>
-              </a:spcBef>
-              <a:spcAft>
-                <a:spcPts val="0"/>
-              </a:spcAft>
-            </a:pPr>
-            <a:r>
-              <a:rPr sz="1300" b="0" i="0">
-                <a:solidFill>
-                  <a:srgbClr val="6B7582"/>
-                </a:solidFill>
-                <a:latin typeface="Segoe UI"/>
-                <a:ea typeface="微软雅黑"/>
-              </a:rPr>
-              <a:t>没有"理解"，只有"在海量文本上学到的统计规律"</a:t>
-            </a:r>
-          </a:p>
-        </p:txBody>
-      </p:sp>
-      <p:sp>
-        <p:nvSpPr>
-          <p:cNvPr id="6" name="TextBox 5"/>
-          <p:cNvSpPr txBox="1"/>
-          <p:nvPr/>
-        </p:nvSpPr>
-        <p:spPr>
-          <a:xfrm>
-            <a:off x="566928" y="6327648"/>
-            <a:ext cx="8229600" cy="310896"/>
-          </a:xfrm>
-          <a:prstGeom prst="rect">
-            <a:avLst/>
-          </a:prstGeom>
-          <a:noFill/>
-        </p:spPr>
-        <p:txBody>
-          <a:bodyPr wrap="square" lIns="0" rIns="0" tIns="0" bIns="0">
-            <a:noAutofit/>
-          </a:bodyPr>
-          <a:lstStyle/>
-          <a:p>
-            <a:pPr algn="l">
-              <a:spcBef>
-                <a:spcPts val="0"/>
-              </a:spcBef>
-              <a:spcAft>
-                <a:spcPts val="0"/>
-              </a:spcAft>
-            </a:pPr>
-            <a:r>
-              <a:rPr sz="1000" b="0" i="0">
-                <a:solidFill>
-                  <a:srgbClr val="6B7582"/>
-                </a:solidFill>
-                <a:latin typeface="Segoe UI"/>
-                <a:ea typeface="微软雅黑"/>
-              </a:rPr>
-              <a:t>计算概论（B） · 第14周 · 闫宏飞 · 2026 Fall</a:t>
-            </a:r>
-          </a:p>
-        </p:txBody>
-      </p:sp>
-      <p:sp>
-        <p:nvSpPr>
-          <p:cNvPr id="7" name="TextBox 6"/>
-          <p:cNvSpPr txBox="1"/>
-          <p:nvPr/>
-        </p:nvSpPr>
-        <p:spPr>
-          <a:xfrm>
-            <a:off x="10710367" y="6327648"/>
-            <a:ext cx="914400" cy="310896"/>
-          </a:xfrm>
-          <a:prstGeom prst="rect">
-            <a:avLst/>
-          </a:prstGeom>
-          <a:noFill/>
-        </p:spPr>
-        <p:txBody>
-          <a:bodyPr wrap="square" lIns="0" rIns="0" tIns="0" bIns="0">
-            <a:noAutofit/>
-          </a:bodyPr>
-          <a:lstStyle/>
-          <a:p>
-            <a:pPr algn="r">
-              <a:spcBef>
-                <a:spcPts val="0"/>
-              </a:spcBef>
-              <a:spcAft>
-                <a:spcPts val="0"/>
-              </a:spcAft>
-            </a:pPr>
-            <a:r>
-              <a:rPr sz="1000" b="0" i="0">
-                <a:solidFill>
-                  <a:srgbClr val="6B7582"/>
-                </a:solidFill>
-                <a:latin typeface="Segoe UI"/>
-                <a:ea typeface="微软雅黑"/>
-              </a:rPr>
-              <a:t>3</a:t>
+              <a:t>33</a:t>
             </a:r>
           </a:p>
         </p:txBody>

--- a/courseware/202612_ADS_W14_AI_Literacy_Exam_Recap.pptx
+++ b/courseware/202612_ADS_W14_AI_Literacy_Exam_Recap.pptx
@@ -17654,7 +17654,7 @@
                 <a:latin typeface="Segoe UI"/>
                 <a:ea typeface="微软雅黑"/>
               </a:rPr>
-              <a:t>•  月考六题对应六个高频坑：</a:t>
+              <a:t>•  月考六题 → 六个高频坑（T1-T3）：</a:t>
             </a:r>
             <a:r>
               <a:rPr sz="2000" b="1" i="0">
@@ -17687,7 +17687,7 @@
                 <a:latin typeface="Segoe UI"/>
                 <a:ea typeface="微软雅黑"/>
               </a:rPr>
-              <a:t>•  　　　　　　　　　　　　</a:t>
+              <a:t>•  （T4-T6）：</a:t>
             </a:r>
             <a:r>
               <a:rPr sz="2000" b="1" i="0">

--- a/courseware/202612_ADS_W14_AI_Literacy_Exam_Recap.pptx
+++ b/courseware/202612_ADS_W14_AI_Literacy_Exam_Recap.pptx
@@ -5061,7 +5061,7 @@
                 <a:latin typeface="Segoe UI"/>
                 <a:ea typeface="微软雅黑"/>
               </a:rPr>
-              <a:t>6 题 / 112 分钟 / 100 分</a:t>
+              <a:t>6 题 / 112 分钟</a:t>
             </a:r>
           </a:p>
           <a:p>
@@ -5095,49 +5095,6 @@
                 <a:ea typeface="微软雅黑"/>
               </a:rPr>
               <a:t>大家为什么会错</a:t>
-            </a:r>
-          </a:p>
-          <a:p>
-            <a:pPr algn="l">
-              <a:lnSpc>
-                <a:spcPct val="132000"/>
-              </a:lnSpc>
-              <a:spcBef>
-                <a:spcPts val="0"/>
-              </a:spcBef>
-              <a:spcAft>
-                <a:spcPts val="1240"/>
-              </a:spcAft>
-            </a:pPr>
-            <a:r>
-              <a:rPr sz="2000" b="0" i="0">
-                <a:solidFill>
-                  <a:srgbClr val="242A33"/>
-                </a:solidFill>
-                <a:latin typeface="Segoe UI"/>
-                <a:ea typeface="微软雅黑"/>
-              </a:rPr>
-              <a:t>•  </a:t>
-            </a:r>
-            <a:r>
-              <a:rPr sz="2000" b="1" i="0">
-                <a:solidFill>
-                  <a:srgbClr val="12395B"/>
-                </a:solidFill>
-                <a:latin typeface="Segoe UI"/>
-                <a:ea typeface="微软雅黑"/>
-              </a:rPr>
-              <a:t>分值</a:t>
-            </a:r>
-            <a:r>
-              <a:rPr sz="2000" b="0" i="0">
-                <a:solidFill>
-                  <a:srgbClr val="242A33"/>
-                </a:solidFill>
-                <a:latin typeface="Segoe UI"/>
-                <a:ea typeface="微软雅黑"/>
-              </a:rPr>
-              <a:t>：T1 15 + T2 15 + T3 15 + T4 15 + T5 20 + T6 20 = 100 分</a:t>
             </a:r>
           </a:p>
           <a:p>
@@ -5327,7 +5284,7 @@
                 <a:latin typeface="Segoe UI"/>
                 <a:ea typeface="微软雅黑"/>
               </a:rPr>
-              <a:t>T1 课程互选统计（15 分）· 字典 + 排序</a:t>
+              <a:t>T1 课程互选统计· 字典 + 排序</a:t>
             </a:r>
           </a:p>
         </p:txBody>
@@ -6587,7 +6544,7 @@
                 <a:latin typeface="Segoe UI"/>
                 <a:ea typeface="微软雅黑"/>
               </a:rPr>
-              <a:t>T2 最优装载顺序（15 分）· 交换论证</a:t>
+              <a:t>T2 最优装载顺序· 交换论证</a:t>
             </a:r>
           </a:p>
         </p:txBody>
@@ -7914,7 +7871,7 @@
                 <a:latin typeface="Segoe UI"/>
                 <a:ea typeface="微软雅黑"/>
               </a:rPr>
-              <a:t>T3 网格中的宝藏（15 分）· 带状态 BFS（1/2）：定位与初始化</a:t>
+              <a:t>T3 网格中的宝藏· 带状态 BFS（1/2）：定位与初始化</a:t>
             </a:r>
           </a:p>
         </p:txBody>
@@ -10058,7 +10015,7 @@
                 <a:latin typeface="Segoe UI"/>
                 <a:ea typeface="微软雅黑"/>
               </a:rPr>
-              <a:t>T4 分组考试（15 分）· 区间划分 DP</a:t>
+              <a:t>T4 分组考试· 区间划分 DP</a:t>
             </a:r>
           </a:p>
         </p:txBody>
@@ -11526,7 +11483,7 @@
                 <a:latin typeface="Segoe UI"/>
                 <a:ea typeface="微软雅黑"/>
               </a:rPr>
-              <a:t>T5 书架分层（20 分）· 二分答案 + 贪心校验</a:t>
+              <a:t>T5 书架分层· 二分答案 + 贪心校验</a:t>
             </a:r>
           </a:p>
         </p:txBody>
@@ -12968,7 +12925,7 @@
                 <a:latin typeface="Segoe UI"/>
                 <a:ea typeface="微软雅黑"/>
               </a:rPr>
-              <a:t>T6 敌友阵营（20 分）· 扩展域并查集</a:t>
+              <a:t>T6 敌友阵营· 扩展域并查集</a:t>
             </a:r>
           </a:p>
         </p:txBody>
